--- a/classes/week_01_intro/lecture_01.pptx
+++ b/classes/week_01_intro/lecture_01.pptx
@@ -766,7 +766,7 @@
           <a:lstStyle/>
           <a:p>
             <a:r>
-              <a:t>Не зачитывать. Сказать: полный список с рабочими ссылками лежит в репозитории, файл docs/resources.md, там восемьдесят проверенных ссылок. Из этого слайда важнее всего левая колонка: без теории вероятностей нельзя понять, что означает результат.</a:t>
+              <a:t>Не зачитывать, названия кликабельны. Сказать: полный список с рабочими ссылками лежит в репозитории, файл docs/resources.md, там восемьдесят проверенных ссылок. Из этого слайда важнее всего левая колонка: без теории вероятностей нельзя понять, что означает результат.</a:t>
             </a:r>
           </a:p>
         </p:txBody>
@@ -3707,6 +3707,76 @@
           <a:p>
             <a:r>
               <a:t>Обе метрики смотрят только на нужный класс, поэтому редкость класса их не обманывает. Модель «все здоровы» из предыдущего слайда имеет recall ноль, и это сразу видно. Первая пара метрик курса, дальше их будет много. Главная мысль на весь семестр: метрику выбирает тот, кто понимает цену ошибки, а не тот, кто пишет код.</a:t>
+            </a:r>
+          </a:p>
+        </p:txBody>
+      </p:sp>
+      <p:sp>
+        <p:nvSpPr>
+          <p:cNvPr id="4" name="Slide Number Placeholder 3"/>
+          <p:cNvSpPr>
+            <a:spLocks noGrp="1"/>
+          </p:cNvSpPr>
+          <p:nvPr>
+            <p:ph type="sldNum" idx="5" sz="quarter"/>
+          </p:nvPr>
+        </p:nvSpPr>
+        <p:spPr/>
+      </p:sp>
+    </p:spTree>
+  </p:cSld>
+  <p:clrMapOvr>
+    <a:masterClrMapping/>
+  </p:clrMapOvr>
+</p:notes>
+</file>
+
+<file path=ppt/notesSlides/notesSlide51.xml><?xml version="1.0" encoding="utf-8"?>
+<p:notes xmlns:a="http://schemas.openxmlformats.org/drawingml/2006/main" xmlns:p="http://schemas.openxmlformats.org/presentationml/2006/main" xmlns:r="http://schemas.openxmlformats.org/officeDocument/2006/relationships">
+  <p:cSld>
+    <p:spTree>
+      <p:nvGrpSpPr>
+        <p:cNvPr id="1" name=""/>
+        <p:cNvGrpSpPr/>
+        <p:nvPr/>
+      </p:nvGrpSpPr>
+      <p:grpSpPr>
+        <a:xfrm>
+          <a:off x="0" y="0"/>
+          <a:ext cx="0" cy="0"/>
+          <a:chOff x="0" y="0"/>
+          <a:chExt cx="0" cy="0"/>
+        </a:xfrm>
+      </p:grpSpPr>
+      <p:sp>
+        <p:nvSpPr>
+          <p:cNvPr id="2" name="Slide Image Placeholder 1"/>
+          <p:cNvSpPr>
+            <a:spLocks noGrp="1"/>
+          </p:cNvSpPr>
+          <p:nvPr>
+            <p:ph type="sldImg" idx="2"/>
+          </p:nvPr>
+        </p:nvSpPr>
+        <p:spPr/>
+      </p:sp>
+      <p:sp>
+        <p:nvSpPr>
+          <p:cNvPr id="3" name="Notes Placeholder 2"/>
+          <p:cNvSpPr>
+            <a:spLocks noGrp="1"/>
+          </p:cNvSpPr>
+          <p:nvPr>
+            <p:ph type="body" idx="3" sz="quarter"/>
+          </p:nvPr>
+        </p:nvSpPr>
+        <p:spPr/>
+        <p:txBody>
+          <a:bodyPr/>
+          <a:lstStyle/>
+          <a:p>
+            <a:r>
+              <a:t>Первая ссылка обязательна: следующее занятие целиком про линейные модели, и без нее будет тяжело. Вторая по желанию, это тот же материал, что был сегодня, но другими словами — полезно, если что-то не улеглось.</a:t>
             </a:r>
           </a:p>
         </p:txBody>
@@ -10279,11 +10349,12 @@
               <a:buNone/>
             </a:pPr>
             <a:r>
-              <a:rPr sz="1400" b="1">
-                <a:solidFill>
-                  <a:srgbClr val="0F1418"/>
-                </a:solidFill>
-                <a:latin typeface="Arial"/>
+              <a:rPr sz="1400" b="1" u="sng">
+                <a:solidFill>
+                  <a:srgbClr val="0072CE"/>
+                </a:solidFill>
+                <a:latin typeface="Arial"/>
+                <a:hlinkClick r:id="rId2"/>
               </a:rPr>
               <a:t>Теория вероятностей, МФТИ</a:t>
             </a:r>
@@ -10359,11 +10430,12 @@
               <a:buNone/>
             </a:pPr>
             <a:r>
-              <a:rPr sz="1400" b="1">
-                <a:solidFill>
-                  <a:srgbClr val="0F1418"/>
-                </a:solidFill>
-                <a:latin typeface="Arial"/>
+              <a:rPr sz="1400" b="1" u="sng">
+                <a:solidFill>
+                  <a:srgbClr val="0072CE"/>
+                </a:solidFill>
+                <a:latin typeface="Arial"/>
+                <a:hlinkClick r:id="rId3"/>
               </a:rPr>
               <a:t>Основы статистики</a:t>
             </a:r>
@@ -10405,7 +10477,7 @@
                 </a:solidFill>
                 <a:latin typeface="Arial"/>
               </a:rPr>
-              <a:t>Карпов, stepik.org/course/76</a:t>
+              <a:t>Карпов, Stepik</a:t>
             </a:r>
           </a:p>
         </p:txBody>
@@ -10439,11 +10511,12 @@
               <a:buNone/>
             </a:pPr>
             <a:r>
-              <a:rPr sz="1400" b="1">
-                <a:solidFill>
-                  <a:srgbClr val="0F1418"/>
-                </a:solidFill>
-                <a:latin typeface="Arial"/>
+              <a:rPr sz="1400" b="1" u="sng">
+                <a:solidFill>
+                  <a:srgbClr val="0072CE"/>
+                </a:solidFill>
+                <a:latin typeface="Arial"/>
+                <a:hlinkClick r:id="rId4"/>
               </a:rPr>
               <a:t>Математика для анализа данных</a:t>
             </a:r>
@@ -10485,7 +10558,7 @@
                 </a:solidFill>
                 <a:latin typeface="Arial"/>
               </a:rPr>
-              <a:t>education.yandex.ru</a:t>
+              <a:t>учебник Яндекса</a:t>
             </a:r>
           </a:p>
         </p:txBody>
@@ -10519,11 +10592,12 @@
               <a:buNone/>
             </a:pPr>
             <a:r>
-              <a:rPr sz="1400" b="1">
-                <a:solidFill>
-                  <a:srgbClr val="0F1418"/>
-                </a:solidFill>
-                <a:latin typeface="Arial"/>
+              <a:rPr sz="1400" b="1" u="sng">
+                <a:solidFill>
+                  <a:srgbClr val="0072CE"/>
+                </a:solidFill>
+                <a:latin typeface="Arial"/>
+                <a:hlinkClick r:id="rId5"/>
               </a:rPr>
               <a:t>Байесовские методы в ML</a:t>
             </a:r>
@@ -10639,11 +10713,12 @@
               <a:buNone/>
             </a:pPr>
             <a:r>
-              <a:rPr sz="1400" b="1">
-                <a:solidFill>
-                  <a:srgbClr val="0F1418"/>
-                </a:solidFill>
-                <a:latin typeface="Arial"/>
+              <a:rPr sz="1400" b="1" u="sng">
+                <a:solidFill>
+                  <a:srgbClr val="0072CE"/>
+                </a:solidFill>
+                <a:latin typeface="Arial"/>
+                <a:hlinkClick r:id="rId6"/>
               </a:rPr>
               <a:t>Учебник ШАД</a:t>
             </a:r>
@@ -10719,11 +10794,12 @@
               <a:buNone/>
             </a:pPr>
             <a:r>
-              <a:rPr sz="1400" b="1">
-                <a:solidFill>
-                  <a:srgbClr val="0F1418"/>
-                </a:solidFill>
-                <a:latin typeface="Arial"/>
+              <a:rPr sz="1400" b="1" u="sng">
+                <a:solidFill>
+                  <a:srgbClr val="0072CE"/>
+                </a:solidFill>
+                <a:latin typeface="Arial"/>
+                <a:hlinkClick r:id="rId7"/>
               </a:rPr>
               <a:t>Курс Соколова, ВШЭ</a:t>
             </a:r>
@@ -10765,7 +10841,7 @@
                 </a:solidFill>
                 <a:latin typeface="Arial"/>
               </a:rPr>
-              <a:t>github.com/esokolov</a:t>
+              <a:t>конспекты и домашки</a:t>
             </a:r>
           </a:p>
         </p:txBody>
@@ -10799,11 +10875,12 @@
               <a:buNone/>
             </a:pPr>
             <a:r>
-              <a:rPr sz="1400" b="1">
-                <a:solidFill>
-                  <a:srgbClr val="0F1418"/>
-                </a:solidFill>
-                <a:latin typeface="Arial"/>
+              <a:rPr sz="1400" b="1" u="sng">
+                <a:solidFill>
+                  <a:srgbClr val="0072CE"/>
+                </a:solidFill>
+                <a:latin typeface="Arial"/>
+                <a:hlinkClick r:id="rId8"/>
               </a:rPr>
               <a:t>Stanford CS229</a:t>
             </a:r>
@@ -10845,7 +10922,7 @@
                 </a:solidFill>
                 <a:latin typeface="Arial"/>
               </a:rPr>
-              <a:t>cs229.stanford.edu</a:t>
+              <a:t>классика, на английском</a:t>
             </a:r>
           </a:p>
         </p:txBody>
@@ -10879,11 +10956,12 @@
               <a:buNone/>
             </a:pPr>
             <a:r>
-              <a:rPr sz="1400" b="1">
-                <a:solidFill>
-                  <a:srgbClr val="0F1418"/>
-                </a:solidFill>
-                <a:latin typeface="Arial"/>
+              <a:rPr sz="1400" b="1" u="sng">
+                <a:solidFill>
+                  <a:srgbClr val="0072CE"/>
+                </a:solidFill>
+                <a:latin typeface="Arial"/>
+                <a:hlinkClick r:id="rId9"/>
               </a:rPr>
               <a:t>Statistical Rethinking</a:t>
             </a:r>
@@ -11225,11 +11303,12 @@
               <a:buNone/>
             </a:pPr>
             <a:r>
-              <a:rPr sz="1400" b="1">
-                <a:solidFill>
-                  <a:srgbClr val="0F1418"/>
-                </a:solidFill>
-                <a:latin typeface="Arial"/>
+              <a:rPr sz="1400" b="1" u="sng">
+                <a:solidFill>
+                  <a:srgbClr val="0072CE"/>
+                </a:solidFill>
+                <a:latin typeface="Arial"/>
+                <a:hlinkClick r:id="rId2"/>
               </a:rPr>
               <a:t>Deep Learning School</a:t>
             </a:r>
@@ -11271,7 +11350,7 @@
                 </a:solidFill>
                 <a:latin typeface="Arial"/>
               </a:rPr>
-              <a:t>МФТИ, dls.samcs.ru</a:t>
+              <a:t>МФТИ, свой курс</a:t>
             </a:r>
           </a:p>
         </p:txBody>
@@ -11305,11 +11384,12 @@
               <a:buNone/>
             </a:pPr>
             <a:r>
-              <a:rPr sz="1400" b="1">
-                <a:solidFill>
-                  <a:srgbClr val="0F1418"/>
-                </a:solidFill>
-                <a:latin typeface="Arial"/>
+              <a:rPr sz="1400" b="1" u="sng">
+                <a:solidFill>
+                  <a:srgbClr val="0072CE"/>
+                </a:solidFill>
+                <a:latin typeface="Arial"/>
+                <a:hlinkClick r:id="rId3"/>
               </a:rPr>
               <a:t>Deep learning на пальцах</a:t>
             </a:r>
@@ -11351,7 +11431,7 @@
                 </a:solidFill>
                 <a:latin typeface="Arial"/>
               </a:rPr>
-              <a:t>Козлов, dlcourse.ai</a:t>
+              <a:t>Козлов</a:t>
             </a:r>
           </a:p>
         </p:txBody>
@@ -11385,11 +11465,12 @@
               <a:buNone/>
             </a:pPr>
             <a:r>
-              <a:rPr sz="1400" b="1">
-                <a:solidFill>
-                  <a:srgbClr val="0F1418"/>
-                </a:solidFill>
-                <a:latin typeface="Arial"/>
+              <a:rPr sz="1400" b="1" u="sng">
+                <a:solidFill>
+                  <a:srgbClr val="0072CE"/>
+                </a:solidFill>
+                <a:latin typeface="Arial"/>
+                <a:hlinkClick r:id="rId4"/>
               </a:rPr>
               <a:t>Stanford CS231n</a:t>
             </a:r>
@@ -11431,7 +11512,7 @@
                 </a:solidFill>
                 <a:latin typeface="Arial"/>
               </a:rPr>
-              <a:t>cs231n.stanford.edu</a:t>
+              <a:t>зрение, версия 2025</a:t>
             </a:r>
           </a:p>
         </p:txBody>
@@ -11465,11 +11546,12 @@
               <a:buNone/>
             </a:pPr>
             <a:r>
-              <a:rPr sz="1400" b="1">
-                <a:solidFill>
-                  <a:srgbClr val="0F1418"/>
-                </a:solidFill>
-                <a:latin typeface="Arial"/>
+              <a:rPr sz="1400" b="1" u="sng">
+                <a:solidFill>
+                  <a:srgbClr val="0072CE"/>
+                </a:solidFill>
+                <a:latin typeface="Arial"/>
+                <a:hlinkClick r:id="rId5"/>
               </a:rPr>
               <a:t>Zero to Hero</a:t>
             </a:r>
@@ -11585,11 +11667,12 @@
               <a:buNone/>
             </a:pPr>
             <a:r>
-              <a:rPr sz="1400" b="1">
-                <a:solidFill>
-                  <a:srgbClr val="0F1418"/>
-                </a:solidFill>
-                <a:latin typeface="Arial"/>
+              <a:rPr sz="1400" b="1" u="sng">
+                <a:solidFill>
+                  <a:srgbClr val="0072CE"/>
+                </a:solidFill>
+                <a:latin typeface="Arial"/>
+                <a:hlinkClick r:id="rId6"/>
               </a:rPr>
               <a:t>NLP Course For You</a:t>
             </a:r>
@@ -11631,7 +11714,7 @@
                 </a:solidFill>
                 <a:latin typeface="Arial"/>
               </a:rPr>
-              <a:t>Войта, lena-voita.github.io</a:t>
+              <a:t>Войта, лучший про внимание</a:t>
             </a:r>
           </a:p>
         </p:txBody>
@@ -11665,11 +11748,12 @@
               <a:buNone/>
             </a:pPr>
             <a:r>
-              <a:rPr sz="1400" b="1">
-                <a:solidFill>
-                  <a:srgbClr val="0F1418"/>
-                </a:solidFill>
-                <a:latin typeface="Arial"/>
+              <a:rPr sz="1400" b="1" u="sng">
+                <a:solidFill>
+                  <a:srgbClr val="0072CE"/>
+                </a:solidFill>
+                <a:latin typeface="Arial"/>
+                <a:hlinkClick r:id="rId7"/>
               </a:rPr>
               <a:t>Speech course, ШАД</a:t>
             </a:r>
@@ -11711,7 +11795,7 @@
                 </a:solidFill>
                 <a:latin typeface="Arial"/>
               </a:rPr>
-              <a:t>github.com/yandexdataschool</a:t>
+              <a:t>до диалоговых моделей</a:t>
             </a:r>
           </a:p>
         </p:txBody>
@@ -11745,11 +11829,12 @@
               <a:buNone/>
             </a:pPr>
             <a:r>
-              <a:rPr sz="1400" b="1">
-                <a:solidFill>
-                  <a:srgbClr val="0F1418"/>
-                </a:solidFill>
-                <a:latin typeface="Arial"/>
+              <a:rPr sz="1400" b="1" u="sng">
+                <a:solidFill>
+                  <a:srgbClr val="0072CE"/>
+                </a:solidFill>
+                <a:latin typeface="Arial"/>
+                <a:hlinkClick r:id="rId8"/>
               </a:rPr>
               <a:t>Трек Speech, DLS МФТИ</a:t>
             </a:r>
@@ -11791,7 +11876,7 @@
                 </a:solidFill>
                 <a:latin typeface="Arial"/>
               </a:rPr>
-              <a:t>26 видео</a:t>
+              <a:t>26 видео, есть аудио и LLM</a:t>
             </a:r>
           </a:p>
         </p:txBody>
@@ -11825,11 +11910,12 @@
               <a:buNone/>
             </a:pPr>
             <a:r>
-              <a:rPr sz="1400" b="1">
-                <a:solidFill>
-                  <a:srgbClr val="0F1418"/>
-                </a:solidFill>
-                <a:latin typeface="Arial"/>
+              <a:rPr sz="1400" b="1" u="sng">
+                <a:solidFill>
+                  <a:srgbClr val="0072CE"/>
+                </a:solidFill>
+                <a:latin typeface="Arial"/>
+                <a:hlinkClick r:id="rId9"/>
               </a:rPr>
               <a:t>CMU 11-777, Multimodal</a:t>
             </a:r>
@@ -11945,11 +12031,12 @@
               <a:buNone/>
             </a:pPr>
             <a:r>
-              <a:rPr sz="1400" b="1">
-                <a:solidFill>
-                  <a:srgbClr val="0F1418"/>
-                </a:solidFill>
-                <a:latin typeface="Arial"/>
+              <a:rPr sz="1400" b="1" u="sng">
+                <a:solidFill>
+                  <a:srgbClr val="0072CE"/>
+                </a:solidFill>
+                <a:latin typeface="Arial"/>
+                <a:hlinkClick r:id="rId10"/>
               </a:rPr>
               <a:t>MLOps Zoomcamp</a:t>
             </a:r>
@@ -11991,7 +12078,7 @@
                 </a:solidFill>
                 <a:latin typeface="Arial"/>
               </a:rPr>
-              <a:t>github.com/DataTalksClub</a:t>
+              <a:t>от эксперимента до деплоя</a:t>
             </a:r>
           </a:p>
         </p:txBody>
@@ -12025,11 +12112,12 @@
               <a:buNone/>
             </a:pPr>
             <a:r>
-              <a:rPr sz="1400" b="1">
-                <a:solidFill>
-                  <a:srgbClr val="0F1418"/>
-                </a:solidFill>
-                <a:latin typeface="Arial"/>
+              <a:rPr sz="1400" b="1" u="sng">
+                <a:solidFill>
+                  <a:srgbClr val="0072CE"/>
+                </a:solidFill>
+                <a:latin typeface="Arial"/>
+                <a:hlinkClick r:id="rId11"/>
               </a:rPr>
               <a:t>Made With ML</a:t>
             </a:r>
@@ -12071,7 +12159,7 @@
                 </a:solidFill>
                 <a:latin typeface="Arial"/>
               </a:rPr>
-              <a:t>madewithml.com</a:t>
+              <a:t>тесты, CI, оркестрация</a:t>
             </a:r>
           </a:p>
         </p:txBody>
@@ -12105,11 +12193,12 @@
               <a:buNone/>
             </a:pPr>
             <a:r>
-              <a:rPr sz="1400" b="1">
-                <a:solidFill>
-                  <a:srgbClr val="0F1418"/>
-                </a:solidFill>
-                <a:latin typeface="Arial"/>
+              <a:rPr sz="1400" b="1" u="sng">
+                <a:solidFill>
+                  <a:srgbClr val="0072CE"/>
+                </a:solidFill>
+                <a:latin typeface="Arial"/>
+                <a:hlinkClick r:id="rId12"/>
               </a:rPr>
               <a:t>CS329S, ML Systems</a:t>
             </a:r>
@@ -12151,7 +12240,7 @@
                 </a:solidFill>
                 <a:latin typeface="Arial"/>
               </a:rPr>
-              <a:t>stanford-cs329s.github.io</a:t>
+              <a:t>проектирование систем</a:t>
             </a:r>
           </a:p>
         </p:txBody>
@@ -26480,8 +26569,8 @@
         </p:blipFill>
         <p:spPr>
           <a:xfrm>
-            <a:off x="9448495" y="2194560"/>
-            <a:ext cx="1828800" cy="1828800"/>
+            <a:off x="9631375" y="1371600"/>
+            <a:ext cx="1645920" cy="1645920"/>
           </a:xfrm>
           <a:prstGeom prst="rect">
             <a:avLst/>
@@ -26496,8 +26585,8 @@
         </p:nvSpPr>
         <p:spPr>
           <a:xfrm>
-            <a:off x="822960" y="2194560"/>
-            <a:ext cx="9601200" cy="914400"/>
+            <a:off x="822960" y="1463040"/>
+            <a:ext cx="8229600" cy="914400"/>
           </a:xfrm>
           <a:prstGeom prst="rect">
             <a:avLst/>
@@ -26536,118 +26625,413 @@
         </p:nvSpPr>
         <p:spPr>
           <a:xfrm>
-            <a:off x="822960" y="3474720"/>
-            <a:ext cx="9601200" cy="2011680"/>
-          </a:xfrm>
-          <a:prstGeom prst="rect">
-            <a:avLst/>
-          </a:prstGeom>
-          <a:noFill/>
-        </p:spPr>
-        <p:txBody>
-          <a:bodyPr wrap="square" lIns="0" rIns="0" tIns="0" bIns="0">
-            <a:spAutoFit/>
-          </a:bodyPr>
-          <a:lstStyle/>
-          <a:p>
-            <a:pPr marL="228600" indent="-228600">
-              <a:lnSpc>
-                <a:spcPct val="135000"/>
-              </a:lnSpc>
-              <a:spcAft>
-                <a:spcPts val="1000"/>
-              </a:spcAft>
-              <a:buClr>
-                <a:srgbClr val="0072CE"/>
-              </a:buClr>
-              <a:buSzPts val="1240"/>
-              <a:buFont typeface="Arial"/>
-              <a:buChar char="▪"/>
-            </a:pPr>
-            <a:r>
-              <a:rPr sz="2000">
+            <a:off x="1115568" y="2834640"/>
+            <a:ext cx="8778240" cy="384048"/>
+          </a:xfrm>
+          <a:prstGeom prst="rect">
+            <a:avLst/>
+          </a:prstGeom>
+          <a:noFill/>
+        </p:spPr>
+        <p:txBody>
+          <a:bodyPr wrap="square" anchor="t" lIns="0" rIns="0" tIns="0" bIns="0">
+            <a:spAutoFit/>
+          </a:bodyPr>
+          <a:lstStyle/>
+          <a:p>
+            <a:pPr algn="l">
+              <a:lnSpc>
+                <a:spcPct val="115000"/>
+              </a:lnSpc>
+              <a:buNone/>
+            </a:pPr>
+            <a:r>
+              <a:rPr sz="1900" b="0" u="sng">
+                <a:solidFill>
+                  <a:srgbClr val="4DA3E0"/>
+                </a:solidFill>
+                <a:latin typeface="Arial"/>
+                <a:hlinkClick r:id="rId3"/>
+              </a:rPr>
+              <a:t>Линейная регрессия, лекция 2 Лектория ФПМИ — обязательно</a:t>
+            </a:r>
+          </a:p>
+        </p:txBody>
+      </p:sp>
+      <p:sp>
+        <p:nvSpPr>
+          <p:cNvPr id="7" name="Rectangle 6"/>
+          <p:cNvSpPr/>
+          <p:nvPr/>
+        </p:nvSpPr>
+        <p:spPr>
+          <a:xfrm>
+            <a:off x="822960" y="2916936"/>
+            <a:ext cx="114300" cy="114300"/>
+          </a:xfrm>
+          <a:prstGeom prst="rect">
+            <a:avLst/>
+          </a:prstGeom>
+          <a:solidFill>
+            <a:srgbClr val="0072CE"/>
+          </a:solidFill>
+          <a:ln>
+            <a:noFill/>
+          </a:ln>
+          <a:effectLst/>
+        </p:spPr>
+        <p:style>
+          <a:lnRef idx="1">
+            <a:schemeClr val="accent1"/>
+          </a:lnRef>
+          <a:fillRef idx="3">
+            <a:schemeClr val="accent1"/>
+          </a:fillRef>
+          <a:effectRef idx="2">
+            <a:schemeClr val="accent1"/>
+          </a:effectRef>
+          <a:fontRef idx="minor">
+            <a:schemeClr val="lt1"/>
+          </a:fontRef>
+        </p:style>
+        <p:txBody>
+          <a:bodyPr rtlCol="0" anchor="ctr"/>
+          <a:lstStyle/>
+          <a:p>
+            <a:pPr algn="ctr"/>
+          </a:p>
+        </p:txBody>
+      </p:sp>
+      <p:sp>
+        <p:nvSpPr>
+          <p:cNvPr id="8" name="TextBox 7"/>
+          <p:cNvSpPr txBox="1"/>
+          <p:nvPr/>
+        </p:nvSpPr>
+        <p:spPr>
+          <a:xfrm>
+            <a:off x="1115568" y="3182112"/>
+            <a:ext cx="8778240" cy="274320"/>
+          </a:xfrm>
+          <a:prstGeom prst="rect">
+            <a:avLst/>
+          </a:prstGeom>
+          <a:noFill/>
+        </p:spPr>
+        <p:txBody>
+          <a:bodyPr wrap="square" anchor="t" lIns="0" rIns="0" tIns="0" bIns="0">
+            <a:spAutoFit/>
+          </a:bodyPr>
+          <a:lstStyle/>
+          <a:p>
+            <a:pPr algn="l">
+              <a:lnSpc>
+                <a:spcPct val="100000"/>
+              </a:lnSpc>
+              <a:buNone/>
+            </a:pPr>
+            <a:r>
+              <a:rPr sz="1000" b="0">
+                <a:solidFill>
+                  <a:srgbClr val="6B7280"/>
+                </a:solidFill>
+                <a:latin typeface="Menlo"/>
+              </a:rPr>
+              <a:t>https://www.youtube.com/watch?v=GKIkGc2bnmU</a:t>
+            </a:r>
+          </a:p>
+        </p:txBody>
+      </p:sp>
+      <p:sp>
+        <p:nvSpPr>
+          <p:cNvPr id="9" name="TextBox 8"/>
+          <p:cNvSpPr txBox="1"/>
+          <p:nvPr/>
+        </p:nvSpPr>
+        <p:spPr>
+          <a:xfrm>
+            <a:off x="1115568" y="3584448"/>
+            <a:ext cx="8778240" cy="384048"/>
+          </a:xfrm>
+          <a:prstGeom prst="rect">
+            <a:avLst/>
+          </a:prstGeom>
+          <a:noFill/>
+        </p:spPr>
+        <p:txBody>
+          <a:bodyPr wrap="square" anchor="t" lIns="0" rIns="0" tIns="0" bIns="0">
+            <a:spAutoFit/>
+          </a:bodyPr>
+          <a:lstStyle/>
+          <a:p>
+            <a:pPr algn="l">
+              <a:lnSpc>
+                <a:spcPct val="115000"/>
+              </a:lnSpc>
+              <a:buNone/>
+            </a:pPr>
+            <a:r>
+              <a:rPr sz="1900" b="0" u="sng">
+                <a:solidFill>
+                  <a:srgbClr val="4DA3E0"/>
+                </a:solidFill>
+                <a:latin typeface="Arial"/>
+                <a:hlinkClick r:id="rId4"/>
+              </a:rPr>
+              <a:t>Naive Bayes и kNN, лекция 1 — повтор сегодняшнего, по желанию</a:t>
+            </a:r>
+          </a:p>
+        </p:txBody>
+      </p:sp>
+      <p:sp>
+        <p:nvSpPr>
+          <p:cNvPr id="10" name="Rectangle 9"/>
+          <p:cNvSpPr/>
+          <p:nvPr/>
+        </p:nvSpPr>
+        <p:spPr>
+          <a:xfrm>
+            <a:off x="822960" y="3666744"/>
+            <a:ext cx="114300" cy="114300"/>
+          </a:xfrm>
+          <a:prstGeom prst="rect">
+            <a:avLst/>
+          </a:prstGeom>
+          <a:solidFill>
+            <a:srgbClr val="0072CE"/>
+          </a:solidFill>
+          <a:ln>
+            <a:noFill/>
+          </a:ln>
+          <a:effectLst/>
+        </p:spPr>
+        <p:style>
+          <a:lnRef idx="1">
+            <a:schemeClr val="accent1"/>
+          </a:lnRef>
+          <a:fillRef idx="3">
+            <a:schemeClr val="accent1"/>
+          </a:fillRef>
+          <a:effectRef idx="2">
+            <a:schemeClr val="accent1"/>
+          </a:effectRef>
+          <a:fontRef idx="minor">
+            <a:schemeClr val="lt1"/>
+          </a:fontRef>
+        </p:style>
+        <p:txBody>
+          <a:bodyPr rtlCol="0" anchor="ctr"/>
+          <a:lstStyle/>
+          <a:p>
+            <a:pPr algn="ctr"/>
+          </a:p>
+        </p:txBody>
+      </p:sp>
+      <p:sp>
+        <p:nvSpPr>
+          <p:cNvPr id="11" name="TextBox 10"/>
+          <p:cNvSpPr txBox="1"/>
+          <p:nvPr/>
+        </p:nvSpPr>
+        <p:spPr>
+          <a:xfrm>
+            <a:off x="1115568" y="3931920"/>
+            <a:ext cx="8778240" cy="274320"/>
+          </a:xfrm>
+          <a:prstGeom prst="rect">
+            <a:avLst/>
+          </a:prstGeom>
+          <a:noFill/>
+        </p:spPr>
+        <p:txBody>
+          <a:bodyPr wrap="square" anchor="t" lIns="0" rIns="0" tIns="0" bIns="0">
+            <a:spAutoFit/>
+          </a:bodyPr>
+          <a:lstStyle/>
+          <a:p>
+            <a:pPr algn="l">
+              <a:lnSpc>
+                <a:spcPct val="100000"/>
+              </a:lnSpc>
+              <a:buNone/>
+            </a:pPr>
+            <a:r>
+              <a:rPr sz="1000" b="0">
+                <a:solidFill>
+                  <a:srgbClr val="6B7280"/>
+                </a:solidFill>
+                <a:latin typeface="Menlo"/>
+              </a:rPr>
+              <a:t>https://www.youtube.com/watch?v=8s9073kNXgY</a:t>
+            </a:r>
+          </a:p>
+        </p:txBody>
+      </p:sp>
+      <p:sp>
+        <p:nvSpPr>
+          <p:cNvPr id="12" name="TextBox 11"/>
+          <p:cNvSpPr txBox="1"/>
+          <p:nvPr/>
+        </p:nvSpPr>
+        <p:spPr>
+          <a:xfrm>
+            <a:off x="1115568" y="4334256"/>
+            <a:ext cx="8778240" cy="384048"/>
+          </a:xfrm>
+          <a:prstGeom prst="rect">
+            <a:avLst/>
+          </a:prstGeom>
+          <a:noFill/>
+        </p:spPr>
+        <p:txBody>
+          <a:bodyPr wrap="square" anchor="t" lIns="0" rIns="0" tIns="0" bIns="0">
+            <a:spAutoFit/>
+          </a:bodyPr>
+          <a:lstStyle/>
+          <a:p>
+            <a:pPr algn="l">
+              <a:lnSpc>
+                <a:spcPct val="115000"/>
+              </a:lnSpc>
+              <a:buNone/>
+            </a:pPr>
+            <a:r>
+              <a:rPr sz="1900" b="0">
                 <a:solidFill>
                   <a:srgbClr val="FFFFFF"/>
                 </a:solidFill>
                 <a:latin typeface="Arial"/>
               </a:rPr>
-              <a:t>Посмотреть лекции 2 и 3 из «Тренировок по ML», ссылки в репозитории</a:t>
-            </a:r>
-          </a:p>
-          <a:p>
-            <a:pPr marL="228600" indent="-228600">
-              <a:lnSpc>
-                <a:spcPct val="135000"/>
-              </a:lnSpc>
-              <a:spcAft>
-                <a:spcPts val="1000"/>
-              </a:spcAft>
-              <a:buClr>
-                <a:srgbClr val="0072CE"/>
-              </a:buClr>
-              <a:buSzPts val="1240"/>
-              <a:buFont typeface="Arial"/>
-              <a:buChar char="▪"/>
-            </a:pPr>
-            <a:r>
-              <a:rPr sz="2000">
+              <a:t>Завести аккаунт на Hugging Face</a:t>
+            </a:r>
+          </a:p>
+        </p:txBody>
+      </p:sp>
+      <p:sp>
+        <p:nvSpPr>
+          <p:cNvPr id="13" name="Rectangle 12"/>
+          <p:cNvSpPr/>
+          <p:nvPr/>
+        </p:nvSpPr>
+        <p:spPr>
+          <a:xfrm>
+            <a:off x="822960" y="4416552"/>
+            <a:ext cx="114300" cy="114300"/>
+          </a:xfrm>
+          <a:prstGeom prst="rect">
+            <a:avLst/>
+          </a:prstGeom>
+          <a:solidFill>
+            <a:srgbClr val="0072CE"/>
+          </a:solidFill>
+          <a:ln>
+            <a:noFill/>
+          </a:ln>
+          <a:effectLst/>
+        </p:spPr>
+        <p:style>
+          <a:lnRef idx="1">
+            <a:schemeClr val="accent1"/>
+          </a:lnRef>
+          <a:fillRef idx="3">
+            <a:schemeClr val="accent1"/>
+          </a:fillRef>
+          <a:effectRef idx="2">
+            <a:schemeClr val="accent1"/>
+          </a:effectRef>
+          <a:fontRef idx="minor">
+            <a:schemeClr val="lt1"/>
+          </a:fontRef>
+        </p:style>
+        <p:txBody>
+          <a:bodyPr rtlCol="0" anchor="ctr"/>
+          <a:lstStyle/>
+          <a:p>
+            <a:pPr algn="ctr"/>
+          </a:p>
+        </p:txBody>
+      </p:sp>
+      <p:sp>
+        <p:nvSpPr>
+          <p:cNvPr id="14" name="TextBox 13"/>
+          <p:cNvSpPr txBox="1"/>
+          <p:nvPr/>
+        </p:nvSpPr>
+        <p:spPr>
+          <a:xfrm>
+            <a:off x="1115568" y="4882896"/>
+            <a:ext cx="8778240" cy="384048"/>
+          </a:xfrm>
+          <a:prstGeom prst="rect">
+            <a:avLst/>
+          </a:prstGeom>
+          <a:noFill/>
+        </p:spPr>
+        <p:txBody>
+          <a:bodyPr wrap="square" anchor="t" lIns="0" rIns="0" tIns="0" bIns="0">
+            <a:spAutoFit/>
+          </a:bodyPr>
+          <a:lstStyle/>
+          <a:p>
+            <a:pPr algn="l">
+              <a:lnSpc>
+                <a:spcPct val="115000"/>
+              </a:lnSpc>
+              <a:buNone/>
+            </a:pPr>
+            <a:r>
+              <a:rPr sz="1900" b="0">
                 <a:solidFill>
                   <a:srgbClr val="FFFFFF"/>
                 </a:solidFill>
                 <a:latin typeface="Arial"/>
               </a:rPr>
-              <a:t>Завести аккаунт на Hugging Face</a:t>
-            </a:r>
-          </a:p>
-          <a:p>
-            <a:pPr marL="228600" indent="-228600">
-              <a:lnSpc>
-                <a:spcPct val="135000"/>
-              </a:lnSpc>
-              <a:spcAft>
-                <a:spcPts val="1000"/>
-              </a:spcAft>
-              <a:buClr>
-                <a:srgbClr val="0072CE"/>
-              </a:buClr>
-              <a:buSzPts val="1240"/>
-              <a:buFont typeface="Arial"/>
-              <a:buChar char="▪"/>
-            </a:pPr>
-            <a:r>
-              <a:rPr sz="2000">
-                <a:solidFill>
-                  <a:srgbClr val="FFFFFF"/>
-                </a:solidFill>
-                <a:latin typeface="Arial"/>
-              </a:rPr>
-              <a:t>Поставить окружение и проверить командой из README</a:t>
-            </a:r>
-          </a:p>
-          <a:p>
-            <a:pPr marL="228600" indent="-228600">
-              <a:lnSpc>
-                <a:spcPct val="135000"/>
-              </a:lnSpc>
-              <a:spcAft>
-                <a:spcPts val="1000"/>
-              </a:spcAft>
-              <a:buClr>
-                <a:srgbClr val="0072CE"/>
-              </a:buClr>
-              <a:buSzPts val="1240"/>
-              <a:buFont typeface="Arial"/>
-              <a:buChar char="▪"/>
-            </a:pPr>
-            <a:r>
-              <a:rPr sz="2000">
-                <a:solidFill>
-                  <a:srgbClr val="FFFFFF"/>
-                </a:solidFill>
-                <a:latin typeface="Arial"/>
-              </a:rPr>
-              <a:t>Доделать лабораторную и прислать</a:t>
-            </a:r>
+              <a:t>Доделать лабораторную и прислать в чат</a:t>
+            </a:r>
+          </a:p>
+        </p:txBody>
+      </p:sp>
+      <p:sp>
+        <p:nvSpPr>
+          <p:cNvPr id="15" name="Rectangle 14"/>
+          <p:cNvSpPr/>
+          <p:nvPr/>
+        </p:nvSpPr>
+        <p:spPr>
+          <a:xfrm>
+            <a:off x="822960" y="4965192"/>
+            <a:ext cx="114300" cy="114300"/>
+          </a:xfrm>
+          <a:prstGeom prst="rect">
+            <a:avLst/>
+          </a:prstGeom>
+          <a:solidFill>
+            <a:srgbClr val="0072CE"/>
+          </a:solidFill>
+          <a:ln>
+            <a:noFill/>
+          </a:ln>
+          <a:effectLst/>
+        </p:spPr>
+        <p:style>
+          <a:lnRef idx="1">
+            <a:schemeClr val="accent1"/>
+          </a:lnRef>
+          <a:fillRef idx="3">
+            <a:schemeClr val="accent1"/>
+          </a:fillRef>
+          <a:effectRef idx="2">
+            <a:schemeClr val="accent1"/>
+          </a:effectRef>
+          <a:fontRef idx="minor">
+            <a:schemeClr val="lt1"/>
+          </a:fontRef>
+        </p:style>
+        <p:txBody>
+          <a:bodyPr rtlCol="0" anchor="ctr"/>
+          <a:lstStyle/>
+          <a:p>
+            <a:pPr algn="ctr"/>
           </a:p>
         </p:txBody>
       </p:sp>

--- a/classes/week_01_intro/lecture_01.pptx
+++ b/classes/week_01_intro/lecture_01.pptx
@@ -60,6 +60,8 @@
     <p:sldId id="308" r:id="rId60"/>
     <p:sldId id="309" r:id="rId61"/>
     <p:sldId id="310" r:id="rId62"/>
+    <p:sldId id="311" r:id="rId63"/>
+    <p:sldId id="312" r:id="rId64"/>
   </p:sldIdLst>
   <p:sldSz cx="12191695" cy="6858000" type="screen4x3"/>
   <p:notesSz cx="6858000" cy="9144000"/>
@@ -1466,7 +1468,7 @@
           <a:lstStyle/>
           <a:p>
             <a:r>
-              <a:t>Отсюда вопрос: обычно нам дают просто обучающую выборку, как тогда проверить обобщение? Ответ: отложить часть данных. Разбиваем выборку на обучающую и валидационную, а лучше делаем кросс-валидацию, повторяя разбиение несколько раз. Отдельное занятие про это будет четвертым, и там же разберем, как незаметно испортить себе проверку.</a:t>
+              <a:t>Ключевое обозначение курса, оно будет встречаться до декабря. Икс с завитком это множество всех возможных объектов, игрек с завитком — множество допустимых ответов. Для наших вин объект это тринадцать чисел, а ответ это один из трех сортов. Вторая строка появится позже, когда дойдем до Байеса: если модель умеет оценивать вероятность каждого класса, то ответом естественно объявить тот класс, у которого вероятность наибольшая. Именно это и означает arg max: не само значение максимума, а аргумент, на котором он достигается, то есть номер класса. У kNN, к которому перейдем через полчаса, вероятностей нет, и там a(x) устроена иначе: голосование соседей. Разные методы по-разному строят одну и ту же функцию.</a:t>
             </a:r>
           </a:p>
         </p:txBody>
@@ -1536,7 +1538,7 @@
           <a:lstStyle/>
           <a:p>
             <a:r>
-              <a:t>Классификация: классификация текстов по темам, спам-фильтр, распознавание лиц, объектов и текста. Регрессия: предсказать температуру, положение робота, цену акций. Если добавить изменение во времени, получится, например, распознавание речи. Сегодняшние два метода это классификация.</a:t>
+              <a:t>Отсюда вопрос: обычно нам дают просто обучающую выборку, как тогда проверить обобщение? Ответ: отложить часть данных. Разбиваем выборку на обучающую и валидационную, а лучше делаем кросс-валидацию, повторяя разбиение несколько раз. Отдельное занятие про это будет четвертым, и там же разберем, как незаметно испортить себе проверку.</a:t>
             </a:r>
           </a:p>
         </p:txBody>
@@ -1606,7 +1608,7 @@
           <a:lstStyle/>
           <a:p>
             <a:r>
-              <a:t>Кластеризация: разбить данные на заранее неизвестные группы по мере похожести. Выделить семейства генов, кластеризовать пользователей и персонализовать приложение под них. Снижение размерности: признаков очень много, надо оставить самые информативные, чтобы остальные алгоритмы вообще смогли работать. Сюда же дополнение матриц: дана разреженная матрица, надо предсказать, что на пустых местах — так работают рекомендации. Если ответы даны для небольшой части данных, это обучение с частичным привлечением учителя.</a:t>
+              <a:t>Классификация: классификация текстов по темам, спам-фильтр, распознавание лиц, объектов и текста. Регрессия: предсказать температуру, положение робота, цену акций. Если добавить изменение во времени, получится, например, распознавание речи. Сегодняшние два метода это классификация.</a:t>
             </a:r>
           </a:p>
         </p:txBody>
@@ -1676,7 +1678,7 @@
           <a:lstStyle/>
           <a:p>
             <a:r>
-              <a:t>Три сюжета, которые стоит назвать. Многорукие бандиты: есть набор действий, каждое дает случайный результат, надо получить как можно больший доход. Исследование против использования: когда переходить от проб нового к эксплуатации того, что уже изучил. И назначение заслуги: награда приходит в самом конце, например за выигранную партию, и надо как-то распределить ее по всем ходам, которые к победе привели.</a:t>
+              <a:t>Кластеризация: разбить данные на заранее неизвестные группы по мере похожести. Выделить семейства генов, кластеризовать пользователей и персонализовать приложение под них. Снижение размерности: признаков очень много, надо оставить самые информативные, чтобы остальные алгоритмы вообще смогли работать. Сюда же дополнение матриц: дана разреженная матрица, надо предсказать, что на пустых местах — так работают рекомендации. Если ответы даны для небольшой части данных, это обучение с частичным привлечением учителя.</a:t>
             </a:r>
           </a:p>
         </p:txBody>
@@ -1746,7 +1748,7 @@
           <a:lstStyle/>
           <a:p>
             <a:r>
-              <a:t>Бустинг будет седьмым занятием, выбор модели четвертым. Ранжирование и активное обучение в курс не влезли, но знать, что они есть, полезно: обе задачи очень частые в индустрии.</a:t>
+              <a:t>Три сюжета, которые стоит назвать. Многорукие бандиты: есть набор действий, каждое дает случайный результат, надо получить как можно больший доход. Исследование против использования: когда переходить от проб нового к эксплуатации того, что уже изучил. И назначение заслуги: награда приходит в самом конце, например за выигранную партию, и надо как-то распределить ее по всем ходам, которые к победе привели.</a:t>
             </a:r>
           </a:p>
         </p:txBody>
@@ -1816,7 +1818,7 @@
           <a:lstStyle/>
           <a:p>
             <a:r>
-              <a:t>Подводка. Мы поговорили про то, какие бывают задачи. Теперь нужен первый работающий метод, и начать логично с самого простого из возможных. Идея kNN настолько проста, что ее придумали до появления компьютеров в современном смысле: Фикс и Ходжес в 1951 году, а исследовали Ковер и Харт в 1967. При этом метод жив: на нем стоят поиск похожих товаров, векторные базы данных, поиск дубликатов и обнаружение аномалий.</a:t>
+              <a:t>Бустинг будет седьмым занятием, выбор модели четвертым. Ранжирование и активное обучение в курс не влезли, но знать, что они есть, полезно: обе задачи очень частые в индустрии.</a:t>
             </a:r>
           </a:p>
         </p:txBody>
@@ -1886,7 +1888,7 @@
           <a:lstStyle/>
           <a:p>
             <a:r>
-              <a:t>Проговорить постановку: объект это одно вино, признаки это тринадцать чисел из лаборатории, ответ это номер сорта. Все числа, которые прозвучат дальше, посчитаны на этих данных: модель учится на 124 винах и проверяется на 54, которых не видела. Датасет маленький и удобный именно для того, чтобы разбираться в механике, а не ждать вычислений.</a:t>
+              <a:t>Подводка. Мы поговорили про то, какие бывают задачи. Теперь нужен первый работающий метод, и начать логично с самого простого из возможных. Идея kNN настолько проста, что ее придумали до появления компьютеров в современном смысле: Фикс и Ходжес в 1951 году, а исследовали Ковер и Харт в 1967. При этом метод жив: на нем стоят поиск похожих товаров, векторные базы данных, поиск дубликатов и обнаружение аномалий.</a:t>
             </a:r>
           </a:p>
         </p:txBody>
@@ -1956,7 +1958,7 @@
           <a:lstStyle/>
           <a:p>
             <a:r>
-              <a:t>Проговорить механику: обучения нет вообще, модель просто хранит выборку, вся работа происходит при предсказании. Такие методы называют ленивыми, и это ровно противоположно тому, как устроен наивный Байес, к которому придем через полчаса. Главный вопрос аудитории по картинке: какой из двух ответов правильный? Правильного нет, есть k, которое надо подобрать по данным.</a:t>
+              <a:t>Проговорить постановку: объект это одно вино, признаки это тринадцать чисел из лаборатории, ответ это номер сорта. Все числа, которые прозвучат дальше, посчитаны на этих данных: модель учится на 124 винах и проверяется на 54, которых не видела. Датасет маленький и удобный именно для того, чтобы разбираться в механике, а не ждать вычислений.</a:t>
             </a:r>
           </a:p>
         </p:txBody>
@@ -2026,7 +2028,7 @@
           <a:lstStyle/>
           <a:p>
             <a:r>
-              <a:t>Обратить внимание на последний пункт: из него через три слайда вырастет главная проблема метода. Бывают и другие метрики, манхэттенская и косинусная, их разберем на лабораторной.</a:t>
+              <a:t>Проговорить механику: обучения нет вообще, модель просто хранит выборку, вся работа происходит при предсказании. Такие методы называют ленивыми, и это ровно противоположно тому, как устроен наивный Байес, к которому придем через полчаса. Главный вопрос аудитории по картинке: какой из двух ответов правильный? Правильного нет, есть k, которое надо подобрать по данным.</a:t>
             </a:r>
           </a:p>
         </p:txBody>
@@ -2166,7 +2168,7 @@
           <a:lstStyle/>
           <a:p>
             <a:r>
-              <a:t>Спросить, какая из трех картинок нравится больше. Обычно выбирают среднюю. Дальше показать, что интуиция здесь совпала с числами, но так бывает не всегда.</a:t>
+              <a:t>Обратить внимание на последний пункт: из него через три слайда вырастет главная проблема метода. Бывают и другие метрики, манхэттенская и косинусная, их разберем на лабораторной.</a:t>
             </a:r>
           </a:p>
         </p:txBody>
@@ -2236,7 +2238,7 @@
           <a:lstStyle/>
           <a:p>
             <a:r>
-              <a:t>Расхождение между серой и синей кривой это и есть переобучение, увиденное глазами. Сказать, что подбирать k по тесту нечестно: правильный способ будет на четвертом занятии.</a:t>
+              <a:t>Спросить, какая из трех картинок нравится больше. Обычно выбирают среднюю. Дальше показать, что интуиция здесь совпала с числами, но так бывает не всегда.</a:t>
             </a:r>
           </a:p>
         </p:txBody>
@@ -2306,7 +2308,7 @@
           <a:lstStyle/>
           <a:p>
             <a:r>
-              <a:t>Задать аудитории вопрос: если мы будем искать похожие квартиры по евклидову расстоянию, что произойдет? Дать подумать полминуты. Обратить внимание на единицы измерения: миллионы, метры квадратные, просто метры и номер этажа.</a:t>
+              <a:t>Расхождение между серой и синей кривой это и есть переобучение, увиденное глазами. Сказать, что подбирать k по тесту нечестно: правильный способ будет на четвертом занятии.</a:t>
             </a:r>
           </a:p>
         </p:txBody>
@@ -2376,7 +2378,7 @@
           <a:lstStyle/>
           <a:p>
             <a:r>
-              <a:t>Вернуться к формуле расстояния. Разность в тысячу метров дает вклад в миллион, разность в два миллиона рублей дает четыре. Три признака из четырех не участвуют в расчете вообще. Модель ищет не похожие квартиры, а квартиры на том же расстоянии от метро.</a:t>
+              <a:t>Задать аудитории вопрос: если мы будем искать похожие квартиры по евклидову расстоянию, что произойдет? Дать подумать полминуты. Обратить внимание на единицы измерения: миллионы, метры квадратные, просто метры и номер этажа.</a:t>
             </a:r>
           </a:p>
         </p:txBody>
@@ -2446,7 +2448,7 @@
           <a:lstStyle/>
           <a:p>
             <a:r>
-              <a:t>Третий пункт важнее остальных. В семинарском ноутбуке есть проверка, которая ловит именно эту ошибку: если обучить преобразование на тесте, среднее теста окажется нулевым, и проверка упадет.</a:t>
+              <a:t>Вернуться к формуле расстояния. Разность в тысячу метров дает вклад в миллион, разность в два миллиона рублей дает четыре. Три признака из четырех не участвуют в расчете вообще. Модель ищет не похожие квартиры, а квартиры на том же расстоянии от метро.</a:t>
             </a:r>
           </a:p>
         </p:txBody>
@@ -2516,7 +2518,7 @@
           <a:lstStyle/>
           <a:p>
             <a:r>
-              <a:t>Теперь модель действительно ищет похожие квартиры: близкие по цене, площади, расположению и этажу одновременно.</a:t>
+              <a:t>Третий пункт важнее остальных. В семинарском ноутбуке есть проверка, которая ловит именно эту ошибку: если обучить преобразование на тесте, среднее теста окажется нулевым, и проверка упадет.</a:t>
             </a:r>
           </a:p>
         </p:txBody>
@@ -2586,7 +2588,7 @@
           <a:lstStyle/>
           <a:p>
             <a:r>
-              <a:t>Это уже не квартиры, а датасет про вино с семинара. Тринадцать признаков, три класса. Одна строка кода дала больше, чем дал бы любой подбор гиперпараметров. Мораль на весь курс: когда качество не устраивает, сначала смотрят на данные, а не на модель.</a:t>
+              <a:t>Теперь модель действительно ищет похожие квартиры: близкие по цене, площади, расположению и этажу одновременно.</a:t>
             </a:r>
           </a:p>
         </p:txBody>
@@ -2656,7 +2658,7 @@
           <a:lstStyle/>
           <a:p>
             <a:r>
-              <a:t>Это проклятие размерности: тринадцать настоящих признаков тонут среди восьмисот случайных, и расстояние перестает нести смысл. На лабораторной студенты воспроизведут этот график сами. И это хороший мостик: посмотрим на метод, который так не ломается, и разберемся, почему.</a:t>
+              <a:t>Это уже не квартиры, а датасет про вино с семинара. Тринадцать признаков, три класса. Одна строка кода дала больше, чем дал бы любой подбор гиперпараметров. Мораль на весь курс: когда качество не устраивает, сначала смотрят на данные, а не на модель.</a:t>
             </a:r>
           </a:p>
         </p:txBody>
@@ -2726,7 +2728,7 @@
           <a:lstStyle/>
           <a:p>
             <a:r>
-              <a:t>История метода: идея восходит к пятидесятым, а известность он получил в конце девяностых как основа первых работающих спам-фильтров. Сегодня его используют как быструю базовую линию в классификации текстов и как компонент там, где важна скорость: он обучается за один проход по данным.</a:t>
+              <a:t>Это проклятие размерности: тринадцать настоящих признаков тонут среди восьмисот случайных, и расстояние перестает нести смысл. На лабораторной студенты воспроизведут этот график сами. И это хороший мостик: посмотрим на метод, который так не ломается, и разберемся, почему.</a:t>
             </a:r>
           </a:p>
         </p:txBody>
@@ -2796,7 +2798,7 @@
           <a:lstStyle/>
           <a:p>
             <a:r>
-              <a:t>Пройти по блокам сверху вниз. Совместная вероятность и маргинализация: суммируя по одной переменной, избавляемся от нее. Условная вероятность и то, что совместную можно разложить двумя способами. Приравняв два разложения, за один шаг получаем теорему Байеса. И независимость, которая понадобится на следующем слайде.</a:t>
+              <a:t>История метода: идея восходит к пятидесятым, а известность он получил в конце девяностых как основа первых работающих спам-фильтров. Сегодня его используют как быструю базовую линию в классификации текстов и как компонент там, где важна скорость: он обучается за один проход по данным.</a:t>
             </a:r>
           </a:p>
         </p:txBody>
@@ -2936,7 +2938,7 @@
           <a:lstStyle/>
           <a:p>
             <a:r>
-              <a:t>Отдельно и подробно про знаменатель, это важно. P(x) — это маргинальное распределение наблюдаемых признаков: совместное распределение, просуммированное по всем классам. По сути это распределение самих данных, и оценить его труднее всего: оно многомерное и никакой структуры нам не дано. Но при сравнении гипотез между собой оно играет роль нормировочной константы, одной и той же для всех классов. В задаче поиска максимума константа на результат не влияет, поэтому знаменатель опускают. Мы не научились его считать — мы обошли необходимость его считать.</a:t>
+              <a:t>Пройти по блокам сверху вниз. Совместная вероятность и маргинализация: суммируя по одной переменной, избавляемся от нее. Условная вероятность и то, что совместную можно разложить двумя способами. Приравняв два разложения, за один шаг получаем теорему Байеса. И независимость, которая понадобится на следующем слайде.</a:t>
             </a:r>
           </a:p>
         </p:txBody>
@@ -3006,7 +3008,7 @@
           <a:lstStyle/>
           <a:p>
             <a:r>
-              <a:t>Предположение почти всегда неверно: в вине содержание флавоноидов и общее содержание фенолов очевидно связаны. Метод все равно работает, и это одна из приятных странностей машинного обучения. Причина в том, что для выбора класса нужны не точные вероятности, а правильный порядок между ними.</a:t>
+              <a:t>Отдельно и подробно про знаменатель, это важно. P(x) — это маргинальное распределение наблюдаемых признаков: совместное распределение, просуммированное по всем классам. По сути это распределение самих данных, и оценить его труднее всего: оно многомерное и никакой структуры нам не дано. Но при сравнении гипотез между собой оно играет роль нормировочной константы, одной и той же для всех классов. В задаче поиска максимума константа на результат не влияет, поэтому знаменатель опускают. Мы не научились его считать — мы обошли необходимость его считать.</a:t>
             </a:r>
           </a:p>
         </p:txBody>
@@ -3076,7 +3078,7 @@
           <a:lstStyle/>
           <a:p>
             <a:r>
-              <a:t>Подчеркнуть: это предположение, а не факт. На следующих слайдах видно, насколько оно грубое и почему этого хватает.</a:t>
+              <a:t>Это место, где студенты обычно теряются, поэтому проговорить медленно. Теорема Байеса считает вероятность для каждого класса отдельно: для сорта ноль, для сорта один, для сорта два. Получаются три числа. Но модель должна выдать один ответ, а не три числа, значит нужно правило выбора. Правило самое естественное: назвать тот класс, чья вероятность больше. Формально это arg max, и вот здесь наша функция a(x) из начала лекции наконец получает конкретный вид. Дальше маленькая хитрость. У всех трех чисел знаменатель одинаковый, это P(x). Деление на одно и то же число порядок чисел не меняет: кто был больше, тот больше и остался. Значит знаменатель можно выбросить и сравнивать числители. Это важно, потому что именно знаменатель было бы труднее всего посчитать.</a:t>
             </a:r>
           </a:p>
         </p:txBody>
@@ -3146,7 +3148,7 @@
           <a:lstStyle/>
           <a:p>
             <a:r>
-              <a:t>Сравнить с kNN, который хранит всю выборку целиком и пересчитывает расстояния при каждом предсказании. Отсюда и устойчивость к лишним признакам: шумовой признак дает почти одинаковую плотность во всех классах и просто не влияет на сравнение.</a:t>
+              <a:t>Предположение почти всегда неверно: в вине содержание флавоноидов и общее содержание фенолов очевидно связаны. Метод все равно работает, и это одна из приятных странностей машинного обучения. Причина в том, что для выбора класса нужны не точные вероятности, а правильный порядок между ними.</a:t>
             </a:r>
           </a:p>
         </p:txBody>
@@ -3216,7 +3218,7 @@
           <a:lstStyle/>
           <a:p>
             <a:r>
-              <a:t>Разобрать одну панель целиком, прежде чем говорить про три. Возьмем proline. Метод посмотрел на все обучающие вина сорта ноль, посчитал среднее и разброс их proline и нарисовал по этим двум числам нормальную кривую. То же для сорта один и для сорта два. Получилось три кривые на одной панели. Так же он поступил с каждым из тринадцати признаков. Теперь предсказание. Приходит новое вино, у него известен proline. Смотрим, какая из трех кривых в этой точке выше: тот сорт и вероятнее по этому признаку. Повторяем для всех тринадцати признаков, перемножаем и добавляем априорную долю сорта. Побеждает сорт с наибольшим произведением. Обратить внимание: по proline сорта разделяются хорошо, кривые почти не пересекаются, а по color_intensity хуже. Признаки не равны по полезности, и метод учитывает это автоматически.</a:t>
+              <a:t>Подчеркнуть: это предположение, а не факт. На следующих слайдах видно, насколько оно грубое и почему этого хватает.</a:t>
             </a:r>
           </a:p>
         </p:txBody>
@@ -3286,7 +3288,7 @@
           <a:lstStyle/>
           <a:p>
             <a:r>
-              <a:t>Обратить внимание на числа в подписях. Спросить, какая граница лучше. Ответ: смотря какие данные. Если предположение о нормальности близко к правде, гладкая выигрывает и требует меньше данных. Если нет, проигрывает.</a:t>
+              <a:t>Сравнить с kNN, который хранит всю выборку целиком и пересчитывает расстояния при каждом предсказании. Отсюда и устойчивость к лишним признакам: шумовой признак дает почти одинаковую плотность во всех классах и просто не влияет на сравнение.</a:t>
             </a:r>
           </a:p>
         </p:txBody>
@@ -3356,7 +3358,7 @@
           <a:lstStyle/>
           <a:p>
             <a:r>
-              <a:t>Сложнее не значит точнее. На сегодняшнем семинаре наивный Байес обыграет kNN на этих данных.</a:t>
+              <a:t>Разобрать одну панель целиком, прежде чем говорить про три. Возьмем proline. Метод посмотрел на все обучающие вина сорта ноль, посчитал среднее и разброс их proline и нарисовал по этим двум числам нормальную кривую. То же для сорта один и для сорта два. Получилось три кривые на одной панели. Так же он поступил с каждым из тринадцати признаков. Теперь предсказание. Приходит новое вино, у него известен proline. Смотрим, какая из трех кривых в этой точке выше: тот сорт и вероятнее по этому признаку. Повторяем для всех тринадцати признаков, перемножаем и добавляем априорную долю сорта. Побеждает сорт с наибольшим произведением. Обратить внимание: по proline сорта разделяются хорошо, кривые почти не пересекаются, а по color_intensity хуже. Признаки не равны по полезности, и метод учитывает это автоматически.</a:t>
             </a:r>
           </a:p>
         </p:txBody>
@@ -3426,7 +3428,7 @@
           <a:lstStyle/>
           <a:p>
             <a:r>
-              <a:t>Читать таблицу сверху вниз. Первая строка это точка отсчета: модель, которая всегда отвечает самым частым сортом, угадывает в 39 процентах случаев на тесте. Все, что не обыгрывает эту строку, не имеет права на существование. Вторая и третья: одна строка со стандартизацией поднимает kNN с 0.72 до 0.94. Четвертая строка выделена намеренно: при k=1 на обучающей выборке ровно единица, потому что ближайший сосед объекта это он сам. На тесте при этом хуже, чем у k=5. Вот так переобучение выглядит в числах. Пятая: наивный Байес не ошибся на тесте ни разу, и это повод не радоваться, а насторожиться — в тесте всего 54 объекта.</a:t>
+              <a:t>Обратить внимание на числа в подписях. Спросить, какая граница лучше. Ответ: смотря какие данные. Если предположение о нормальности близко к правде, гладкая выигрывает и требует меньше данных. Если нет, проигрывает.</a:t>
             </a:r>
           </a:p>
         </p:txBody>
@@ -3496,7 +3498,7 @@
           <a:lstStyle/>
           <a:p>
             <a:r>
-              <a:t>Слева: при соотношении один к тысяче модель, которая всегда отвечает «нет», наберет 99.9 процента. Справа то же самое на медицинском примере: модель с accuracy 98.5 процента не нашла ни одного больного. Наши вина сбалансированы, поэтому там accuracy честна. В реальных задачах она сбалансирована почти никогда: мошеннические транзакции, поломки оборудования, редкие заболевания — везде интересный класс редкий.</a:t>
+              <a:t>Сложнее не значит точнее. На сегодняшнем семинаре наивный Байес обыграет kNN на этих данных.</a:t>
             </a:r>
           </a:p>
         </p:txBody>
@@ -3566,7 +3568,7 @@
           <a:lstStyle/>
           <a:p>
             <a:r>
-              <a:t>Accuracy это сумма диагонали, деленная на все. Она склеивает две принципиально разные ошибки в одно число, а цена у них разная. В медицинской диагностике пропуск страшнее ложной тревоги. В спам-фильтре наоборот: письмо от начальника в папке со спамом хуже, чем реклама во входящих.</a:t>
+              <a:t>Читать таблицу сверху вниз. Первая строка это точка отсчета: модель, которая всегда отвечает самым частым сортом, угадывает в 39 процентах случаев на тесте. Все, что не обыгрывает эту строку, не имеет права на существование. Вторая и третья: одна строка со стандартизацией поднимает kNN с 0.72 до 0.94. Четвертая строка выделена намеренно: при k=1 на обучающей выборке ровно единица, потому что ближайший сосед объекта это он сам. На тесте при этом хуже, чем у k=5. Вот так переобучение выглядит в числах. Пятая: наивный Байес не ошибся на тесте ни разу, и это повод не радоваться, а насторожиться — в тесте всего 54 объекта.</a:t>
             </a:r>
           </a:p>
         </p:txBody>
@@ -3706,7 +3708,7 @@
           <a:lstStyle/>
           <a:p>
             <a:r>
-              <a:t>Обе метрики смотрят только на нужный класс, поэтому редкость класса их не обманывает. Модель «все здоровы» из предыдущего слайда имеет recall ноль, и это сразу видно. Первая пара метрик курса, дальше их будет много. Главная мысль на весь семестр: метрику выбирает тот, кто понимает цену ошибки, а не тот, кто пишет код.</a:t>
+              <a:t>Слева: при соотношении один к тысяче модель, которая всегда отвечает «нет», наберет 99.9 процента. Справа то же самое на медицинском примере: модель с accuracy 98.5 процента не нашла ни одного больного. Наши вина сбалансированы, поэтому там accuracy честна. В реальных задачах она сбалансирована почти никогда: мошеннические транзакции, поломки оборудования, редкие заболевания — везде интересный класс редкий.</a:t>
             </a:r>
           </a:p>
         </p:txBody>
@@ -3732,6 +3734,146 @@
 </file>
 
 <file path=ppt/notesSlides/notesSlide51.xml><?xml version="1.0" encoding="utf-8"?>
+<p:notes xmlns:a="http://schemas.openxmlformats.org/drawingml/2006/main" xmlns:p="http://schemas.openxmlformats.org/presentationml/2006/main" xmlns:r="http://schemas.openxmlformats.org/officeDocument/2006/relationships">
+  <p:cSld>
+    <p:spTree>
+      <p:nvGrpSpPr>
+        <p:cNvPr id="1" name=""/>
+        <p:cNvGrpSpPr/>
+        <p:nvPr/>
+      </p:nvGrpSpPr>
+      <p:grpSpPr>
+        <a:xfrm>
+          <a:off x="0" y="0"/>
+          <a:ext cx="0" cy="0"/>
+          <a:chOff x="0" y="0"/>
+          <a:chExt cx="0" cy="0"/>
+        </a:xfrm>
+      </p:grpSpPr>
+      <p:sp>
+        <p:nvSpPr>
+          <p:cNvPr id="2" name="Slide Image Placeholder 1"/>
+          <p:cNvSpPr>
+            <a:spLocks noGrp="1"/>
+          </p:cNvSpPr>
+          <p:nvPr>
+            <p:ph type="sldImg" idx="2"/>
+          </p:nvPr>
+        </p:nvSpPr>
+        <p:spPr/>
+      </p:sp>
+      <p:sp>
+        <p:nvSpPr>
+          <p:cNvPr id="3" name="Notes Placeholder 2"/>
+          <p:cNvSpPr>
+            <a:spLocks noGrp="1"/>
+          </p:cNvSpPr>
+          <p:nvPr>
+            <p:ph type="body" idx="3" sz="quarter"/>
+          </p:nvPr>
+        </p:nvSpPr>
+        <p:spPr/>
+        <p:txBody>
+          <a:bodyPr/>
+          <a:lstStyle/>
+          <a:p>
+            <a:r>
+              <a:t>Accuracy это сумма диагонали, деленная на все. Она склеивает две принципиально разные ошибки в одно число, а цена у них разная. В медицинской диагностике пропуск страшнее ложной тревоги. В спам-фильтре наоборот: письмо от начальника в папке со спамом хуже, чем реклама во входящих.</a:t>
+            </a:r>
+          </a:p>
+        </p:txBody>
+      </p:sp>
+      <p:sp>
+        <p:nvSpPr>
+          <p:cNvPr id="4" name="Slide Number Placeholder 3"/>
+          <p:cNvSpPr>
+            <a:spLocks noGrp="1"/>
+          </p:cNvSpPr>
+          <p:nvPr>
+            <p:ph type="sldNum" idx="5" sz="quarter"/>
+          </p:nvPr>
+        </p:nvSpPr>
+        <p:spPr/>
+      </p:sp>
+    </p:spTree>
+  </p:cSld>
+  <p:clrMapOvr>
+    <a:masterClrMapping/>
+  </p:clrMapOvr>
+</p:notes>
+</file>
+
+<file path=ppt/notesSlides/notesSlide52.xml><?xml version="1.0" encoding="utf-8"?>
+<p:notes xmlns:a="http://schemas.openxmlformats.org/drawingml/2006/main" xmlns:p="http://schemas.openxmlformats.org/presentationml/2006/main" xmlns:r="http://schemas.openxmlformats.org/officeDocument/2006/relationships">
+  <p:cSld>
+    <p:spTree>
+      <p:nvGrpSpPr>
+        <p:cNvPr id="1" name=""/>
+        <p:cNvGrpSpPr/>
+        <p:nvPr/>
+      </p:nvGrpSpPr>
+      <p:grpSpPr>
+        <a:xfrm>
+          <a:off x="0" y="0"/>
+          <a:ext cx="0" cy="0"/>
+          <a:chOff x="0" y="0"/>
+          <a:chExt cx="0" cy="0"/>
+        </a:xfrm>
+      </p:grpSpPr>
+      <p:sp>
+        <p:nvSpPr>
+          <p:cNvPr id="2" name="Slide Image Placeholder 1"/>
+          <p:cNvSpPr>
+            <a:spLocks noGrp="1"/>
+          </p:cNvSpPr>
+          <p:nvPr>
+            <p:ph type="sldImg" idx="2"/>
+          </p:nvPr>
+        </p:nvSpPr>
+        <p:spPr/>
+      </p:sp>
+      <p:sp>
+        <p:nvSpPr>
+          <p:cNvPr id="3" name="Notes Placeholder 2"/>
+          <p:cNvSpPr>
+            <a:spLocks noGrp="1"/>
+          </p:cNvSpPr>
+          <p:nvPr>
+            <p:ph type="body" idx="3" sz="quarter"/>
+          </p:nvPr>
+        </p:nvSpPr>
+        <p:spPr/>
+        <p:txBody>
+          <a:bodyPr/>
+          <a:lstStyle/>
+          <a:p>
+            <a:r>
+              <a:t>Обе метрики смотрят только на нужный класс, поэтому редкость класса их не обманывает. Модель «все здоровы» из предыдущего слайда имеет recall ноль, и это сразу видно. Первая пара метрик курса, дальше их будет много. Главная мысль на весь семестр: метрику выбирает тот, кто понимает цену ошибки, а не тот, кто пишет код.</a:t>
+            </a:r>
+          </a:p>
+        </p:txBody>
+      </p:sp>
+      <p:sp>
+        <p:nvSpPr>
+          <p:cNvPr id="4" name="Slide Number Placeholder 3"/>
+          <p:cNvSpPr>
+            <a:spLocks noGrp="1"/>
+          </p:cNvSpPr>
+          <p:nvPr>
+            <p:ph type="sldNum" idx="5" sz="quarter"/>
+          </p:nvPr>
+        </p:nvSpPr>
+        <p:spPr/>
+      </p:sp>
+    </p:spTree>
+  </p:cSld>
+  <p:clrMapOvr>
+    <a:masterClrMapping/>
+  </p:clrMapOvr>
+</p:notes>
+</file>
+
+<file path=ppt/notesSlides/notesSlide53.xml><?xml version="1.0" encoding="utf-8"?>
 <p:notes xmlns:a="http://schemas.openxmlformats.org/drawingml/2006/main" xmlns:p="http://schemas.openxmlformats.org/presentationml/2006/main" xmlns:r="http://schemas.openxmlformats.org/officeDocument/2006/relationships">
   <p:cSld>
     <p:spTree>
@@ -15267,6 +15409,46 @@
         <p:spPr>
           <a:xfrm>
             <a:off x="822960" y="594360"/>
+            <a:ext cx="10545775" cy="274320"/>
+          </a:xfrm>
+          <a:prstGeom prst="rect">
+            <a:avLst/>
+          </a:prstGeom>
+          <a:noFill/>
+        </p:spPr>
+        <p:txBody>
+          <a:bodyPr wrap="square" anchor="t" lIns="0" rIns="0" tIns="0" bIns="0">
+            <a:spAutoFit/>
+          </a:bodyPr>
+          <a:lstStyle/>
+          <a:p>
+            <a:pPr algn="l">
+              <a:lnSpc>
+                <a:spcPct val="100000"/>
+              </a:lnSpc>
+              <a:buNone/>
+            </a:pPr>
+            <a:r>
+              <a:rPr sz="1300" b="1">
+                <a:solidFill>
+                  <a:srgbClr val="0072CE"/>
+                </a:solidFill>
+                <a:latin typeface="Arial"/>
+              </a:rPr>
+              <a:t>РЕШАЮЩЕЕ ПРАВИЛО</a:t>
+            </a:r>
+          </a:p>
+        </p:txBody>
+      </p:sp>
+      <p:sp>
+        <p:nvSpPr>
+          <p:cNvPr id="4" name="TextBox 3"/>
+          <p:cNvSpPr txBox="1"/>
+          <p:nvPr/>
+        </p:nvSpPr>
+        <p:spPr>
+          <a:xfrm>
+            <a:off x="822960" y="960120"/>
             <a:ext cx="10545775" cy="822960"/>
           </a:xfrm>
           <a:prstGeom prst="rect">
@@ -15293,20 +15475,20 @@
                 </a:solidFill>
                 <a:latin typeface="Arial"/>
               </a:rPr>
-              <a:t>Обобщение и переобучение</a:t>
-            </a:r>
-          </a:p>
-        </p:txBody>
-      </p:sp>
-      <p:sp>
-        <p:nvSpPr>
-          <p:cNvPr id="4" name="Rectangle 3"/>
+              <a:t>Что именно мы строим</a:t>
+            </a:r>
+          </a:p>
+        </p:txBody>
+      </p:sp>
+      <p:sp>
+        <p:nvSpPr>
+          <p:cNvPr id="5" name="Rectangle 4"/>
           <p:cNvSpPr/>
           <p:nvPr/>
         </p:nvSpPr>
         <p:spPr>
           <a:xfrm>
-            <a:off x="822960" y="1307592"/>
+            <a:off x="822960" y="1673352"/>
             <a:ext cx="1463040" cy="50800"/>
           </a:xfrm>
           <a:prstGeom prst="rect">
@@ -15344,7 +15526,7 @@
       </p:sp>
       <p:pic>
         <p:nvPicPr>
-          <p:cNvPr id="5" name="Picture 4" descr="overfitting.png"/>
+          <p:cNvPr id="6" name="Picture 5" descr="f_decision_rule.png"/>
           <p:cNvPicPr>
             <a:picLocks noChangeAspect="1"/>
           </p:cNvPicPr>
@@ -15358,8 +15540,8 @@
         </p:blipFill>
         <p:spPr>
           <a:xfrm>
-            <a:off x="2410237" y="1737360"/>
-            <a:ext cx="7371221" cy="3346704"/>
+            <a:off x="4162326" y="2103120"/>
+            <a:ext cx="3867043" cy="1828800"/>
           </a:xfrm>
           <a:prstGeom prst="rect">
             <a:avLst/>
@@ -15368,14 +15550,14 @@
       </p:pic>
       <p:sp>
         <p:nvSpPr>
-          <p:cNvPr id="6" name="TextBox 5"/>
-          <p:cNvSpPr txBox="1"/>
-          <p:nvPr/>
-        </p:nvSpPr>
-        <p:spPr>
-          <a:xfrm>
-            <a:off x="822960" y="5340096"/>
-            <a:ext cx="10545775" cy="1042416"/>
+          <p:cNvPr id="7" name="TextBox 6"/>
+          <p:cNvSpPr txBox="1"/>
+          <p:nvPr/>
+        </p:nvSpPr>
+        <p:spPr>
+          <a:xfrm>
+            <a:off x="822960" y="4251960"/>
+            <a:ext cx="10545775" cy="2011680"/>
           </a:xfrm>
           <a:prstGeom prst="rect">
             <a:avLst/>
@@ -15398,18 +15580,18 @@
               <a:buClr>
                 <a:srgbClr val="0072CE"/>
               </a:buClr>
-              <a:buSzPts val="930"/>
+              <a:buSzPts val="1054"/>
               <a:buFont typeface="Arial"/>
               <a:buChar char="▪"/>
             </a:pPr>
             <a:r>
-              <a:rPr sz="1500">
+              <a:rPr sz="1700">
                 <a:solidFill>
                   <a:srgbClr val="0F1418"/>
                 </a:solidFill>
                 <a:latin typeface="Arial"/>
               </a:rPr>
-              <a:t>Идеальная память об обучающей выборке ничего не говорит о новых данных</a:t>
+              <a:t>Модель это функция из пространства объектов в пространство ответов</a:t>
             </a:r>
           </a:p>
           <a:p>
@@ -15423,25 +15605,75 @@
               <a:buClr>
                 <a:srgbClr val="0072CE"/>
               </a:buClr>
-              <a:buSzPts val="930"/>
+              <a:buSzPts val="1054"/>
               <a:buFont typeface="Arial"/>
               <a:buChar char="▪"/>
             </a:pPr>
             <a:r>
-              <a:rPr sz="1500">
+              <a:rPr sz="1700">
                 <a:solidFill>
                   <a:srgbClr val="0F1418"/>
                 </a:solidFill>
                 <a:latin typeface="Arial"/>
               </a:rPr>
-              <a:t>Проверить обобщение можно, только отложив часть данных заранее</a:t>
-            </a:r>
-          </a:p>
-        </p:txBody>
-      </p:sp>
-      <p:sp>
-        <p:nvSpPr>
-          <p:cNvPr id="7" name="TextBox 6"/>
+              <a:t>Обозначаем ее a(x): подали объект, получили ответ</a:t>
+            </a:r>
+          </a:p>
+          <a:p>
+            <a:pPr marL="228600" indent="-228600">
+              <a:lnSpc>
+                <a:spcPct val="135000"/>
+              </a:lnSpc>
+              <a:spcAft>
+                <a:spcPts val="1000"/>
+              </a:spcAft>
+              <a:buClr>
+                <a:srgbClr val="0072CE"/>
+              </a:buClr>
+              <a:buSzPts val="1054"/>
+              <a:buFont typeface="Arial"/>
+              <a:buChar char="▪"/>
+            </a:pPr>
+            <a:r>
+              <a:rPr sz="1700">
+                <a:solidFill>
+                  <a:srgbClr val="0F1418"/>
+                </a:solidFill>
+                <a:latin typeface="Arial"/>
+              </a:rPr>
+              <a:t>В классификации ответ это номер класса</a:t>
+            </a:r>
+          </a:p>
+          <a:p>
+            <a:pPr marL="228600" indent="-228600">
+              <a:lnSpc>
+                <a:spcPct val="135000"/>
+              </a:lnSpc>
+              <a:spcAft>
+                <a:spcPts val="1000"/>
+              </a:spcAft>
+              <a:buClr>
+                <a:srgbClr val="0072CE"/>
+              </a:buClr>
+              <a:buSzPts val="1054"/>
+              <a:buFont typeface="Arial"/>
+              <a:buChar char="▪"/>
+            </a:pPr>
+            <a:r>
+              <a:rPr sz="1700">
+                <a:solidFill>
+                  <a:srgbClr val="0F1418"/>
+                </a:solidFill>
+                <a:latin typeface="Arial"/>
+              </a:rPr>
+              <a:t>Обучение — подобрать такую a, которая хорошо работает на новых объектах</a:t>
+            </a:r>
+          </a:p>
+        </p:txBody>
+      </p:sp>
+      <p:sp>
+        <p:nvSpPr>
+          <p:cNvPr id="8" name="TextBox 7"/>
           <p:cNvSpPr txBox="1"/>
           <p:nvPr/>
         </p:nvSpPr>
@@ -15481,7 +15713,7 @@
       </p:sp>
       <p:sp>
         <p:nvSpPr>
-          <p:cNvPr id="8" name="TextBox 7"/>
+          <p:cNvPr id="9" name="TextBox 8"/>
           <p:cNvSpPr txBox="1"/>
           <p:nvPr/>
         </p:nvSpPr>
@@ -15616,7 +15848,7 @@
                 </a:solidFill>
                 <a:latin typeface="Arial"/>
               </a:rPr>
-              <a:t>Классификация и регрессия</a:t>
+              <a:t>Обобщение и переобучение</a:t>
             </a:r>
           </a:p>
         </p:txBody>
@@ -15667,7 +15899,7 @@
       </p:sp>
       <p:pic>
         <p:nvPicPr>
-          <p:cNvPr id="5" name="Picture 4" descr="classification_regression.png"/>
+          <p:cNvPr id="5" name="Picture 4" descr="overfitting.png"/>
           <p:cNvPicPr>
             <a:picLocks noChangeAspect="1"/>
           </p:cNvPicPr>
@@ -15681,8 +15913,8 @@
         </p:blipFill>
         <p:spPr>
           <a:xfrm>
-            <a:off x="1299419" y="1737360"/>
-            <a:ext cx="9592856" cy="3346704"/>
+            <a:off x="2410237" y="1737360"/>
+            <a:ext cx="7371221" cy="3346704"/>
           </a:xfrm>
           <a:prstGeom prst="rect">
             <a:avLst/>
@@ -15732,7 +15964,7 @@
                 </a:solidFill>
                 <a:latin typeface="Arial"/>
               </a:rPr>
-              <a:t>Классификация: ответ это метка из конечного набора</a:t>
+              <a:t>Идеальная память об обучающей выборке ничего не говорит о новых данных</a:t>
             </a:r>
           </a:p>
           <a:p>
@@ -15757,7 +15989,7 @@
                 </a:solidFill>
                 <a:latin typeface="Arial"/>
               </a:rPr>
-              <a:t>Регрессия: ответ это число</a:t>
+              <a:t>Проверить обобщение можно, только отложив часть данных заранее</a:t>
             </a:r>
           </a:p>
         </p:txBody>
@@ -15939,7 +16171,7 @@
                 </a:solidFill>
                 <a:latin typeface="Arial"/>
               </a:rPr>
-              <a:t>Обучение без учителя</a:t>
+              <a:t>Классификация и регрессия</a:t>
             </a:r>
           </a:p>
         </p:txBody>
@@ -15990,7 +16222,7 @@
       </p:sp>
       <p:pic>
         <p:nvPicPr>
-          <p:cNvPr id="5" name="Picture 4" descr="unsupervised.png"/>
+          <p:cNvPr id="5" name="Picture 4" descr="classification_regression.png"/>
           <p:cNvPicPr>
             <a:picLocks noChangeAspect="1"/>
           </p:cNvPicPr>
@@ -16004,8 +16236,8 @@
         </p:blipFill>
         <p:spPr>
           <a:xfrm>
-            <a:off x="1393725" y="1737360"/>
-            <a:ext cx="9404245" cy="3730752"/>
+            <a:off x="1299419" y="1737360"/>
+            <a:ext cx="9592856" cy="3346704"/>
           </a:xfrm>
           <a:prstGeom prst="rect">
             <a:avLst/>
@@ -16020,8 +16252,8 @@
         </p:nvSpPr>
         <p:spPr>
           <a:xfrm>
-            <a:off x="822960" y="5724144"/>
-            <a:ext cx="10545775" cy="658368"/>
+            <a:off x="822960" y="5340096"/>
+            <a:ext cx="10545775" cy="1042416"/>
           </a:xfrm>
           <a:prstGeom prst="rect">
             <a:avLst/>
@@ -16055,7 +16287,32 @@
                 </a:solidFill>
                 <a:latin typeface="Arial"/>
               </a:rPr>
-              <a:t>Правильных ответов нет, есть только данные</a:t>
+              <a:t>Классификация: ответ это метка из конечного набора</a:t>
+            </a:r>
+          </a:p>
+          <a:p>
+            <a:pPr marL="228600" indent="-228600">
+              <a:lnSpc>
+                <a:spcPct val="135000"/>
+              </a:lnSpc>
+              <a:spcAft>
+                <a:spcPts val="1000"/>
+              </a:spcAft>
+              <a:buClr>
+                <a:srgbClr val="0072CE"/>
+              </a:buClr>
+              <a:buSzPts val="930"/>
+              <a:buFont typeface="Arial"/>
+              <a:buChar char="▪"/>
+            </a:pPr>
+            <a:r>
+              <a:rPr sz="1500">
+                <a:solidFill>
+                  <a:srgbClr val="0F1418"/>
+                </a:solidFill>
+                <a:latin typeface="Arial"/>
+              </a:rPr>
+              <a:t>Регрессия: ответ это число</a:t>
             </a:r>
           </a:p>
         </p:txBody>
@@ -16237,7 +16494,7 @@
                 </a:solidFill>
                 <a:latin typeface="Arial"/>
               </a:rPr>
-              <a:t>Обучение с подкреплением</a:t>
+              <a:t>Обучение без учителя</a:t>
             </a:r>
           </a:p>
         </p:txBody>
@@ -16288,7 +16545,7 @@
       </p:sp>
       <p:pic>
         <p:nvPicPr>
-          <p:cNvPr id="5" name="Picture 4" descr="reinforcement.png"/>
+          <p:cNvPr id="5" name="Picture 4" descr="unsupervised.png"/>
           <p:cNvPicPr>
             <a:picLocks noChangeAspect="1"/>
           </p:cNvPicPr>
@@ -16353,7 +16610,7 @@
                 </a:solidFill>
                 <a:latin typeface="Arial"/>
               </a:rPr>
-              <a:t>Агент учится на собственных пробах и ошибках</a:t>
+              <a:t>Правильных ответов нет, есть только данные</a:t>
             </a:r>
           </a:p>
         </p:txBody>
@@ -16509,7 +16766,7 @@
         <p:spPr>
           <a:xfrm>
             <a:off x="822960" y="594360"/>
-            <a:ext cx="10545775" cy="274320"/>
+            <a:ext cx="10545775" cy="822960"/>
           </a:xfrm>
           <a:prstGeom prst="rect">
             <a:avLst/>
@@ -16529,66 +16786,26 @@
               <a:buNone/>
             </a:pPr>
             <a:r>
-              <a:rPr sz="1300" b="1">
-                <a:solidFill>
-                  <a:srgbClr val="0072CE"/>
-                </a:solidFill>
-                <a:latin typeface="Arial"/>
-              </a:rPr>
-              <a:t>ЗА ПРЕДЕЛАМИ ТРЕХ ВЕТОК</a:t>
-            </a:r>
-          </a:p>
-        </p:txBody>
-      </p:sp>
-      <p:sp>
-        <p:nvSpPr>
-          <p:cNvPr id="4" name="TextBox 3"/>
-          <p:cNvSpPr txBox="1"/>
-          <p:nvPr/>
-        </p:nvSpPr>
-        <p:spPr>
-          <a:xfrm>
-            <a:off x="822960" y="960120"/>
-            <a:ext cx="10545775" cy="822960"/>
-          </a:xfrm>
-          <a:prstGeom prst="rect">
-            <a:avLst/>
-          </a:prstGeom>
-          <a:noFill/>
-        </p:spPr>
-        <p:txBody>
-          <a:bodyPr wrap="square" anchor="t" lIns="0" rIns="0" tIns="0" bIns="0">
-            <a:spAutoFit/>
-          </a:bodyPr>
-          <a:lstStyle/>
-          <a:p>
-            <a:pPr algn="l">
-              <a:lnSpc>
-                <a:spcPct val="100000"/>
-              </a:lnSpc>
-              <a:buNone/>
-            </a:pPr>
-            <a:r>
               <a:rPr sz="3200" b="1">
                 <a:solidFill>
                   <a:srgbClr val="0F1418"/>
                 </a:solidFill>
                 <a:latin typeface="Arial"/>
               </a:rPr>
-              <a:t>Что еще бывает</a:t>
-            </a:r>
-          </a:p>
-        </p:txBody>
-      </p:sp>
-      <p:sp>
-        <p:nvSpPr>
-          <p:cNvPr id="5" name="Rectangle 4"/>
+              <a:t>Обучение с подкреплением</a:t>
+            </a:r>
+          </a:p>
+        </p:txBody>
+      </p:sp>
+      <p:sp>
+        <p:nvSpPr>
+          <p:cNvPr id="4" name="Rectangle 3"/>
           <p:cNvSpPr/>
           <p:nvPr/>
         </p:nvSpPr>
         <p:spPr>
           <a:xfrm>
-            <a:off x="822960" y="1673352"/>
+            <a:off x="822960" y="1307592"/>
             <a:ext cx="1463040" cy="50800"/>
           </a:xfrm>
           <a:prstGeom prst="rect">
@@ -16626,7 +16843,7 @@
       </p:sp>
       <p:pic>
         <p:nvPicPr>
-          <p:cNvPr id="6" name="Picture 5" descr="other_tasks.png"/>
+          <p:cNvPr id="5" name="Picture 4" descr="reinforcement.png"/>
           <p:cNvPicPr>
             <a:picLocks noChangeAspect="1"/>
           </p:cNvPicPr>
@@ -16640,8 +16857,8 @@
         </p:blipFill>
         <p:spPr>
           <a:xfrm>
-            <a:off x="822960" y="2103120"/>
-            <a:ext cx="10545775" cy="3679153"/>
+            <a:off x="1393725" y="1737360"/>
+            <a:ext cx="9404245" cy="3730752"/>
           </a:xfrm>
           <a:prstGeom prst="rect">
             <a:avLst/>
@@ -16650,13 +16867,13 @@
       </p:pic>
       <p:sp>
         <p:nvSpPr>
-          <p:cNvPr id="7" name="TextBox 6"/>
-          <p:cNvSpPr txBox="1"/>
-          <p:nvPr/>
-        </p:nvSpPr>
-        <p:spPr>
-          <a:xfrm>
-            <a:off x="822960" y="6038305"/>
+          <p:cNvPr id="6" name="TextBox 5"/>
+          <p:cNvSpPr txBox="1"/>
+          <p:nvPr/>
+        </p:nvSpPr>
+        <p:spPr>
+          <a:xfrm>
+            <a:off x="822960" y="5724144"/>
             <a:ext cx="10545775" cy="658368"/>
           </a:xfrm>
           <a:prstGeom prst="rect">
@@ -16691,14 +16908,14 @@
                 </a:solidFill>
                 <a:latin typeface="Arial"/>
               </a:rPr>
-              <a:t>Не укладываются в три ветки целиком, но встречаются постоянно</a:t>
-            </a:r>
-          </a:p>
-        </p:txBody>
-      </p:sp>
-      <p:sp>
-        <p:nvSpPr>
-          <p:cNvPr id="8" name="TextBox 7"/>
+              <a:t>Агент учится на собственных пробах и ошибках</a:t>
+            </a:r>
+          </a:p>
+        </p:txBody>
+      </p:sp>
+      <p:sp>
+        <p:nvSpPr>
+          <p:cNvPr id="7" name="TextBox 6"/>
           <p:cNvSpPr txBox="1"/>
           <p:nvPr/>
         </p:nvSpPr>
@@ -16738,7 +16955,7 @@
       </p:sp>
       <p:sp>
         <p:nvSpPr>
-          <p:cNvPr id="9" name="TextBox 8"/>
+          <p:cNvPr id="8" name="TextBox 7"/>
           <p:cNvSpPr txBox="1"/>
           <p:nvPr/>
         </p:nvSpPr>
@@ -16809,6 +17026,130 @@
             <a:avLst/>
           </a:prstGeom>
           <a:solidFill>
+            <a:srgbClr val="FFFFFF"/>
+          </a:solidFill>
+          <a:ln>
+            <a:noFill/>
+          </a:ln>
+          <a:effectLst/>
+        </p:spPr>
+        <p:style>
+          <a:lnRef idx="1">
+            <a:schemeClr val="accent1"/>
+          </a:lnRef>
+          <a:fillRef idx="3">
+            <a:schemeClr val="accent1"/>
+          </a:fillRef>
+          <a:effectRef idx="2">
+            <a:schemeClr val="accent1"/>
+          </a:effectRef>
+          <a:fontRef idx="minor">
+            <a:schemeClr val="lt1"/>
+          </a:fontRef>
+        </p:style>
+        <p:txBody>
+          <a:bodyPr rtlCol="0" anchor="ctr"/>
+          <a:lstStyle/>
+          <a:p>
+            <a:pPr algn="ctr"/>
+          </a:p>
+        </p:txBody>
+      </p:sp>
+      <p:sp>
+        <p:nvSpPr>
+          <p:cNvPr id="3" name="TextBox 2"/>
+          <p:cNvSpPr txBox="1"/>
+          <p:nvPr/>
+        </p:nvSpPr>
+        <p:spPr>
+          <a:xfrm>
+            <a:off x="822960" y="594360"/>
+            <a:ext cx="10545775" cy="274320"/>
+          </a:xfrm>
+          <a:prstGeom prst="rect">
+            <a:avLst/>
+          </a:prstGeom>
+          <a:noFill/>
+        </p:spPr>
+        <p:txBody>
+          <a:bodyPr wrap="square" anchor="t" lIns="0" rIns="0" tIns="0" bIns="0">
+            <a:spAutoFit/>
+          </a:bodyPr>
+          <a:lstStyle/>
+          <a:p>
+            <a:pPr algn="l">
+              <a:lnSpc>
+                <a:spcPct val="100000"/>
+              </a:lnSpc>
+              <a:buNone/>
+            </a:pPr>
+            <a:r>
+              <a:rPr sz="1300" b="1">
+                <a:solidFill>
+                  <a:srgbClr val="0072CE"/>
+                </a:solidFill>
+                <a:latin typeface="Arial"/>
+              </a:rPr>
+              <a:t>ЗА ПРЕДЕЛАМИ ТРЕХ ВЕТОК</a:t>
+            </a:r>
+          </a:p>
+        </p:txBody>
+      </p:sp>
+      <p:sp>
+        <p:nvSpPr>
+          <p:cNvPr id="4" name="TextBox 3"/>
+          <p:cNvSpPr txBox="1"/>
+          <p:nvPr/>
+        </p:nvSpPr>
+        <p:spPr>
+          <a:xfrm>
+            <a:off x="822960" y="960120"/>
+            <a:ext cx="10545775" cy="822960"/>
+          </a:xfrm>
+          <a:prstGeom prst="rect">
+            <a:avLst/>
+          </a:prstGeom>
+          <a:noFill/>
+        </p:spPr>
+        <p:txBody>
+          <a:bodyPr wrap="square" anchor="t" lIns="0" rIns="0" tIns="0" bIns="0">
+            <a:spAutoFit/>
+          </a:bodyPr>
+          <a:lstStyle/>
+          <a:p>
+            <a:pPr algn="l">
+              <a:lnSpc>
+                <a:spcPct val="100000"/>
+              </a:lnSpc>
+              <a:buNone/>
+            </a:pPr>
+            <a:r>
+              <a:rPr sz="3200" b="1">
+                <a:solidFill>
+                  <a:srgbClr val="0F1418"/>
+                </a:solidFill>
+                <a:latin typeface="Arial"/>
+              </a:rPr>
+              <a:t>Что еще бывает</a:t>
+            </a:r>
+          </a:p>
+        </p:txBody>
+      </p:sp>
+      <p:sp>
+        <p:nvSpPr>
+          <p:cNvPr id="5" name="Rectangle 4"/>
+          <p:cNvSpPr/>
+          <p:nvPr/>
+        </p:nvSpPr>
+        <p:spPr>
+          <a:xfrm>
+            <a:off x="822960" y="1673352"/>
+            <a:ext cx="1463040" cy="50800"/>
+          </a:xfrm>
+          <a:prstGeom prst="rect">
+            <a:avLst/>
+          </a:prstGeom>
+          <a:solidFill>
             <a:srgbClr val="0072CE"/>
           </a:solidFill>
           <a:ln>
@@ -16840,7 +17181,7 @@
       </p:sp>
       <p:pic>
         <p:nvPicPr>
-          <p:cNvPr id="3" name="Picture 2" descr="emblem_round.png"/>
+          <p:cNvPr id="6" name="Picture 5" descr="other_tasks.png"/>
           <p:cNvPicPr>
             <a:picLocks noChangeAspect="1"/>
           </p:cNvPicPr>
@@ -16854,8 +17195,8 @@
         </p:blipFill>
         <p:spPr>
           <a:xfrm>
-            <a:off x="9814255" y="4480560"/>
-            <a:ext cx="1371600" cy="1371600"/>
+            <a:off x="822960" y="2103120"/>
+            <a:ext cx="10545775" cy="3679153"/>
           </a:xfrm>
           <a:prstGeom prst="rect">
             <a:avLst/>
@@ -16864,14 +17205,62 @@
       </p:pic>
       <p:sp>
         <p:nvSpPr>
-          <p:cNvPr id="4" name="TextBox 3"/>
-          <p:cNvSpPr txBox="1"/>
-          <p:nvPr/>
-        </p:nvSpPr>
-        <p:spPr>
-          <a:xfrm>
-            <a:off x="822960" y="1828800"/>
-            <a:ext cx="2743200" cy="1463040"/>
+          <p:cNvPr id="7" name="TextBox 6"/>
+          <p:cNvSpPr txBox="1"/>
+          <p:nvPr/>
+        </p:nvSpPr>
+        <p:spPr>
+          <a:xfrm>
+            <a:off x="822960" y="6038305"/>
+            <a:ext cx="10545775" cy="658368"/>
+          </a:xfrm>
+          <a:prstGeom prst="rect">
+            <a:avLst/>
+          </a:prstGeom>
+          <a:noFill/>
+        </p:spPr>
+        <p:txBody>
+          <a:bodyPr wrap="square" lIns="0" rIns="0" tIns="0" bIns="0">
+            <a:spAutoFit/>
+          </a:bodyPr>
+          <a:lstStyle/>
+          <a:p>
+            <a:pPr marL="228600" indent="-228600">
+              <a:lnSpc>
+                <a:spcPct val="135000"/>
+              </a:lnSpc>
+              <a:spcAft>
+                <a:spcPts val="1000"/>
+              </a:spcAft>
+              <a:buClr>
+                <a:srgbClr val="0072CE"/>
+              </a:buClr>
+              <a:buSzPts val="930"/>
+              <a:buFont typeface="Arial"/>
+              <a:buChar char="▪"/>
+            </a:pPr>
+            <a:r>
+              <a:rPr sz="1500">
+                <a:solidFill>
+                  <a:srgbClr val="0F1418"/>
+                </a:solidFill>
+                <a:latin typeface="Arial"/>
+              </a:rPr>
+              <a:t>Не укладываются в три ветки целиком, но встречаются постоянно</a:t>
+            </a:r>
+          </a:p>
+        </p:txBody>
+      </p:sp>
+      <p:sp>
+        <p:nvSpPr>
+          <p:cNvPr id="8" name="TextBox 7"/>
+          <p:cNvSpPr txBox="1"/>
+          <p:nvPr/>
+        </p:nvSpPr>
+        <p:spPr>
+          <a:xfrm>
+            <a:off x="822960" y="6291072"/>
+            <a:ext cx="8229600" cy="274320"/>
           </a:xfrm>
           <a:prstGeom prst="rect">
             <a:avLst/>
@@ -16891,27 +17280,27 @@
               <a:buNone/>
             </a:pPr>
             <a:r>
-              <a:rPr sz="9000" b="1">
-                <a:solidFill>
-                  <a:srgbClr val="FFFFFF"/>
-                </a:solidFill>
-                <a:latin typeface="Arial"/>
-              </a:rPr>
-              <a:t>04</a:t>
-            </a:r>
-          </a:p>
-        </p:txBody>
-      </p:sp>
-      <p:sp>
-        <p:nvSpPr>
-          <p:cNvPr id="5" name="TextBox 4"/>
-          <p:cNvSpPr txBox="1"/>
-          <p:nvPr/>
-        </p:nvSpPr>
-        <p:spPr>
-          <a:xfrm>
-            <a:off x="822960" y="3383280"/>
-            <a:ext cx="9601200" cy="1097280"/>
+              <a:rPr sz="1100" b="0">
+                <a:solidFill>
+                  <a:srgbClr val="6B7280"/>
+                </a:solidFill>
+                <a:latin typeface="Arial"/>
+              </a:rPr>
+              <a:t>Занятие 1 · Введение</a:t>
+            </a:r>
+          </a:p>
+        </p:txBody>
+      </p:sp>
+      <p:sp>
+        <p:nvSpPr>
+          <p:cNvPr id="9" name="TextBox 8"/>
+          <p:cNvSpPr txBox="1"/>
+          <p:nvPr/>
+        </p:nvSpPr>
+        <p:spPr>
+          <a:xfrm>
+            <a:off x="10454335" y="6291072"/>
+            <a:ext cx="914400" cy="274320"/>
           </a:xfrm>
           <a:prstGeom prst="rect">
             <a:avLst/>
@@ -16924,60 +17313,20 @@
           </a:bodyPr>
           <a:lstStyle/>
           <a:p>
-            <a:pPr algn="l">
-              <a:lnSpc>
-                <a:spcPct val="110000"/>
-              </a:lnSpc>
-              <a:buNone/>
-            </a:pPr>
-            <a:r>
-              <a:rPr sz="4000" b="1">
-                <a:solidFill>
-                  <a:srgbClr val="FFFFFF"/>
-                </a:solidFill>
-                <a:latin typeface="Arial"/>
-              </a:rPr>
-              <a:t>Метод ближайших соседей</a:t>
-            </a:r>
-          </a:p>
-        </p:txBody>
-      </p:sp>
-      <p:sp>
-        <p:nvSpPr>
-          <p:cNvPr id="6" name="TextBox 5"/>
-          <p:cNvSpPr txBox="1"/>
-          <p:nvPr/>
-        </p:nvSpPr>
-        <p:spPr>
-          <a:xfrm>
-            <a:off x="822960" y="4572000"/>
-            <a:ext cx="9601200" cy="548640"/>
-          </a:xfrm>
-          <a:prstGeom prst="rect">
-            <a:avLst/>
-          </a:prstGeom>
-          <a:noFill/>
-        </p:spPr>
-        <p:txBody>
-          <a:bodyPr wrap="square" anchor="t" lIns="0" rIns="0" tIns="0" bIns="0">
-            <a:spAutoFit/>
-          </a:bodyPr>
-          <a:lstStyle/>
-          <a:p>
-            <a:pPr algn="l">
-              <a:lnSpc>
-                <a:spcPct val="120000"/>
-              </a:lnSpc>
-              <a:buNone/>
-            </a:pPr>
-            <a:r>
-              <a:rPr sz="1800" b="0">
-                <a:solidFill>
-                  <a:srgbClr val="FFFFFF"/>
-                </a:solidFill>
-                <a:latin typeface="Arial"/>
-              </a:rPr>
-              <a:t>первый алгоритм курса, придуман в 1951 году</a:t>
+            <a:pPr algn="r">
+              <a:lnSpc>
+                <a:spcPct val="100000"/>
+              </a:lnSpc>
+              <a:buNone/>
+            </a:pPr>
+            <a:r>
+              <a:rPr sz="1100" b="0">
+                <a:solidFill>
+                  <a:srgbClr val="6B7280"/>
+                </a:solidFill>
+                <a:latin typeface="Arial"/>
+              </a:rPr>
+              <a:t>25</a:t>
             </a:r>
           </a:p>
         </p:txBody>
@@ -17015,130 +17364,6 @@
             <a:avLst/>
           </a:prstGeom>
           <a:solidFill>
-            <a:srgbClr val="FFFFFF"/>
-          </a:solidFill>
-          <a:ln>
-            <a:noFill/>
-          </a:ln>
-          <a:effectLst/>
-        </p:spPr>
-        <p:style>
-          <a:lnRef idx="1">
-            <a:schemeClr val="accent1"/>
-          </a:lnRef>
-          <a:fillRef idx="3">
-            <a:schemeClr val="accent1"/>
-          </a:fillRef>
-          <a:effectRef idx="2">
-            <a:schemeClr val="accent1"/>
-          </a:effectRef>
-          <a:fontRef idx="minor">
-            <a:schemeClr val="lt1"/>
-          </a:fontRef>
-        </p:style>
-        <p:txBody>
-          <a:bodyPr rtlCol="0" anchor="ctr"/>
-          <a:lstStyle/>
-          <a:p>
-            <a:pPr algn="ctr"/>
-          </a:p>
-        </p:txBody>
-      </p:sp>
-      <p:sp>
-        <p:nvSpPr>
-          <p:cNvPr id="3" name="TextBox 2"/>
-          <p:cNvSpPr txBox="1"/>
-          <p:nvPr/>
-        </p:nvSpPr>
-        <p:spPr>
-          <a:xfrm>
-            <a:off x="822960" y="594360"/>
-            <a:ext cx="10545775" cy="274320"/>
-          </a:xfrm>
-          <a:prstGeom prst="rect">
-            <a:avLst/>
-          </a:prstGeom>
-          <a:noFill/>
-        </p:spPr>
-        <p:txBody>
-          <a:bodyPr wrap="square" anchor="t" lIns="0" rIns="0" tIns="0" bIns="0">
-            <a:spAutoFit/>
-          </a:bodyPr>
-          <a:lstStyle/>
-          <a:p>
-            <a:pPr algn="l">
-              <a:lnSpc>
-                <a:spcPct val="100000"/>
-              </a:lnSpc>
-              <a:buNone/>
-            </a:pPr>
-            <a:r>
-              <a:rPr sz="1300" b="1">
-                <a:solidFill>
-                  <a:srgbClr val="0072CE"/>
-                </a:solidFill>
-                <a:latin typeface="Arial"/>
-              </a:rPr>
-              <a:t>ДАННЫЕ</a:t>
-            </a:r>
-          </a:p>
-        </p:txBody>
-      </p:sp>
-      <p:sp>
-        <p:nvSpPr>
-          <p:cNvPr id="4" name="TextBox 3"/>
-          <p:cNvSpPr txBox="1"/>
-          <p:nvPr/>
-        </p:nvSpPr>
-        <p:spPr>
-          <a:xfrm>
-            <a:off x="822960" y="960120"/>
-            <a:ext cx="10545775" cy="822960"/>
-          </a:xfrm>
-          <a:prstGeom prst="rect">
-            <a:avLst/>
-          </a:prstGeom>
-          <a:noFill/>
-        </p:spPr>
-        <p:txBody>
-          <a:bodyPr wrap="square" anchor="t" lIns="0" rIns="0" tIns="0" bIns="0">
-            <a:spAutoFit/>
-          </a:bodyPr>
-          <a:lstStyle/>
-          <a:p>
-            <a:pPr algn="l">
-              <a:lnSpc>
-                <a:spcPct val="100000"/>
-              </a:lnSpc>
-              <a:buNone/>
-            </a:pPr>
-            <a:r>
-              <a:rPr sz="3200" b="1">
-                <a:solidFill>
-                  <a:srgbClr val="0F1418"/>
-                </a:solidFill>
-                <a:latin typeface="Arial"/>
-              </a:rPr>
-              <a:t>На чем будем работать</a:t>
-            </a:r>
-          </a:p>
-        </p:txBody>
-      </p:sp>
-      <p:sp>
-        <p:nvSpPr>
-          <p:cNvPr id="5" name="Rectangle 4"/>
-          <p:cNvSpPr/>
-          <p:nvPr/>
-        </p:nvSpPr>
-        <p:spPr>
-          <a:xfrm>
-            <a:off x="822960" y="1673352"/>
-            <a:ext cx="1463040" cy="50800"/>
-          </a:xfrm>
-          <a:prstGeom prst="rect">
-            <a:avLst/>
-          </a:prstGeom>
-          <a:solidFill>
             <a:srgbClr val="0072CE"/>
           </a:solidFill>
           <a:ln>
@@ -17170,7 +17395,7 @@
       </p:sp>
       <p:pic>
         <p:nvPicPr>
-          <p:cNvPr id="6" name="Picture 5" descr="wine_dataset.png"/>
+          <p:cNvPr id="3" name="Picture 2" descr="emblem_round.png"/>
           <p:cNvPicPr>
             <a:picLocks noChangeAspect="1"/>
           </p:cNvPicPr>
@@ -17184,8 +17409,8 @@
         </p:blipFill>
         <p:spPr>
           <a:xfrm>
-            <a:off x="1568695" y="2103120"/>
-            <a:ext cx="9054305" cy="4114800"/>
+            <a:off x="9814255" y="4480560"/>
+            <a:ext cx="1371600" cy="1371600"/>
           </a:xfrm>
           <a:prstGeom prst="rect">
             <a:avLst/>
@@ -17194,14 +17419,14 @@
       </p:pic>
       <p:sp>
         <p:nvSpPr>
-          <p:cNvPr id="7" name="TextBox 6"/>
-          <p:cNvSpPr txBox="1"/>
-          <p:nvPr/>
-        </p:nvSpPr>
-        <p:spPr>
-          <a:xfrm>
-            <a:off x="822960" y="6291072"/>
-            <a:ext cx="8229600" cy="274320"/>
+          <p:cNvPr id="4" name="TextBox 3"/>
+          <p:cNvSpPr txBox="1"/>
+          <p:nvPr/>
+        </p:nvSpPr>
+        <p:spPr>
+          <a:xfrm>
+            <a:off x="822960" y="1828800"/>
+            <a:ext cx="2743200" cy="1463040"/>
           </a:xfrm>
           <a:prstGeom prst="rect">
             <a:avLst/>
@@ -17221,27 +17446,27 @@
               <a:buNone/>
             </a:pPr>
             <a:r>
-              <a:rPr sz="1100" b="0">
-                <a:solidFill>
-                  <a:srgbClr val="6B7280"/>
-                </a:solidFill>
-                <a:latin typeface="Arial"/>
-              </a:rPr>
-              <a:t>Занятие 1 · Введение</a:t>
-            </a:r>
-          </a:p>
-        </p:txBody>
-      </p:sp>
-      <p:sp>
-        <p:nvSpPr>
-          <p:cNvPr id="8" name="TextBox 7"/>
-          <p:cNvSpPr txBox="1"/>
-          <p:nvPr/>
-        </p:nvSpPr>
-        <p:spPr>
-          <a:xfrm>
-            <a:off x="10454335" y="6291072"/>
-            <a:ext cx="914400" cy="274320"/>
+              <a:rPr sz="9000" b="1">
+                <a:solidFill>
+                  <a:srgbClr val="FFFFFF"/>
+                </a:solidFill>
+                <a:latin typeface="Arial"/>
+              </a:rPr>
+              <a:t>04</a:t>
+            </a:r>
+          </a:p>
+        </p:txBody>
+      </p:sp>
+      <p:sp>
+        <p:nvSpPr>
+          <p:cNvPr id="5" name="TextBox 4"/>
+          <p:cNvSpPr txBox="1"/>
+          <p:nvPr/>
+        </p:nvSpPr>
+        <p:spPr>
+          <a:xfrm>
+            <a:off x="822960" y="3383280"/>
+            <a:ext cx="9601200" cy="1097280"/>
           </a:xfrm>
           <a:prstGeom prst="rect">
             <a:avLst/>
@@ -17254,20 +17479,60 @@
           </a:bodyPr>
           <a:lstStyle/>
           <a:p>
-            <a:pPr algn="r">
-              <a:lnSpc>
-                <a:spcPct val="100000"/>
-              </a:lnSpc>
-              <a:buNone/>
-            </a:pPr>
-            <a:r>
-              <a:rPr sz="1100" b="0">
-                <a:solidFill>
-                  <a:srgbClr val="6B7280"/>
-                </a:solidFill>
-                <a:latin typeface="Arial"/>
-              </a:rPr>
-              <a:t>25</a:t>
+            <a:pPr algn="l">
+              <a:lnSpc>
+                <a:spcPct val="110000"/>
+              </a:lnSpc>
+              <a:buNone/>
+            </a:pPr>
+            <a:r>
+              <a:rPr sz="4000" b="1">
+                <a:solidFill>
+                  <a:srgbClr val="FFFFFF"/>
+                </a:solidFill>
+                <a:latin typeface="Arial"/>
+              </a:rPr>
+              <a:t>Метод ближайших соседей</a:t>
+            </a:r>
+          </a:p>
+        </p:txBody>
+      </p:sp>
+      <p:sp>
+        <p:nvSpPr>
+          <p:cNvPr id="6" name="TextBox 5"/>
+          <p:cNvSpPr txBox="1"/>
+          <p:nvPr/>
+        </p:nvSpPr>
+        <p:spPr>
+          <a:xfrm>
+            <a:off x="822960" y="4572000"/>
+            <a:ext cx="9601200" cy="548640"/>
+          </a:xfrm>
+          <a:prstGeom prst="rect">
+            <a:avLst/>
+          </a:prstGeom>
+          <a:noFill/>
+        </p:spPr>
+        <p:txBody>
+          <a:bodyPr wrap="square" anchor="t" lIns="0" rIns="0" tIns="0" bIns="0">
+            <a:spAutoFit/>
+          </a:bodyPr>
+          <a:lstStyle/>
+          <a:p>
+            <a:pPr algn="l">
+              <a:lnSpc>
+                <a:spcPct val="120000"/>
+              </a:lnSpc>
+              <a:buNone/>
+            </a:pPr>
+            <a:r>
+              <a:rPr sz="1800" b="0">
+                <a:solidFill>
+                  <a:srgbClr val="FFFFFF"/>
+                </a:solidFill>
+                <a:latin typeface="Arial"/>
+              </a:rPr>
+              <a:t>первый алгоритм курса, придуман в 1951 году</a:t>
             </a:r>
           </a:p>
         </p:txBody>
@@ -17593,6 +17858,46 @@
         <p:spPr>
           <a:xfrm>
             <a:off x="822960" y="594360"/>
+            <a:ext cx="10545775" cy="274320"/>
+          </a:xfrm>
+          <a:prstGeom prst="rect">
+            <a:avLst/>
+          </a:prstGeom>
+          <a:noFill/>
+        </p:spPr>
+        <p:txBody>
+          <a:bodyPr wrap="square" anchor="t" lIns="0" rIns="0" tIns="0" bIns="0">
+            <a:spAutoFit/>
+          </a:bodyPr>
+          <a:lstStyle/>
+          <a:p>
+            <a:pPr algn="l">
+              <a:lnSpc>
+                <a:spcPct val="100000"/>
+              </a:lnSpc>
+              <a:buNone/>
+            </a:pPr>
+            <a:r>
+              <a:rPr sz="1300" b="1">
+                <a:solidFill>
+                  <a:srgbClr val="0072CE"/>
+                </a:solidFill>
+                <a:latin typeface="Arial"/>
+              </a:rPr>
+              <a:t>ДАННЫЕ</a:t>
+            </a:r>
+          </a:p>
+        </p:txBody>
+      </p:sp>
+      <p:sp>
+        <p:nvSpPr>
+          <p:cNvPr id="4" name="TextBox 3"/>
+          <p:cNvSpPr txBox="1"/>
+          <p:nvPr/>
+        </p:nvSpPr>
+        <p:spPr>
+          <a:xfrm>
+            <a:off x="822960" y="960120"/>
             <a:ext cx="10545775" cy="822960"/>
           </a:xfrm>
           <a:prstGeom prst="rect">
@@ -17619,20 +17924,20 @@
                 </a:solidFill>
                 <a:latin typeface="Arial"/>
               </a:rPr>
-              <a:t>Идея целиком</a:t>
-            </a:r>
-          </a:p>
-        </p:txBody>
-      </p:sp>
-      <p:sp>
-        <p:nvSpPr>
-          <p:cNvPr id="4" name="Rectangle 3"/>
+              <a:t>На чем будем работать</a:t>
+            </a:r>
+          </a:p>
+        </p:txBody>
+      </p:sp>
+      <p:sp>
+        <p:nvSpPr>
+          <p:cNvPr id="5" name="Rectangle 4"/>
           <p:cNvSpPr/>
           <p:nvPr/>
         </p:nvSpPr>
         <p:spPr>
           <a:xfrm>
-            <a:off x="822960" y="1307592"/>
+            <a:off x="822960" y="1673352"/>
             <a:ext cx="1463040" cy="50800"/>
           </a:xfrm>
           <a:prstGeom prst="rect">
@@ -17670,7 +17975,7 @@
       </p:sp>
       <p:pic>
         <p:nvPicPr>
-          <p:cNvPr id="5" name="Picture 4" descr="knn_idea.png"/>
+          <p:cNvPr id="6" name="Picture 5" descr="wine_dataset.png"/>
           <p:cNvPicPr>
             <a:picLocks noChangeAspect="1"/>
           </p:cNvPicPr>
@@ -17684,62 +17989,14 @@
         </p:blipFill>
         <p:spPr>
           <a:xfrm>
-            <a:off x="2292497" y="1737360"/>
-            <a:ext cx="7606700" cy="3730752"/>
+            <a:off x="1568695" y="2103120"/>
+            <a:ext cx="9054305" cy="4114800"/>
           </a:xfrm>
           <a:prstGeom prst="rect">
             <a:avLst/>
           </a:prstGeom>
         </p:spPr>
       </p:pic>
-      <p:sp>
-        <p:nvSpPr>
-          <p:cNvPr id="6" name="TextBox 5"/>
-          <p:cNvSpPr txBox="1"/>
-          <p:nvPr/>
-        </p:nvSpPr>
-        <p:spPr>
-          <a:xfrm>
-            <a:off x="822960" y="5724144"/>
-            <a:ext cx="10545775" cy="658368"/>
-          </a:xfrm>
-          <a:prstGeom prst="rect">
-            <a:avLst/>
-          </a:prstGeom>
-          <a:noFill/>
-        </p:spPr>
-        <p:txBody>
-          <a:bodyPr wrap="square" lIns="0" rIns="0" tIns="0" bIns="0">
-            <a:spAutoFit/>
-          </a:bodyPr>
-          <a:lstStyle/>
-          <a:p>
-            <a:pPr marL="228600" indent="-228600">
-              <a:lnSpc>
-                <a:spcPct val="135000"/>
-              </a:lnSpc>
-              <a:spcAft>
-                <a:spcPts val="1000"/>
-              </a:spcAft>
-              <a:buClr>
-                <a:srgbClr val="0072CE"/>
-              </a:buClr>
-              <a:buSzPts val="930"/>
-              <a:buFont typeface="Arial"/>
-              <a:buChar char="▪"/>
-            </a:pPr>
-            <a:r>
-              <a:rPr sz="1500">
-                <a:solidFill>
-                  <a:srgbClr val="0F1418"/>
-                </a:solidFill>
-                <a:latin typeface="Arial"/>
-              </a:rPr>
-              <a:t>Похожие объекты имеют похожие ответы. Находим k ближайших и устраиваем голосование</a:t>
-            </a:r>
-          </a:p>
-        </p:txBody>
-      </p:sp>
       <p:sp>
         <p:nvSpPr>
           <p:cNvPr id="7" name="TextBox 6"/>
@@ -17917,7 +18174,7 @@
                 </a:solidFill>
                 <a:latin typeface="Arial"/>
               </a:rPr>
-              <a:t>Что значит «ближайший»</a:t>
+              <a:t>Идея целиком</a:t>
             </a:r>
           </a:p>
         </p:txBody>
@@ -17968,7 +18225,7 @@
       </p:sp>
       <p:pic>
         <p:nvPicPr>
-          <p:cNvPr id="5" name="Picture 4" descr="f_euclid.png"/>
+          <p:cNvPr id="5" name="Picture 4" descr="knn_idea.png"/>
           <p:cNvPicPr>
             <a:picLocks noChangeAspect="1"/>
           </p:cNvPicPr>
@@ -17982,8 +18239,8 @@
         </p:blipFill>
         <p:spPr>
           <a:xfrm>
-            <a:off x="3637231" y="1737360"/>
-            <a:ext cx="4917232" cy="1828800"/>
+            <a:off x="2292497" y="1737360"/>
+            <a:ext cx="7606700" cy="3730752"/>
           </a:xfrm>
           <a:prstGeom prst="rect">
             <a:avLst/>
@@ -17998,8 +18255,8 @@
         </p:nvSpPr>
         <p:spPr>
           <a:xfrm>
-            <a:off x="822960" y="3886200"/>
-            <a:ext cx="10545775" cy="2011680"/>
+            <a:off x="822960" y="5724144"/>
+            <a:ext cx="10545775" cy="658368"/>
           </a:xfrm>
           <a:prstGeom prst="rect">
             <a:avLst/>
@@ -18022,68 +18279,18 @@
               <a:buClr>
                 <a:srgbClr val="0072CE"/>
               </a:buClr>
-              <a:buSzPts val="1054"/>
+              <a:buSzPts val="930"/>
               <a:buFont typeface="Arial"/>
               <a:buChar char="▪"/>
             </a:pPr>
             <a:r>
-              <a:rPr sz="1700">
+              <a:rPr sz="1500">
                 <a:solidFill>
                   <a:srgbClr val="0F1418"/>
                 </a:solidFill>
                 <a:latin typeface="Arial"/>
               </a:rPr>
-              <a:t>Евклидово расстояние: обычная длина отрезка между точками</a:t>
-            </a:r>
-          </a:p>
-          <a:p>
-            <a:pPr marL="228600" indent="-228600">
-              <a:lnSpc>
-                <a:spcPct val="135000"/>
-              </a:lnSpc>
-              <a:spcAft>
-                <a:spcPts val="1000"/>
-              </a:spcAft>
-              <a:buClr>
-                <a:srgbClr val="0072CE"/>
-              </a:buClr>
-              <a:buSzPts val="1054"/>
-              <a:buFont typeface="Arial"/>
-              <a:buChar char="▪"/>
-            </a:pPr>
-            <a:r>
-              <a:rPr sz="1700">
-                <a:solidFill>
-                  <a:srgbClr val="0F1418"/>
-                </a:solidFill>
-                <a:latin typeface="Arial"/>
-              </a:rPr>
-              <a:t>Считается сразу до всех объектов обучающей выборки</a:t>
-            </a:r>
-          </a:p>
-          <a:p>
-            <a:pPr marL="228600" indent="-228600">
-              <a:lnSpc>
-                <a:spcPct val="135000"/>
-              </a:lnSpc>
-              <a:spcAft>
-                <a:spcPts val="1000"/>
-              </a:spcAft>
-              <a:buClr>
-                <a:srgbClr val="0072CE"/>
-              </a:buClr>
-              <a:buSzPts val="1054"/>
-              <a:buFont typeface="Arial"/>
-              <a:buChar char="▪"/>
-            </a:pPr>
-            <a:r>
-              <a:rPr sz="1700">
-                <a:solidFill>
-                  <a:srgbClr val="0F1418"/>
-                </a:solidFill>
-                <a:latin typeface="Arial"/>
-              </a:rPr>
-              <a:t>Сумма идет по всем признакам, каждый вносит свой вклад</a:t>
+              <a:t>Похожие объекты имеют похожие ответы. Находим k ближайших и устраиваем голосование</a:t>
             </a:r>
           </a:p>
         </p:txBody>
@@ -18265,7 +18472,7 @@
                 </a:solidFill>
                 <a:latin typeface="Arial"/>
               </a:rPr>
-              <a:t>Что делает k</a:t>
+              <a:t>Что значит «ближайший»</a:t>
             </a:r>
           </a:p>
         </p:txBody>
@@ -18316,7 +18523,7 @@
       </p:sp>
       <p:pic>
         <p:nvPicPr>
-          <p:cNvPr id="5" name="Picture 4" descr="knn_boundary.png"/>
+          <p:cNvPr id="5" name="Picture 4" descr="f_euclid.png"/>
           <p:cNvPicPr>
             <a:picLocks noChangeAspect="1"/>
           </p:cNvPicPr>
@@ -18330,8 +18537,8 @@
         </p:blipFill>
         <p:spPr>
           <a:xfrm>
-            <a:off x="822960" y="1737360"/>
-            <a:ext cx="10545775" cy="3351347"/>
+            <a:off x="3637231" y="1737360"/>
+            <a:ext cx="4917232" cy="1828800"/>
           </a:xfrm>
           <a:prstGeom prst="rect">
             <a:avLst/>
@@ -18346,8 +18553,8 @@
         </p:nvSpPr>
         <p:spPr>
           <a:xfrm>
-            <a:off x="822960" y="5344739"/>
-            <a:ext cx="10545775" cy="658368"/>
+            <a:off x="822960" y="3886200"/>
+            <a:ext cx="10545775" cy="2011680"/>
           </a:xfrm>
           <a:prstGeom prst="rect">
             <a:avLst/>
@@ -18370,18 +18577,68 @@
               <a:buClr>
                 <a:srgbClr val="0072CE"/>
               </a:buClr>
-              <a:buSzPts val="930"/>
+              <a:buSzPts val="1054"/>
               <a:buFont typeface="Arial"/>
               <a:buChar char="▪"/>
             </a:pPr>
             <a:r>
-              <a:rPr sz="1500">
+              <a:rPr sz="1700">
                 <a:solidFill>
                   <a:srgbClr val="0F1418"/>
                 </a:solidFill>
                 <a:latin typeface="Arial"/>
               </a:rPr>
-              <a:t>При k = 1 граница огибает каждую точку. При k = 50 она почти прямая</a:t>
+              <a:t>Евклидово расстояние: обычная длина отрезка между точками</a:t>
+            </a:r>
+          </a:p>
+          <a:p>
+            <a:pPr marL="228600" indent="-228600">
+              <a:lnSpc>
+                <a:spcPct val="135000"/>
+              </a:lnSpc>
+              <a:spcAft>
+                <a:spcPts val="1000"/>
+              </a:spcAft>
+              <a:buClr>
+                <a:srgbClr val="0072CE"/>
+              </a:buClr>
+              <a:buSzPts val="1054"/>
+              <a:buFont typeface="Arial"/>
+              <a:buChar char="▪"/>
+            </a:pPr>
+            <a:r>
+              <a:rPr sz="1700">
+                <a:solidFill>
+                  <a:srgbClr val="0F1418"/>
+                </a:solidFill>
+                <a:latin typeface="Arial"/>
+              </a:rPr>
+              <a:t>Считается сразу до всех объектов обучающей выборки</a:t>
+            </a:r>
+          </a:p>
+          <a:p>
+            <a:pPr marL="228600" indent="-228600">
+              <a:lnSpc>
+                <a:spcPct val="135000"/>
+              </a:lnSpc>
+              <a:spcAft>
+                <a:spcPts val="1000"/>
+              </a:spcAft>
+              <a:buClr>
+                <a:srgbClr val="0072CE"/>
+              </a:buClr>
+              <a:buSzPts val="1054"/>
+              <a:buFont typeface="Arial"/>
+              <a:buChar char="▪"/>
+            </a:pPr>
+            <a:r>
+              <a:rPr sz="1700">
+                <a:solidFill>
+                  <a:srgbClr val="0F1418"/>
+                </a:solidFill>
+                <a:latin typeface="Arial"/>
+              </a:rPr>
+              <a:t>Сумма идет по всем признакам, каждый вносит свой вклад</a:t>
             </a:r>
           </a:p>
         </p:txBody>
@@ -18563,7 +18820,7 @@
                 </a:solidFill>
                 <a:latin typeface="Arial"/>
               </a:rPr>
-              <a:t>Где именно переобучение</a:t>
+              <a:t>Что делает k</a:t>
             </a:r>
           </a:p>
         </p:txBody>
@@ -18614,7 +18871,7 @@
       </p:sp>
       <p:pic>
         <p:nvPicPr>
-          <p:cNvPr id="5" name="Picture 4" descr="knn_k_curve.png"/>
+          <p:cNvPr id="5" name="Picture 4" descr="knn_boundary.png"/>
           <p:cNvPicPr>
             <a:picLocks noChangeAspect="1"/>
           </p:cNvPicPr>
@@ -18628,8 +18885,8 @@
         </p:blipFill>
         <p:spPr>
           <a:xfrm>
-            <a:off x="2156440" y="1737360"/>
-            <a:ext cx="7878814" cy="3730752"/>
+            <a:off x="822960" y="1737360"/>
+            <a:ext cx="10545775" cy="3351347"/>
           </a:xfrm>
           <a:prstGeom prst="rect">
             <a:avLst/>
@@ -18644,7 +18901,7 @@
         </p:nvSpPr>
         <p:spPr>
           <a:xfrm>
-            <a:off x="822960" y="5724144"/>
+            <a:off x="822960" y="5344739"/>
             <a:ext cx="10545775" cy="658368"/>
           </a:xfrm>
           <a:prstGeom prst="rect">
@@ -18679,7 +18936,7 @@
                 </a:solidFill>
                 <a:latin typeface="Arial"/>
               </a:rPr>
-              <a:t>При k = 1 на обучающей выборке ошибок нет вообще: ближайший сосед объекта это он сам</a:t>
+              <a:t>При k = 1 граница огибает каждую точку. При k = 50 она почти прямая</a:t>
             </a:r>
           </a:p>
         </p:txBody>
@@ -18835,7 +19092,7 @@
         <p:spPr>
           <a:xfrm>
             <a:off x="822960" y="594360"/>
-            <a:ext cx="10545775" cy="274320"/>
+            <a:ext cx="10545775" cy="822960"/>
           </a:xfrm>
           <a:prstGeom prst="rect">
             <a:avLst/>
@@ -18855,66 +19112,26 @@
               <a:buNone/>
             </a:pPr>
             <a:r>
-              <a:rPr sz="1300" b="1">
-                <a:solidFill>
-                  <a:srgbClr val="0072CE"/>
-                </a:solidFill>
-                <a:latin typeface="Arial"/>
-              </a:rPr>
-              <a:t>ШАГ 1</a:t>
-            </a:r>
-          </a:p>
-        </p:txBody>
-      </p:sp>
-      <p:sp>
-        <p:nvSpPr>
-          <p:cNvPr id="4" name="TextBox 3"/>
-          <p:cNvSpPr txBox="1"/>
-          <p:nvPr/>
-        </p:nvSpPr>
-        <p:spPr>
-          <a:xfrm>
-            <a:off x="822960" y="960120"/>
-            <a:ext cx="10545775" cy="822960"/>
-          </a:xfrm>
-          <a:prstGeom prst="rect">
-            <a:avLst/>
-          </a:prstGeom>
-          <a:noFill/>
-        </p:spPr>
-        <p:txBody>
-          <a:bodyPr wrap="square" anchor="t" lIns="0" rIns="0" tIns="0" bIns="0">
-            <a:spAutoFit/>
-          </a:bodyPr>
-          <a:lstStyle/>
-          <a:p>
-            <a:pPr algn="l">
-              <a:lnSpc>
-                <a:spcPct val="100000"/>
-              </a:lnSpc>
-              <a:buNone/>
-            </a:pPr>
-            <a:r>
               <a:rPr sz="3200" b="1">
                 <a:solidFill>
                   <a:srgbClr val="0F1418"/>
                 </a:solidFill>
                 <a:latin typeface="Arial"/>
               </a:rPr>
-              <a:t>Посмотрим на данные</a:t>
-            </a:r>
-          </a:p>
-        </p:txBody>
-      </p:sp>
-      <p:sp>
-        <p:nvSpPr>
-          <p:cNvPr id="5" name="Rectangle 4"/>
+              <a:t>Где именно переобучение</a:t>
+            </a:r>
+          </a:p>
+        </p:txBody>
+      </p:sp>
+      <p:sp>
+        <p:nvSpPr>
+          <p:cNvPr id="4" name="Rectangle 3"/>
           <p:cNvSpPr/>
           <p:nvPr/>
         </p:nvSpPr>
         <p:spPr>
           <a:xfrm>
-            <a:off x="822960" y="1673352"/>
+            <a:off x="822960" y="1307592"/>
             <a:ext cx="1463040" cy="50800"/>
           </a:xfrm>
           <a:prstGeom prst="rect">
@@ -18952,7 +19169,7 @@
       </p:sp>
       <p:pic>
         <p:nvPicPr>
-          <p:cNvPr id="6" name="Picture 5" descr="scale_step1.png"/>
+          <p:cNvPr id="5" name="Picture 4" descr="knn_k_curve.png"/>
           <p:cNvPicPr>
             <a:picLocks noChangeAspect="1"/>
           </p:cNvPicPr>
@@ -18966,8 +19183,8 @@
         </p:blipFill>
         <p:spPr>
           <a:xfrm>
-            <a:off x="1178820" y="2103120"/>
-            <a:ext cx="9834055" cy="3730752"/>
+            <a:off x="2156440" y="1737360"/>
+            <a:ext cx="7878814" cy="3730752"/>
           </a:xfrm>
           <a:prstGeom prst="rect">
             <a:avLst/>
@@ -18976,13 +19193,13 @@
       </p:pic>
       <p:sp>
         <p:nvSpPr>
-          <p:cNvPr id="7" name="TextBox 6"/>
-          <p:cNvSpPr txBox="1"/>
-          <p:nvPr/>
-        </p:nvSpPr>
-        <p:spPr>
-          <a:xfrm>
-            <a:off x="822960" y="6089904"/>
+          <p:cNvPr id="6" name="TextBox 5"/>
+          <p:cNvSpPr txBox="1"/>
+          <p:nvPr/>
+        </p:nvSpPr>
+        <p:spPr>
+          <a:xfrm>
+            <a:off x="822960" y="5724144"/>
             <a:ext cx="10545775" cy="658368"/>
           </a:xfrm>
           <a:prstGeom prst="rect">
@@ -19017,14 +19234,14 @@
                 </a:solidFill>
                 <a:latin typeface="Arial"/>
               </a:rPr>
-              <a:t>Шесть квартир и четыре признака. Ничего необычного, обычная таблица</a:t>
-            </a:r>
-          </a:p>
-        </p:txBody>
-      </p:sp>
-      <p:sp>
-        <p:nvSpPr>
-          <p:cNvPr id="8" name="TextBox 7"/>
+              <a:t>При k = 1 на обучающей выборке ошибок нет вообще: ближайший сосед объекта это он сам</a:t>
+            </a:r>
+          </a:p>
+        </p:txBody>
+      </p:sp>
+      <p:sp>
+        <p:nvSpPr>
+          <p:cNvPr id="7" name="TextBox 6"/>
           <p:cNvSpPr txBox="1"/>
           <p:nvPr/>
         </p:nvSpPr>
@@ -19064,7 +19281,7 @@
       </p:sp>
       <p:sp>
         <p:nvSpPr>
-          <p:cNvPr id="9" name="TextBox 8"/>
+          <p:cNvPr id="8" name="TextBox 7"/>
           <p:cNvSpPr txBox="1"/>
           <p:nvPr/>
         </p:nvSpPr>
@@ -19199,7 +19416,7 @@
                 </a:solidFill>
                 <a:latin typeface="Arial"/>
               </a:rPr>
-              <a:t>ШАГ 2</a:t>
+              <a:t>ШАГ 1</a:t>
             </a:r>
           </a:p>
         </p:txBody>
@@ -19239,7 +19456,7 @@
                 </a:solidFill>
                 <a:latin typeface="Arial"/>
               </a:rPr>
-              <a:t>Кто на самом деле решает</a:t>
+              <a:t>Посмотрим на данные</a:t>
             </a:r>
           </a:p>
         </p:txBody>
@@ -19290,7 +19507,7 @@
       </p:sp>
       <p:pic>
         <p:nvPicPr>
-          <p:cNvPr id="6" name="Picture 5" descr="scale_step2.png"/>
+          <p:cNvPr id="6" name="Picture 5" descr="scale_step1.png"/>
           <p:cNvPicPr>
             <a:picLocks noChangeAspect="1"/>
           </p:cNvPicPr>
@@ -19355,7 +19572,7 @@
                 </a:solidFill>
                 <a:latin typeface="Arial"/>
               </a:rPr>
-              <a:t>Расстояния до метро измеряются тысячами, цена единицами. В сумме квадратов побеждает тот, у кого числа крупнее</a:t>
+              <a:t>Шесть квартир и четыре признака. Ничего необычного, обычная таблица</a:t>
             </a:r>
           </a:p>
         </p:txBody>
@@ -19537,7 +19754,7 @@
                 </a:solidFill>
                 <a:latin typeface="Arial"/>
               </a:rPr>
-              <a:t>ШАГ 3</a:t>
+              <a:t>ШАГ 2</a:t>
             </a:r>
           </a:p>
         </p:txBody>
@@ -19577,7 +19794,7 @@
                 </a:solidFill>
                 <a:latin typeface="Arial"/>
               </a:rPr>
-              <a:t>Лечение: стандартизация</a:t>
+              <a:t>Кто на самом деле решает</a:t>
             </a:r>
           </a:p>
         </p:txBody>
@@ -19628,7 +19845,7 @@
       </p:sp>
       <p:pic>
         <p:nvPicPr>
-          <p:cNvPr id="6" name="Picture 5" descr="f_standardize.png"/>
+          <p:cNvPr id="6" name="Picture 5" descr="scale_step2.png"/>
           <p:cNvPicPr>
             <a:picLocks noChangeAspect="1"/>
           </p:cNvPicPr>
@@ -19642,8 +19859,8 @@
         </p:blipFill>
         <p:spPr>
           <a:xfrm>
-            <a:off x="4532223" y="2103120"/>
-            <a:ext cx="3127248" cy="1828800"/>
+            <a:off x="1178820" y="2103120"/>
+            <a:ext cx="9834055" cy="3730752"/>
           </a:xfrm>
           <a:prstGeom prst="rect">
             <a:avLst/>
@@ -19658,8 +19875,8 @@
         </p:nvSpPr>
         <p:spPr>
           <a:xfrm>
-            <a:off x="822960" y="4251960"/>
-            <a:ext cx="10545775" cy="2011680"/>
+            <a:off x="822960" y="6089904"/>
+            <a:ext cx="10545775" cy="658368"/>
           </a:xfrm>
           <a:prstGeom prst="rect">
             <a:avLst/>
@@ -19682,93 +19899,18 @@
               <a:buClr>
                 <a:srgbClr val="0072CE"/>
               </a:buClr>
-              <a:buSzPts val="1054"/>
+              <a:buSzPts val="930"/>
               <a:buFont typeface="Arial"/>
               <a:buChar char="▪"/>
             </a:pPr>
             <a:r>
-              <a:rPr sz="1700">
+              <a:rPr sz="1500">
                 <a:solidFill>
                   <a:srgbClr val="0F1418"/>
                 </a:solidFill>
                 <a:latin typeface="Arial"/>
               </a:rPr>
-              <a:t>У каждого признака вычитаем среднее и делим на разброс</a:t>
-            </a:r>
-          </a:p>
-          <a:p>
-            <a:pPr marL="228600" indent="-228600">
-              <a:lnSpc>
-                <a:spcPct val="135000"/>
-              </a:lnSpc>
-              <a:spcAft>
-                <a:spcPts val="1000"/>
-              </a:spcAft>
-              <a:buClr>
-                <a:srgbClr val="0072CE"/>
-              </a:buClr>
-              <a:buSzPts val="1054"/>
-              <a:buFont typeface="Arial"/>
-              <a:buChar char="▪"/>
-            </a:pPr>
-            <a:r>
-              <a:rPr sz="1700">
-                <a:solidFill>
-                  <a:srgbClr val="0F1418"/>
-                </a:solidFill>
-                <a:latin typeface="Arial"/>
-              </a:rPr>
-              <a:t>После этого у всех признаков среднее ноль и разброс единица</a:t>
-            </a:r>
-          </a:p>
-          <a:p>
-            <a:pPr marL="228600" indent="-228600">
-              <a:lnSpc>
-                <a:spcPct val="135000"/>
-              </a:lnSpc>
-              <a:spcAft>
-                <a:spcPts val="1000"/>
-              </a:spcAft>
-              <a:buClr>
-                <a:srgbClr val="0072CE"/>
-              </a:buClr>
-              <a:buSzPts val="1054"/>
-              <a:buFont typeface="Arial"/>
-              <a:buChar char="▪"/>
-            </a:pPr>
-            <a:r>
-              <a:rPr sz="1700">
-                <a:solidFill>
-                  <a:srgbClr val="0F1418"/>
-                </a:solidFill>
-                <a:latin typeface="Arial"/>
-              </a:rPr>
-              <a:t>Среднее и разброс считаются ТОЛЬКО по обучающей выборке</a:t>
-            </a:r>
-          </a:p>
-          <a:p>
-            <a:pPr marL="228600" indent="-228600">
-              <a:lnSpc>
-                <a:spcPct val="135000"/>
-              </a:lnSpc>
-              <a:spcAft>
-                <a:spcPts val="1000"/>
-              </a:spcAft>
-              <a:buClr>
-                <a:srgbClr val="0072CE"/>
-              </a:buClr>
-              <a:buSzPts val="1054"/>
-              <a:buFont typeface="Arial"/>
-              <a:buChar char="▪"/>
-            </a:pPr>
-            <a:r>
-              <a:rPr sz="1700">
-                <a:solidFill>
-                  <a:srgbClr val="0F1418"/>
-                </a:solidFill>
-                <a:latin typeface="Arial"/>
-              </a:rPr>
-              <a:t>Посчитать их по всем данным сразу — это утечка, занятие четыре</a:t>
+              <a:t>Расстояния до метро измеряются тысячами, цена единицами. В сумме квадратов побеждает тот, у кого числа крупнее</a:t>
             </a:r>
           </a:p>
         </p:txBody>
@@ -19950,7 +20092,7 @@
                 </a:solidFill>
                 <a:latin typeface="Arial"/>
               </a:rPr>
-              <a:t>ШАГ 4</a:t>
+              <a:t>ШАГ 3</a:t>
             </a:r>
           </a:p>
         </p:txBody>
@@ -19990,7 +20132,7 @@
                 </a:solidFill>
                 <a:latin typeface="Arial"/>
               </a:rPr>
-              <a:t>Что изменилось</a:t>
+              <a:t>Лечение: стандартизация</a:t>
             </a:r>
           </a:p>
         </p:txBody>
@@ -20041,7 +20183,7 @@
       </p:sp>
       <p:pic>
         <p:nvPicPr>
-          <p:cNvPr id="6" name="Picture 5" descr="scale_step3.png"/>
+          <p:cNvPr id="6" name="Picture 5" descr="f_standardize.png"/>
           <p:cNvPicPr>
             <a:picLocks noChangeAspect="1"/>
           </p:cNvPicPr>
@@ -20055,8 +20197,8 @@
         </p:blipFill>
         <p:spPr>
           <a:xfrm>
-            <a:off x="857636" y="2103120"/>
-            <a:ext cx="10476423" cy="3730752"/>
+            <a:off x="4532223" y="2103120"/>
+            <a:ext cx="3127248" cy="1828800"/>
           </a:xfrm>
           <a:prstGeom prst="rect">
             <a:avLst/>
@@ -20071,8 +20213,8 @@
         </p:nvSpPr>
         <p:spPr>
           <a:xfrm>
-            <a:off x="822960" y="6089904"/>
-            <a:ext cx="10545775" cy="658368"/>
+            <a:off x="822960" y="4251960"/>
+            <a:ext cx="10545775" cy="2011680"/>
           </a:xfrm>
           <a:prstGeom prst="rect">
             <a:avLst/>
@@ -20095,18 +20237,93 @@
               <a:buClr>
                 <a:srgbClr val="0072CE"/>
               </a:buClr>
-              <a:buSzPts val="930"/>
+              <a:buSzPts val="1054"/>
               <a:buFont typeface="Arial"/>
               <a:buChar char="▪"/>
             </a:pPr>
             <a:r>
-              <a:rPr sz="1500">
+              <a:rPr sz="1700">
                 <a:solidFill>
                   <a:srgbClr val="0F1418"/>
                 </a:solidFill>
                 <a:latin typeface="Arial"/>
               </a:rPr>
-              <a:t>Теперь каждый признак имеет равный голос в расстоянии</a:t>
+              <a:t>У каждого признака вычитаем среднее и делим на разброс</a:t>
+            </a:r>
+          </a:p>
+          <a:p>
+            <a:pPr marL="228600" indent="-228600">
+              <a:lnSpc>
+                <a:spcPct val="135000"/>
+              </a:lnSpc>
+              <a:spcAft>
+                <a:spcPts val="1000"/>
+              </a:spcAft>
+              <a:buClr>
+                <a:srgbClr val="0072CE"/>
+              </a:buClr>
+              <a:buSzPts val="1054"/>
+              <a:buFont typeface="Arial"/>
+              <a:buChar char="▪"/>
+            </a:pPr>
+            <a:r>
+              <a:rPr sz="1700">
+                <a:solidFill>
+                  <a:srgbClr val="0F1418"/>
+                </a:solidFill>
+                <a:latin typeface="Arial"/>
+              </a:rPr>
+              <a:t>После этого у всех признаков среднее ноль и разброс единица</a:t>
+            </a:r>
+          </a:p>
+          <a:p>
+            <a:pPr marL="228600" indent="-228600">
+              <a:lnSpc>
+                <a:spcPct val="135000"/>
+              </a:lnSpc>
+              <a:spcAft>
+                <a:spcPts val="1000"/>
+              </a:spcAft>
+              <a:buClr>
+                <a:srgbClr val="0072CE"/>
+              </a:buClr>
+              <a:buSzPts val="1054"/>
+              <a:buFont typeface="Arial"/>
+              <a:buChar char="▪"/>
+            </a:pPr>
+            <a:r>
+              <a:rPr sz="1700">
+                <a:solidFill>
+                  <a:srgbClr val="0F1418"/>
+                </a:solidFill>
+                <a:latin typeface="Arial"/>
+              </a:rPr>
+              <a:t>Среднее и разброс считаются ТОЛЬКО по обучающей выборке</a:t>
+            </a:r>
+          </a:p>
+          <a:p>
+            <a:pPr marL="228600" indent="-228600">
+              <a:lnSpc>
+                <a:spcPct val="135000"/>
+              </a:lnSpc>
+              <a:spcAft>
+                <a:spcPts val="1000"/>
+              </a:spcAft>
+              <a:buClr>
+                <a:srgbClr val="0072CE"/>
+              </a:buClr>
+              <a:buSzPts val="1054"/>
+              <a:buFont typeface="Arial"/>
+              <a:buChar char="▪"/>
+            </a:pPr>
+            <a:r>
+              <a:rPr sz="1700">
+                <a:solidFill>
+                  <a:srgbClr val="0F1418"/>
+                </a:solidFill>
+                <a:latin typeface="Arial"/>
+              </a:rPr>
+              <a:t>Посчитать их по всем данным сразу — это утечка, занятие четыре</a:t>
             </a:r>
           </a:p>
         </p:txBody>
@@ -20224,7 +20441,7 @@
             <a:avLst/>
           </a:prstGeom>
           <a:solidFill>
-            <a:srgbClr val="0F1418"/>
+            <a:srgbClr val="FFFFFF"/>
           </a:solidFill>
           <a:ln>
             <a:noFill/>
@@ -20261,7 +20478,7 @@
         </p:nvSpPr>
         <p:spPr>
           <a:xfrm>
-            <a:off x="822960" y="1234440"/>
+            <a:off x="822960" y="594360"/>
             <a:ext cx="10545775" cy="274320"/>
           </a:xfrm>
           <a:prstGeom prst="rect">
@@ -20284,11 +20501,11 @@
             <a:r>
               <a:rPr sz="1300" b="1">
                 <a:solidFill>
-                  <a:srgbClr val="4DA3E0"/>
-                </a:solidFill>
-                <a:latin typeface="Arial"/>
-              </a:rPr>
-              <a:t>ШАГ 5</a:t>
+                  <a:srgbClr val="0072CE"/>
+                </a:solidFill>
+                <a:latin typeface="Arial"/>
+              </a:rPr>
+              <a:t>ШАГ 4</a:t>
             </a:r>
           </a:p>
         </p:txBody>
@@ -20301,8 +20518,8 @@
         </p:nvSpPr>
         <p:spPr>
           <a:xfrm>
-            <a:off x="822960" y="1920240"/>
-            <a:ext cx="10545775" cy="1828800"/>
+            <a:off x="822960" y="960120"/>
+            <a:ext cx="10545775" cy="822960"/>
           </a:xfrm>
           <a:prstGeom prst="rect">
             <a:avLst/>
@@ -20322,13 +20539,13 @@
               <a:buNone/>
             </a:pPr>
             <a:r>
-              <a:rPr sz="12000" b="1">
-                <a:solidFill>
-                  <a:srgbClr val="FFFFFF"/>
-                </a:solidFill>
-                <a:latin typeface="Arial"/>
-              </a:rPr>
-              <a:t>0.72 → 0.94</a:t>
+              <a:rPr sz="3200" b="1">
+                <a:solidFill>
+                  <a:srgbClr val="0F1418"/>
+                </a:solidFill>
+                <a:latin typeface="Arial"/>
+              </a:rPr>
+              <a:t>Что изменилось</a:t>
             </a:r>
           </a:p>
         </p:txBody>
@@ -20341,7 +20558,7 @@
         </p:nvSpPr>
         <p:spPr>
           <a:xfrm>
-            <a:off x="822960" y="3931920"/>
+            <a:off x="822960" y="1673352"/>
             <a:ext cx="1463040" cy="50800"/>
           </a:xfrm>
           <a:prstGeom prst="rect">
@@ -20377,49 +20594,81 @@
           </a:p>
         </p:txBody>
       </p:sp>
-      <p:sp>
-        <p:nvSpPr>
-          <p:cNvPr id="6" name="TextBox 5"/>
-          <p:cNvSpPr txBox="1"/>
-          <p:nvPr/>
-        </p:nvSpPr>
-        <p:spPr>
-          <a:xfrm>
-            <a:off x="822960" y="4343400"/>
-            <a:ext cx="10545775" cy="1280160"/>
-          </a:xfrm>
-          <a:prstGeom prst="rect">
-            <a:avLst/>
-          </a:prstGeom>
-          <a:noFill/>
-        </p:spPr>
-        <p:txBody>
-          <a:bodyPr wrap="square" anchor="t" lIns="0" rIns="0" tIns="0" bIns="0">
-            <a:spAutoFit/>
-          </a:bodyPr>
-          <a:lstStyle/>
-          <a:p>
-            <a:pPr algn="l">
-              <a:lnSpc>
-                <a:spcPct val="125000"/>
-              </a:lnSpc>
-              <a:buNone/>
-            </a:pPr>
-            <a:r>
-              <a:rPr sz="2200" b="0">
-                <a:solidFill>
-                  <a:srgbClr val="4DA3E0"/>
-                </a:solidFill>
-                <a:latin typeface="Arial"/>
-              </a:rPr>
-              <a:t>во что превращается качество kNN на настоящих данных после одной строки со стандартизацией</a:t>
-            </a:r>
-          </a:p>
-        </p:txBody>
-      </p:sp>
+      <p:pic>
+        <p:nvPicPr>
+          <p:cNvPr id="6" name="Picture 5" descr="scale_step3.png"/>
+          <p:cNvPicPr>
+            <a:picLocks noChangeAspect="1"/>
+          </p:cNvPicPr>
+          <p:nvPr/>
+        </p:nvPicPr>
+        <p:blipFill>
+          <a:blip r:embed="rId2"/>
+          <a:stretch>
+            <a:fillRect/>
+          </a:stretch>
+        </p:blipFill>
+        <p:spPr>
+          <a:xfrm>
+            <a:off x="857636" y="2103120"/>
+            <a:ext cx="10476423" cy="3730752"/>
+          </a:xfrm>
+          <a:prstGeom prst="rect">
+            <a:avLst/>
+          </a:prstGeom>
+        </p:spPr>
+      </p:pic>
       <p:sp>
         <p:nvSpPr>
           <p:cNvPr id="7" name="TextBox 6"/>
+          <p:cNvSpPr txBox="1"/>
+          <p:nvPr/>
+        </p:nvSpPr>
+        <p:spPr>
+          <a:xfrm>
+            <a:off x="822960" y="6089904"/>
+            <a:ext cx="10545775" cy="658368"/>
+          </a:xfrm>
+          <a:prstGeom prst="rect">
+            <a:avLst/>
+          </a:prstGeom>
+          <a:noFill/>
+        </p:spPr>
+        <p:txBody>
+          <a:bodyPr wrap="square" lIns="0" rIns="0" tIns="0" bIns="0">
+            <a:spAutoFit/>
+          </a:bodyPr>
+          <a:lstStyle/>
+          <a:p>
+            <a:pPr marL="228600" indent="-228600">
+              <a:lnSpc>
+                <a:spcPct val="135000"/>
+              </a:lnSpc>
+              <a:spcAft>
+                <a:spcPts val="1000"/>
+              </a:spcAft>
+              <a:buClr>
+                <a:srgbClr val="0072CE"/>
+              </a:buClr>
+              <a:buSzPts val="930"/>
+              <a:buFont typeface="Arial"/>
+              <a:buChar char="▪"/>
+            </a:pPr>
+            <a:r>
+              <a:rPr sz="1500">
+                <a:solidFill>
+                  <a:srgbClr val="0F1418"/>
+                </a:solidFill>
+                <a:latin typeface="Arial"/>
+              </a:rPr>
+              <a:t>Теперь каждый признак имеет равный голос в расстоянии</a:t>
+            </a:r>
+          </a:p>
+        </p:txBody>
+      </p:sp>
+      <p:sp>
+        <p:nvSpPr>
+          <p:cNvPr id="8" name="TextBox 7"/>
           <p:cNvSpPr txBox="1"/>
           <p:nvPr/>
         </p:nvSpPr>
@@ -20448,7 +20697,7 @@
             <a:r>
               <a:rPr sz="1100" b="0">
                 <a:solidFill>
-                  <a:srgbClr val="4DA3E0"/>
+                  <a:srgbClr val="6B7280"/>
                 </a:solidFill>
                 <a:latin typeface="Arial"/>
               </a:rPr>
@@ -20459,7 +20708,7 @@
       </p:sp>
       <p:sp>
         <p:nvSpPr>
-          <p:cNvPr id="8" name="TextBox 7"/>
+          <p:cNvPr id="9" name="TextBox 8"/>
           <p:cNvSpPr txBox="1"/>
           <p:nvPr/>
         </p:nvSpPr>
@@ -20488,7 +20737,7 @@
             <a:r>
               <a:rPr sz="1100" b="0">
                 <a:solidFill>
-                  <a:srgbClr val="4DA3E0"/>
+                  <a:srgbClr val="6B7280"/>
                 </a:solidFill>
                 <a:latin typeface="Arial"/>
               </a:rPr>
@@ -20530,7 +20779,7 @@
             <a:avLst/>
           </a:prstGeom>
           <a:solidFill>
-            <a:srgbClr val="FFFFFF"/>
+            <a:srgbClr val="0F1418"/>
           </a:solidFill>
           <a:ln>
             <a:noFill/>
@@ -20567,8 +20816,8 @@
         </p:nvSpPr>
         <p:spPr>
           <a:xfrm>
-            <a:off x="822960" y="594360"/>
-            <a:ext cx="10545775" cy="822960"/>
+            <a:off x="822960" y="1234440"/>
+            <a:ext cx="10545775" cy="274320"/>
           </a:xfrm>
           <a:prstGeom prst="rect">
             <a:avLst/>
@@ -20588,26 +20837,66 @@
               <a:buNone/>
             </a:pPr>
             <a:r>
-              <a:rPr sz="3200" b="1">
-                <a:solidFill>
-                  <a:srgbClr val="0F1418"/>
-                </a:solidFill>
-                <a:latin typeface="Arial"/>
-              </a:rPr>
-              <a:t>Слабое место метода</a:t>
-            </a:r>
-          </a:p>
-        </p:txBody>
-      </p:sp>
-      <p:sp>
-        <p:nvSpPr>
-          <p:cNvPr id="4" name="Rectangle 3"/>
+              <a:rPr sz="1300" b="1">
+                <a:solidFill>
+                  <a:srgbClr val="4DA3E0"/>
+                </a:solidFill>
+                <a:latin typeface="Arial"/>
+              </a:rPr>
+              <a:t>ШАГ 5</a:t>
+            </a:r>
+          </a:p>
+        </p:txBody>
+      </p:sp>
+      <p:sp>
+        <p:nvSpPr>
+          <p:cNvPr id="4" name="TextBox 3"/>
+          <p:cNvSpPr txBox="1"/>
+          <p:nvPr/>
+        </p:nvSpPr>
+        <p:spPr>
+          <a:xfrm>
+            <a:off x="822960" y="1920240"/>
+            <a:ext cx="10545775" cy="1828800"/>
+          </a:xfrm>
+          <a:prstGeom prst="rect">
+            <a:avLst/>
+          </a:prstGeom>
+          <a:noFill/>
+        </p:spPr>
+        <p:txBody>
+          <a:bodyPr wrap="square" anchor="t" lIns="0" rIns="0" tIns="0" bIns="0">
+            <a:spAutoFit/>
+          </a:bodyPr>
+          <a:lstStyle/>
+          <a:p>
+            <a:pPr algn="l">
+              <a:lnSpc>
+                <a:spcPct val="100000"/>
+              </a:lnSpc>
+              <a:buNone/>
+            </a:pPr>
+            <a:r>
+              <a:rPr sz="12000" b="1">
+                <a:solidFill>
+                  <a:srgbClr val="FFFFFF"/>
+                </a:solidFill>
+                <a:latin typeface="Arial"/>
+              </a:rPr>
+              <a:t>0.72 → 0.94</a:t>
+            </a:r>
+          </a:p>
+        </p:txBody>
+      </p:sp>
+      <p:sp>
+        <p:nvSpPr>
+          <p:cNvPr id="5" name="Rectangle 4"/>
           <p:cNvSpPr/>
           <p:nvPr/>
         </p:nvSpPr>
         <p:spPr>
           <a:xfrm>
-            <a:off x="822960" y="1307592"/>
+            <a:off x="822960" y="3931920"/>
             <a:ext cx="1463040" cy="50800"/>
           </a:xfrm>
           <a:prstGeom prst="rect">
@@ -20643,30 +20932,6 @@
           </a:p>
         </p:txBody>
       </p:sp>
-      <p:pic>
-        <p:nvPicPr>
-          <p:cNvPr id="5" name="Picture 4" descr="knn_curse.png"/>
-          <p:cNvPicPr>
-            <a:picLocks noChangeAspect="1"/>
-          </p:cNvPicPr>
-          <p:nvPr/>
-        </p:nvPicPr>
-        <p:blipFill>
-          <a:blip r:embed="rId2"/>
-          <a:stretch>
-            <a:fillRect/>
-          </a:stretch>
-        </p:blipFill>
-        <p:spPr>
-          <a:xfrm>
-            <a:off x="2217180" y="1737360"/>
-            <a:ext cx="7757334" cy="3730751"/>
-          </a:xfrm>
-          <a:prstGeom prst="rect">
-            <a:avLst/>
-          </a:prstGeom>
-        </p:spPr>
-      </p:pic>
       <p:sp>
         <p:nvSpPr>
           <p:cNvPr id="6" name="TextBox 5"/>
@@ -20675,42 +20940,34 @@
         </p:nvSpPr>
         <p:spPr>
           <a:xfrm>
-            <a:off x="822960" y="5724143"/>
-            <a:ext cx="10545775" cy="658368"/>
-          </a:xfrm>
-          <a:prstGeom prst="rect">
-            <a:avLst/>
-          </a:prstGeom>
-          <a:noFill/>
-        </p:spPr>
-        <p:txBody>
-          <a:bodyPr wrap="square" lIns="0" rIns="0" tIns="0" bIns="0">
-            <a:spAutoFit/>
-          </a:bodyPr>
-          <a:lstStyle/>
-          <a:p>
-            <a:pPr marL="228600" indent="-228600">
-              <a:lnSpc>
-                <a:spcPct val="135000"/>
-              </a:lnSpc>
-              <a:spcAft>
-                <a:spcPts val="1000"/>
-              </a:spcAft>
-              <a:buClr>
-                <a:srgbClr val="0072CE"/>
-              </a:buClr>
-              <a:buSzPts val="930"/>
-              <a:buFont typeface="Arial"/>
-              <a:buChar char="▪"/>
-            </a:pPr>
-            <a:r>
-              <a:rPr sz="1500">
-                <a:solidFill>
-                  <a:srgbClr val="0F1418"/>
-                </a:solidFill>
-                <a:latin typeface="Arial"/>
-              </a:rPr>
-              <a:t>Восемьсот шумовых признаков роняют kNN почти до уровня угадывания. Наивный Байес держится</a:t>
+            <a:off x="822960" y="4343400"/>
+            <a:ext cx="10545775" cy="1280160"/>
+          </a:xfrm>
+          <a:prstGeom prst="rect">
+            <a:avLst/>
+          </a:prstGeom>
+          <a:noFill/>
+        </p:spPr>
+        <p:txBody>
+          <a:bodyPr wrap="square" anchor="t" lIns="0" rIns="0" tIns="0" bIns="0">
+            <a:spAutoFit/>
+          </a:bodyPr>
+          <a:lstStyle/>
+          <a:p>
+            <a:pPr algn="l">
+              <a:lnSpc>
+                <a:spcPct val="125000"/>
+              </a:lnSpc>
+              <a:buNone/>
+            </a:pPr>
+            <a:r>
+              <a:rPr sz="2200" b="0">
+                <a:solidFill>
+                  <a:srgbClr val="4DA3E0"/>
+                </a:solidFill>
+                <a:latin typeface="Arial"/>
+              </a:rPr>
+              <a:t>во что превращается качество kNN на настоящих данных после одной строки со стандартизацией</a:t>
             </a:r>
           </a:p>
         </p:txBody>
@@ -20746,7 +21003,7 @@
             <a:r>
               <a:rPr sz="1100" b="0">
                 <a:solidFill>
-                  <a:srgbClr val="6B7280"/>
+                  <a:srgbClr val="4DA3E0"/>
                 </a:solidFill>
                 <a:latin typeface="Arial"/>
               </a:rPr>
@@ -20786,7 +21043,7 @@
             <a:r>
               <a:rPr sz="1100" b="0">
                 <a:solidFill>
-                  <a:srgbClr val="6B7280"/>
+                  <a:srgbClr val="4DA3E0"/>
                 </a:solidFill>
                 <a:latin typeface="Arial"/>
               </a:rPr>
@@ -21151,6 +21408,90 @@
             <a:avLst/>
           </a:prstGeom>
           <a:solidFill>
+            <a:srgbClr val="FFFFFF"/>
+          </a:solidFill>
+          <a:ln>
+            <a:noFill/>
+          </a:ln>
+          <a:effectLst/>
+        </p:spPr>
+        <p:style>
+          <a:lnRef idx="1">
+            <a:schemeClr val="accent1"/>
+          </a:lnRef>
+          <a:fillRef idx="3">
+            <a:schemeClr val="accent1"/>
+          </a:fillRef>
+          <a:effectRef idx="2">
+            <a:schemeClr val="accent1"/>
+          </a:effectRef>
+          <a:fontRef idx="minor">
+            <a:schemeClr val="lt1"/>
+          </a:fontRef>
+        </p:style>
+        <p:txBody>
+          <a:bodyPr rtlCol="0" anchor="ctr"/>
+          <a:lstStyle/>
+          <a:p>
+            <a:pPr algn="ctr"/>
+          </a:p>
+        </p:txBody>
+      </p:sp>
+      <p:sp>
+        <p:nvSpPr>
+          <p:cNvPr id="3" name="TextBox 2"/>
+          <p:cNvSpPr txBox="1"/>
+          <p:nvPr/>
+        </p:nvSpPr>
+        <p:spPr>
+          <a:xfrm>
+            <a:off x="822960" y="594360"/>
+            <a:ext cx="10545775" cy="822960"/>
+          </a:xfrm>
+          <a:prstGeom prst="rect">
+            <a:avLst/>
+          </a:prstGeom>
+          <a:noFill/>
+        </p:spPr>
+        <p:txBody>
+          <a:bodyPr wrap="square" anchor="t" lIns="0" rIns="0" tIns="0" bIns="0">
+            <a:spAutoFit/>
+          </a:bodyPr>
+          <a:lstStyle/>
+          <a:p>
+            <a:pPr algn="l">
+              <a:lnSpc>
+                <a:spcPct val="100000"/>
+              </a:lnSpc>
+              <a:buNone/>
+            </a:pPr>
+            <a:r>
+              <a:rPr sz="3200" b="1">
+                <a:solidFill>
+                  <a:srgbClr val="0F1418"/>
+                </a:solidFill>
+                <a:latin typeface="Arial"/>
+              </a:rPr>
+              <a:t>Слабое место метода</a:t>
+            </a:r>
+          </a:p>
+        </p:txBody>
+      </p:sp>
+      <p:sp>
+        <p:nvSpPr>
+          <p:cNvPr id="4" name="Rectangle 3"/>
+          <p:cNvSpPr/>
+          <p:nvPr/>
+        </p:nvSpPr>
+        <p:spPr>
+          <a:xfrm>
+            <a:off x="822960" y="1307592"/>
+            <a:ext cx="1463040" cy="50800"/>
+          </a:xfrm>
+          <a:prstGeom prst="rect">
+            <a:avLst/>
+          </a:prstGeom>
+          <a:solidFill>
             <a:srgbClr val="0072CE"/>
           </a:solidFill>
           <a:ln>
@@ -21182,7 +21523,7 @@
       </p:sp>
       <p:pic>
         <p:nvPicPr>
-          <p:cNvPr id="3" name="Picture 2" descr="emblem_round.png"/>
+          <p:cNvPr id="5" name="Picture 4" descr="knn_curse.png"/>
           <p:cNvPicPr>
             <a:picLocks noChangeAspect="1"/>
           </p:cNvPicPr>
@@ -21196,8 +21537,8 @@
         </p:blipFill>
         <p:spPr>
           <a:xfrm>
-            <a:off x="9814255" y="4480560"/>
-            <a:ext cx="1371600" cy="1371600"/>
+            <a:off x="2217180" y="1737360"/>
+            <a:ext cx="7757334" cy="3730751"/>
           </a:xfrm>
           <a:prstGeom prst="rect">
             <a:avLst/>
@@ -21206,14 +21547,62 @@
       </p:pic>
       <p:sp>
         <p:nvSpPr>
-          <p:cNvPr id="4" name="TextBox 3"/>
-          <p:cNvSpPr txBox="1"/>
-          <p:nvPr/>
-        </p:nvSpPr>
-        <p:spPr>
-          <a:xfrm>
-            <a:off x="822960" y="1828800"/>
-            <a:ext cx="2743200" cy="1463040"/>
+          <p:cNvPr id="6" name="TextBox 5"/>
+          <p:cNvSpPr txBox="1"/>
+          <p:nvPr/>
+        </p:nvSpPr>
+        <p:spPr>
+          <a:xfrm>
+            <a:off x="822960" y="5724143"/>
+            <a:ext cx="10545775" cy="658368"/>
+          </a:xfrm>
+          <a:prstGeom prst="rect">
+            <a:avLst/>
+          </a:prstGeom>
+          <a:noFill/>
+        </p:spPr>
+        <p:txBody>
+          <a:bodyPr wrap="square" lIns="0" rIns="0" tIns="0" bIns="0">
+            <a:spAutoFit/>
+          </a:bodyPr>
+          <a:lstStyle/>
+          <a:p>
+            <a:pPr marL="228600" indent="-228600">
+              <a:lnSpc>
+                <a:spcPct val="135000"/>
+              </a:lnSpc>
+              <a:spcAft>
+                <a:spcPts val="1000"/>
+              </a:spcAft>
+              <a:buClr>
+                <a:srgbClr val="0072CE"/>
+              </a:buClr>
+              <a:buSzPts val="930"/>
+              <a:buFont typeface="Arial"/>
+              <a:buChar char="▪"/>
+            </a:pPr>
+            <a:r>
+              <a:rPr sz="1500">
+                <a:solidFill>
+                  <a:srgbClr val="0F1418"/>
+                </a:solidFill>
+                <a:latin typeface="Arial"/>
+              </a:rPr>
+              <a:t>Восемьсот шумовых признаков роняют kNN почти до уровня угадывания. Наивный Байес держится</a:t>
+            </a:r>
+          </a:p>
+        </p:txBody>
+      </p:sp>
+      <p:sp>
+        <p:nvSpPr>
+          <p:cNvPr id="7" name="TextBox 6"/>
+          <p:cNvSpPr txBox="1"/>
+          <p:nvPr/>
+        </p:nvSpPr>
+        <p:spPr>
+          <a:xfrm>
+            <a:off x="822960" y="6291072"/>
+            <a:ext cx="8229600" cy="274320"/>
           </a:xfrm>
           <a:prstGeom prst="rect">
             <a:avLst/>
@@ -21233,27 +21622,27 @@
               <a:buNone/>
             </a:pPr>
             <a:r>
-              <a:rPr sz="9000" b="1">
-                <a:solidFill>
-                  <a:srgbClr val="FFFFFF"/>
-                </a:solidFill>
-                <a:latin typeface="Arial"/>
-              </a:rPr>
-              <a:t>05</a:t>
-            </a:r>
-          </a:p>
-        </p:txBody>
-      </p:sp>
-      <p:sp>
-        <p:nvSpPr>
-          <p:cNvPr id="5" name="TextBox 4"/>
-          <p:cNvSpPr txBox="1"/>
-          <p:nvPr/>
-        </p:nvSpPr>
-        <p:spPr>
-          <a:xfrm>
-            <a:off x="822960" y="3383280"/>
-            <a:ext cx="9601200" cy="1097280"/>
+              <a:rPr sz="1100" b="0">
+                <a:solidFill>
+                  <a:srgbClr val="6B7280"/>
+                </a:solidFill>
+                <a:latin typeface="Arial"/>
+              </a:rPr>
+              <a:t>Занятие 1 · Введение</a:t>
+            </a:r>
+          </a:p>
+        </p:txBody>
+      </p:sp>
+      <p:sp>
+        <p:nvSpPr>
+          <p:cNvPr id="8" name="TextBox 7"/>
+          <p:cNvSpPr txBox="1"/>
+          <p:nvPr/>
+        </p:nvSpPr>
+        <p:spPr>
+          <a:xfrm>
+            <a:off x="10454335" y="6291072"/>
+            <a:ext cx="914400" cy="274320"/>
           </a:xfrm>
           <a:prstGeom prst="rect">
             <a:avLst/>
@@ -21266,60 +21655,20 @@
           </a:bodyPr>
           <a:lstStyle/>
           <a:p>
-            <a:pPr algn="l">
-              <a:lnSpc>
-                <a:spcPct val="110000"/>
-              </a:lnSpc>
-              <a:buNone/>
-            </a:pPr>
-            <a:r>
-              <a:rPr sz="4000" b="1">
-                <a:solidFill>
-                  <a:srgbClr val="FFFFFF"/>
-                </a:solidFill>
-                <a:latin typeface="Arial"/>
-              </a:rPr>
-              <a:t>Наивный Байес</a:t>
-            </a:r>
-          </a:p>
-        </p:txBody>
-      </p:sp>
-      <p:sp>
-        <p:nvSpPr>
-          <p:cNvPr id="6" name="TextBox 5"/>
-          <p:cNvSpPr txBox="1"/>
-          <p:nvPr/>
-        </p:nvSpPr>
-        <p:spPr>
-          <a:xfrm>
-            <a:off x="822960" y="4572000"/>
-            <a:ext cx="9601200" cy="548640"/>
-          </a:xfrm>
-          <a:prstGeom prst="rect">
-            <a:avLst/>
-          </a:prstGeom>
-          <a:noFill/>
-        </p:spPr>
-        <p:txBody>
-          <a:bodyPr wrap="square" anchor="t" lIns="0" rIns="0" tIns="0" bIns="0">
-            <a:spAutoFit/>
-          </a:bodyPr>
-          <a:lstStyle/>
-          <a:p>
-            <a:pPr algn="l">
-              <a:lnSpc>
-                <a:spcPct val="120000"/>
-              </a:lnSpc>
-              <a:buNone/>
-            </a:pPr>
-            <a:r>
-              <a:rPr sz="1800" b="0">
-                <a:solidFill>
-                  <a:srgbClr val="FFFFFF"/>
-                </a:solidFill>
-                <a:latin typeface="Arial"/>
-              </a:rPr>
-              <a:t>метод, устроенный ровно наоборот</a:t>
+            <a:pPr algn="r">
+              <a:lnSpc>
+                <a:spcPct val="100000"/>
+              </a:lnSpc>
+              <a:buNone/>
+            </a:pPr>
+            <a:r>
+              <a:rPr sz="1100" b="0">
+                <a:solidFill>
+                  <a:srgbClr val="6B7280"/>
+                </a:solidFill>
+                <a:latin typeface="Arial"/>
+              </a:rPr>
+              <a:t>36</a:t>
             </a:r>
           </a:p>
         </p:txBody>
@@ -21357,90 +21706,6 @@
             <a:avLst/>
           </a:prstGeom>
           <a:solidFill>
-            <a:srgbClr val="FFFFFF"/>
-          </a:solidFill>
-          <a:ln>
-            <a:noFill/>
-          </a:ln>
-          <a:effectLst/>
-        </p:spPr>
-        <p:style>
-          <a:lnRef idx="1">
-            <a:schemeClr val="accent1"/>
-          </a:lnRef>
-          <a:fillRef idx="3">
-            <a:schemeClr val="accent1"/>
-          </a:fillRef>
-          <a:effectRef idx="2">
-            <a:schemeClr val="accent1"/>
-          </a:effectRef>
-          <a:fontRef idx="minor">
-            <a:schemeClr val="lt1"/>
-          </a:fontRef>
-        </p:style>
-        <p:txBody>
-          <a:bodyPr rtlCol="0" anchor="ctr"/>
-          <a:lstStyle/>
-          <a:p>
-            <a:pPr algn="ctr"/>
-          </a:p>
-        </p:txBody>
-      </p:sp>
-      <p:sp>
-        <p:nvSpPr>
-          <p:cNvPr id="3" name="TextBox 2"/>
-          <p:cNvSpPr txBox="1"/>
-          <p:nvPr/>
-        </p:nvSpPr>
-        <p:spPr>
-          <a:xfrm>
-            <a:off x="822960" y="594360"/>
-            <a:ext cx="10545775" cy="822960"/>
-          </a:xfrm>
-          <a:prstGeom prst="rect">
-            <a:avLst/>
-          </a:prstGeom>
-          <a:noFill/>
-        </p:spPr>
-        <p:txBody>
-          <a:bodyPr wrap="square" anchor="t" lIns="0" rIns="0" tIns="0" bIns="0">
-            <a:spAutoFit/>
-          </a:bodyPr>
-          <a:lstStyle/>
-          <a:p>
-            <a:pPr algn="l">
-              <a:lnSpc>
-                <a:spcPct val="100000"/>
-              </a:lnSpc>
-              <a:buNone/>
-            </a:pPr>
-            <a:r>
-              <a:rPr sz="3200" b="1">
-                <a:solidFill>
-                  <a:srgbClr val="0F1418"/>
-                </a:solidFill>
-                <a:latin typeface="Arial"/>
-              </a:rPr>
-              <a:t>Напоминание из теории вероятностей</a:t>
-            </a:r>
-          </a:p>
-        </p:txBody>
-      </p:sp>
-      <p:sp>
-        <p:nvSpPr>
-          <p:cNvPr id="4" name="Rectangle 3"/>
-          <p:cNvSpPr/>
-          <p:nvPr/>
-        </p:nvSpPr>
-        <p:spPr>
-          <a:xfrm>
-            <a:off x="822960" y="1307592"/>
-            <a:ext cx="1463040" cy="50800"/>
-          </a:xfrm>
-          <a:prstGeom prst="rect">
-            <a:avLst/>
-          </a:prstGeom>
-          <a:solidFill>
             <a:srgbClr val="0072CE"/>
           </a:solidFill>
           <a:ln>
@@ -21472,7 +21737,7 @@
       </p:sp>
       <p:pic>
         <p:nvPicPr>
-          <p:cNvPr id="5" name="Picture 4" descr="probability_recap.png"/>
+          <p:cNvPr id="3" name="Picture 2" descr="emblem_round.png"/>
           <p:cNvPicPr>
             <a:picLocks noChangeAspect="1"/>
           </p:cNvPicPr>
@@ -21486,8 +21751,8 @@
         </p:blipFill>
         <p:spPr>
           <a:xfrm>
-            <a:off x="2547640" y="1737360"/>
-            <a:ext cx="7096415" cy="3730752"/>
+            <a:off x="9814255" y="4480560"/>
+            <a:ext cx="1371600" cy="1371600"/>
           </a:xfrm>
           <a:prstGeom prst="rect">
             <a:avLst/>
@@ -21496,62 +21761,94 @@
       </p:pic>
       <p:sp>
         <p:nvSpPr>
+          <p:cNvPr id="4" name="TextBox 3"/>
+          <p:cNvSpPr txBox="1"/>
+          <p:nvPr/>
+        </p:nvSpPr>
+        <p:spPr>
+          <a:xfrm>
+            <a:off x="822960" y="1828800"/>
+            <a:ext cx="2743200" cy="1463040"/>
+          </a:xfrm>
+          <a:prstGeom prst="rect">
+            <a:avLst/>
+          </a:prstGeom>
+          <a:noFill/>
+        </p:spPr>
+        <p:txBody>
+          <a:bodyPr wrap="square" anchor="t" lIns="0" rIns="0" tIns="0" bIns="0">
+            <a:spAutoFit/>
+          </a:bodyPr>
+          <a:lstStyle/>
+          <a:p>
+            <a:pPr algn="l">
+              <a:lnSpc>
+                <a:spcPct val="100000"/>
+              </a:lnSpc>
+              <a:buNone/>
+            </a:pPr>
+            <a:r>
+              <a:rPr sz="9000" b="1">
+                <a:solidFill>
+                  <a:srgbClr val="FFFFFF"/>
+                </a:solidFill>
+                <a:latin typeface="Arial"/>
+              </a:rPr>
+              <a:t>05</a:t>
+            </a:r>
+          </a:p>
+        </p:txBody>
+      </p:sp>
+      <p:sp>
+        <p:nvSpPr>
+          <p:cNvPr id="5" name="TextBox 4"/>
+          <p:cNvSpPr txBox="1"/>
+          <p:nvPr/>
+        </p:nvSpPr>
+        <p:spPr>
+          <a:xfrm>
+            <a:off x="822960" y="3383280"/>
+            <a:ext cx="9601200" cy="1097280"/>
+          </a:xfrm>
+          <a:prstGeom prst="rect">
+            <a:avLst/>
+          </a:prstGeom>
+          <a:noFill/>
+        </p:spPr>
+        <p:txBody>
+          <a:bodyPr wrap="square" anchor="t" lIns="0" rIns="0" tIns="0" bIns="0">
+            <a:spAutoFit/>
+          </a:bodyPr>
+          <a:lstStyle/>
+          <a:p>
+            <a:pPr algn="l">
+              <a:lnSpc>
+                <a:spcPct val="110000"/>
+              </a:lnSpc>
+              <a:buNone/>
+            </a:pPr>
+            <a:r>
+              <a:rPr sz="4000" b="1">
+                <a:solidFill>
+                  <a:srgbClr val="FFFFFF"/>
+                </a:solidFill>
+                <a:latin typeface="Arial"/>
+              </a:rPr>
+              <a:t>Наивный Байес</a:t>
+            </a:r>
+          </a:p>
+        </p:txBody>
+      </p:sp>
+      <p:sp>
+        <p:nvSpPr>
           <p:cNvPr id="6" name="TextBox 5"/>
           <p:cNvSpPr txBox="1"/>
           <p:nvPr/>
         </p:nvSpPr>
         <p:spPr>
           <a:xfrm>
-            <a:off x="822960" y="5724144"/>
-            <a:ext cx="10545775" cy="658368"/>
-          </a:xfrm>
-          <a:prstGeom prst="rect">
-            <a:avLst/>
-          </a:prstGeom>
-          <a:noFill/>
-        </p:spPr>
-        <p:txBody>
-          <a:bodyPr wrap="square" lIns="0" rIns="0" tIns="0" bIns="0">
-            <a:spAutoFit/>
-          </a:bodyPr>
-          <a:lstStyle/>
-          <a:p>
-            <a:pPr marL="228600" indent="-228600">
-              <a:lnSpc>
-                <a:spcPct val="135000"/>
-              </a:lnSpc>
-              <a:spcAft>
-                <a:spcPts val="1000"/>
-              </a:spcAft>
-              <a:buClr>
-                <a:srgbClr val="0072CE"/>
-              </a:buClr>
-              <a:buSzPts val="930"/>
-              <a:buFont typeface="Arial"/>
-              <a:buChar char="▪"/>
-            </a:pPr>
-            <a:r>
-              <a:rPr sz="1500">
-                <a:solidFill>
-                  <a:srgbClr val="0F1418"/>
-                </a:solidFill>
-                <a:latin typeface="Arial"/>
-              </a:rPr>
-              <a:t>Четыре факта, без которых дальше не разобраться</a:t>
-            </a:r>
-          </a:p>
-        </p:txBody>
-      </p:sp>
-      <p:sp>
-        <p:nvSpPr>
-          <p:cNvPr id="7" name="TextBox 6"/>
-          <p:cNvSpPr txBox="1"/>
-          <p:nvPr/>
-        </p:nvSpPr>
-        <p:spPr>
-          <a:xfrm>
-            <a:off x="822960" y="6291072"/>
-            <a:ext cx="8229600" cy="274320"/>
+            <a:off x="822960" y="4572000"/>
+            <a:ext cx="9601200" cy="548640"/>
           </a:xfrm>
           <a:prstGeom prst="rect">
             <a:avLst/>
@@ -21566,58 +21863,18 @@
           <a:p>
             <a:pPr algn="l">
               <a:lnSpc>
-                <a:spcPct val="100000"/>
-              </a:lnSpc>
-              <a:buNone/>
-            </a:pPr>
-            <a:r>
-              <a:rPr sz="1100" b="0">
-                <a:solidFill>
-                  <a:srgbClr val="6B7280"/>
-                </a:solidFill>
-                <a:latin typeface="Arial"/>
-              </a:rPr>
-              <a:t>Занятие 1 · Введение</a:t>
-            </a:r>
-          </a:p>
-        </p:txBody>
-      </p:sp>
-      <p:sp>
-        <p:nvSpPr>
-          <p:cNvPr id="8" name="TextBox 7"/>
-          <p:cNvSpPr txBox="1"/>
-          <p:nvPr/>
-        </p:nvSpPr>
-        <p:spPr>
-          <a:xfrm>
-            <a:off x="10454335" y="6291072"/>
-            <a:ext cx="914400" cy="274320"/>
-          </a:xfrm>
-          <a:prstGeom prst="rect">
-            <a:avLst/>
-          </a:prstGeom>
-          <a:noFill/>
-        </p:spPr>
-        <p:txBody>
-          <a:bodyPr wrap="square" anchor="t" lIns="0" rIns="0" tIns="0" bIns="0">
-            <a:spAutoFit/>
-          </a:bodyPr>
-          <a:lstStyle/>
-          <a:p>
-            <a:pPr algn="r">
-              <a:lnSpc>
-                <a:spcPct val="100000"/>
-              </a:lnSpc>
-              <a:buNone/>
-            </a:pPr>
-            <a:r>
-              <a:rPr sz="1100" b="0">
-                <a:solidFill>
-                  <a:srgbClr val="6B7280"/>
-                </a:solidFill>
-                <a:latin typeface="Arial"/>
-              </a:rPr>
-              <a:t>36</a:t>
+                <a:spcPct val="120000"/>
+              </a:lnSpc>
+              <a:buNone/>
+            </a:pPr>
+            <a:r>
+              <a:rPr sz="1800" b="0">
+                <a:solidFill>
+                  <a:srgbClr val="FFFFFF"/>
+                </a:solidFill>
+                <a:latin typeface="Arial"/>
+              </a:rPr>
+              <a:t>метод, устроенный ровно наоборот</a:t>
             </a:r>
           </a:p>
         </p:txBody>
@@ -21719,7 +21976,7 @@
                 </a:solidFill>
                 <a:latin typeface="Arial"/>
               </a:rPr>
-              <a:t>Теорема Байеса</a:t>
+              <a:t>Напоминание из теории вероятностей</a:t>
             </a:r>
           </a:p>
         </p:txBody>
@@ -21770,7 +22027,7 @@
       </p:sp>
       <p:pic>
         <p:nvPicPr>
-          <p:cNvPr id="5" name="Picture 4" descr="f_bayes.png"/>
+          <p:cNvPr id="5" name="Picture 4" descr="probability_recap.png"/>
           <p:cNvPicPr>
             <a:picLocks noChangeAspect="1"/>
           </p:cNvPicPr>
@@ -21784,8 +22041,8 @@
         </p:blipFill>
         <p:spPr>
           <a:xfrm>
-            <a:off x="2457778" y="1737360"/>
-            <a:ext cx="7276138" cy="1828800"/>
+            <a:off x="2547640" y="1737360"/>
+            <a:ext cx="7096415" cy="3730752"/>
           </a:xfrm>
           <a:prstGeom prst="rect">
             <a:avLst/>
@@ -21800,8 +22057,8 @@
         </p:nvSpPr>
         <p:spPr>
           <a:xfrm>
-            <a:off x="822960" y="3886200"/>
-            <a:ext cx="10545775" cy="2011680"/>
+            <a:off x="822960" y="5724144"/>
+            <a:ext cx="10545775" cy="658368"/>
           </a:xfrm>
           <a:prstGeom prst="rect">
             <a:avLst/>
@@ -21824,68 +22081,18 @@
               <a:buClr>
                 <a:srgbClr val="0072CE"/>
               </a:buClr>
-              <a:buSzPts val="1054"/>
+              <a:buSzPts val="930"/>
               <a:buFont typeface="Arial"/>
               <a:buChar char="▪"/>
             </a:pPr>
             <a:r>
-              <a:rPr sz="1700">
+              <a:rPr sz="1500">
                 <a:solidFill>
                   <a:srgbClr val="0F1418"/>
                 </a:solidFill>
                 <a:latin typeface="Arial"/>
               </a:rPr>
-              <a:t>Слева апостериорная вероятность: насколько вероятен класс, если объект уже наблюдался</a:t>
-            </a:r>
-          </a:p>
-          <a:p>
-            <a:pPr marL="228600" indent="-228600">
-              <a:lnSpc>
-                <a:spcPct val="135000"/>
-              </a:lnSpc>
-              <a:spcAft>
-                <a:spcPts val="1000"/>
-              </a:spcAft>
-              <a:buClr>
-                <a:srgbClr val="0072CE"/>
-              </a:buClr>
-              <a:buSzPts val="1054"/>
-              <a:buFont typeface="Arial"/>
-              <a:buChar char="▪"/>
-            </a:pPr>
-            <a:r>
-              <a:rPr sz="1700">
-                <a:solidFill>
-                  <a:srgbClr val="0F1418"/>
-                </a:solidFill>
-                <a:latin typeface="Arial"/>
-              </a:rPr>
-              <a:t>P(y) — априорная вероятность класса, оценивается его долей в выборке</a:t>
-            </a:r>
-          </a:p>
-          <a:p>
-            <a:pPr marL="228600" indent="-228600">
-              <a:lnSpc>
-                <a:spcPct val="135000"/>
-              </a:lnSpc>
-              <a:spcAft>
-                <a:spcPts val="1000"/>
-              </a:spcAft>
-              <a:buClr>
-                <a:srgbClr val="0072CE"/>
-              </a:buClr>
-              <a:buSzPts val="1054"/>
-              <a:buFont typeface="Arial"/>
-              <a:buChar char="▪"/>
-            </a:pPr>
-            <a:r>
-              <a:rPr sz="1700">
-                <a:solidFill>
-                  <a:srgbClr val="0F1418"/>
-                </a:solidFill>
-                <a:latin typeface="Arial"/>
-              </a:rPr>
-              <a:t>P(x | y) — правдоподобие: насколько типичен такой объект для класса</a:t>
+              <a:t>Четыре факта, без которых дальше не разобраться</a:t>
             </a:r>
           </a:p>
         </p:txBody>
@@ -22067,7 +22274,7 @@
                 </a:solidFill>
                 <a:latin typeface="Arial"/>
               </a:rPr>
-              <a:t>В чем наивность</a:t>
+              <a:t>Теорема Байеса</a:t>
             </a:r>
           </a:p>
         </p:txBody>
@@ -22118,7 +22325,7 @@
       </p:sp>
       <p:pic>
         <p:nvPicPr>
-          <p:cNvPr id="5" name="Picture 4" descr="f_nb_rule.png"/>
+          <p:cNvPr id="5" name="Picture 4" descr="f_bayes.png"/>
           <p:cNvPicPr>
             <a:picLocks noChangeAspect="1"/>
           </p:cNvPicPr>
@@ -22132,8 +22339,8 @@
         </p:blipFill>
         <p:spPr>
           <a:xfrm>
-            <a:off x="2075906" y="1737360"/>
-            <a:ext cx="8039883" cy="1828800"/>
+            <a:off x="2457778" y="1737360"/>
+            <a:ext cx="7276138" cy="1828800"/>
           </a:xfrm>
           <a:prstGeom prst="rect">
             <a:avLst/>
@@ -22183,7 +22390,7 @@
                 </a:solidFill>
                 <a:latin typeface="Arial"/>
               </a:rPr>
-              <a:t>Правдоподобие это совместное распределение всех признаков сразу</a:t>
+              <a:t>Слева апостериорная вероятность: насколько вероятен класс, если объект уже наблюдался</a:t>
             </a:r>
           </a:p>
           <a:p>
@@ -22208,7 +22415,7 @@
                 </a:solidFill>
                 <a:latin typeface="Arial"/>
               </a:rPr>
-              <a:t>Оценить его по выборке нельзя: комбинаций больше, чем объектов</a:t>
+              <a:t>P(y) — априорная вероятность класса, оценивается его долей в выборке</a:t>
             </a:r>
           </a:p>
           <a:p>
@@ -22233,32 +22440,7 @@
                 </a:solidFill>
                 <a:latin typeface="Arial"/>
               </a:rPr>
-              <a:t>Метод предполагает независимость признаков внутри класса</a:t>
-            </a:r>
-          </a:p>
-          <a:p>
-            <a:pPr marL="228600" indent="-228600">
-              <a:lnSpc>
-                <a:spcPct val="135000"/>
-              </a:lnSpc>
-              <a:spcAft>
-                <a:spcPts val="1000"/>
-              </a:spcAft>
-              <a:buClr>
-                <a:srgbClr val="0072CE"/>
-              </a:buClr>
-              <a:buSzPts val="1054"/>
-              <a:buFont typeface="Arial"/>
-              <a:buChar char="▪"/>
-            </a:pPr>
-            <a:r>
-              <a:rPr sz="1700">
-                <a:solidFill>
-                  <a:srgbClr val="0F1418"/>
-                </a:solidFill>
-                <a:latin typeface="Arial"/>
-              </a:rPr>
-              <a:t>Тогда совместная вероятность распадается в произведение</a:t>
+              <a:t>P(x | y) — правдоподобие: насколько типичен такой объект для класса</a:t>
             </a:r>
           </a:p>
         </p:txBody>
@@ -22414,6 +22596,46 @@
         <p:spPr>
           <a:xfrm>
             <a:off x="822960" y="594360"/>
+            <a:ext cx="10545775" cy="274320"/>
+          </a:xfrm>
+          <a:prstGeom prst="rect">
+            <a:avLst/>
+          </a:prstGeom>
+          <a:noFill/>
+        </p:spPr>
+        <p:txBody>
+          <a:bodyPr wrap="square" anchor="t" lIns="0" rIns="0" tIns="0" bIns="0">
+            <a:spAutoFit/>
+          </a:bodyPr>
+          <a:lstStyle/>
+          <a:p>
+            <a:pPr algn="l">
+              <a:lnSpc>
+                <a:spcPct val="100000"/>
+              </a:lnSpc>
+              <a:buNone/>
+            </a:pPr>
+            <a:r>
+              <a:rPr sz="1300" b="1">
+                <a:solidFill>
+                  <a:srgbClr val="0072CE"/>
+                </a:solidFill>
+                <a:latin typeface="Arial"/>
+              </a:rPr>
+              <a:t>ТОТ САМЫЙ ПЕРЕХОД</a:t>
+            </a:r>
+          </a:p>
+        </p:txBody>
+      </p:sp>
+      <p:sp>
+        <p:nvSpPr>
+          <p:cNvPr id="4" name="TextBox 3"/>
+          <p:cNvSpPr txBox="1"/>
+          <p:nvPr/>
+        </p:nvSpPr>
+        <p:spPr>
+          <a:xfrm>
+            <a:off x="822960" y="960120"/>
             <a:ext cx="10545775" cy="822960"/>
           </a:xfrm>
           <a:prstGeom prst="rect">
@@ -22440,20 +22662,20 @@
                 </a:solidFill>
                 <a:latin typeface="Arial"/>
               </a:rPr>
-              <a:t>Гауссовский вариант</a:t>
-            </a:r>
-          </a:p>
-        </p:txBody>
-      </p:sp>
-      <p:sp>
-        <p:nvSpPr>
-          <p:cNvPr id="4" name="Rectangle 3"/>
+              <a:t>От вероятностей к ответу</a:t>
+            </a:r>
+          </a:p>
+        </p:txBody>
+      </p:sp>
+      <p:sp>
+        <p:nvSpPr>
+          <p:cNvPr id="5" name="Rectangle 4"/>
           <p:cNvSpPr/>
           <p:nvPr/>
         </p:nvSpPr>
         <p:spPr>
           <a:xfrm>
-            <a:off x="822960" y="1307592"/>
+            <a:off x="822960" y="1673352"/>
             <a:ext cx="1463040" cy="50800"/>
           </a:xfrm>
           <a:prstGeom prst="rect">
@@ -22491,7 +22713,7 @@
       </p:sp>
       <p:pic>
         <p:nvPicPr>
-          <p:cNvPr id="5" name="Picture 4" descr="f_gauss.png"/>
+          <p:cNvPr id="6" name="Picture 5" descr="f_decision_rule.png"/>
           <p:cNvPicPr>
             <a:picLocks noChangeAspect="1"/>
           </p:cNvPicPr>
@@ -22505,8 +22727,8 @@
         </p:blipFill>
         <p:spPr>
           <a:xfrm>
-            <a:off x="2604919" y="1737360"/>
-            <a:ext cx="6981856" cy="1828800"/>
+            <a:off x="4162326" y="2103120"/>
+            <a:ext cx="3867043" cy="1828800"/>
           </a:xfrm>
           <a:prstGeom prst="rect">
             <a:avLst/>
@@ -22515,13 +22737,13 @@
       </p:pic>
       <p:sp>
         <p:nvSpPr>
-          <p:cNvPr id="6" name="TextBox 5"/>
-          <p:cNvSpPr txBox="1"/>
-          <p:nvPr/>
-        </p:nvSpPr>
-        <p:spPr>
-          <a:xfrm>
-            <a:off x="822960" y="3886200"/>
+          <p:cNvPr id="7" name="TextBox 6"/>
+          <p:cNvSpPr txBox="1"/>
+          <p:nvPr/>
+        </p:nvSpPr>
+        <p:spPr>
+          <a:xfrm>
+            <a:off x="822960" y="4251960"/>
             <a:ext cx="10545775" cy="2011680"/>
           </a:xfrm>
           <a:prstGeom prst="rect">
@@ -22556,7 +22778,7 @@
                 </a:solidFill>
                 <a:latin typeface="Arial"/>
               </a:rPr>
-              <a:t>Для числовых признаков берем нормальное распределение внутри класса</a:t>
+              <a:t>Теорема дает вероятность каждого класса, а нужен один ответ</a:t>
             </a:r>
           </a:p>
           <a:p>
@@ -22581,14 +22803,64 @@
                 </a:solidFill>
                 <a:latin typeface="Arial"/>
               </a:rPr>
-              <a:t>Тогда обучение сводится к подсчету средних и дисперсий</a:t>
-            </a:r>
-          </a:p>
-        </p:txBody>
-      </p:sp>
-      <p:sp>
-        <p:nvSpPr>
-          <p:cNvPr id="7" name="TextBox 6"/>
+              <a:t>Берем класс с наибольшей вероятностью, это и есть наша a(x)</a:t>
+            </a:r>
+          </a:p>
+          <a:p>
+            <a:pPr marL="228600" indent="-228600">
+              <a:lnSpc>
+                <a:spcPct val="135000"/>
+              </a:lnSpc>
+              <a:spcAft>
+                <a:spcPts val="1000"/>
+              </a:spcAft>
+              <a:buClr>
+                <a:srgbClr val="0072CE"/>
+              </a:buClr>
+              <a:buSzPts val="1054"/>
+              <a:buFont typeface="Arial"/>
+              <a:buChar char="▪"/>
+            </a:pPr>
+            <a:r>
+              <a:rPr sz="1700">
+                <a:solidFill>
+                  <a:srgbClr val="0F1418"/>
+                </a:solidFill>
+                <a:latin typeface="Arial"/>
+              </a:rPr>
+              <a:t>Знаменатель P(x) одинаков для всех классов и на выбор не влияет</a:t>
+            </a:r>
+          </a:p>
+          <a:p>
+            <a:pPr marL="228600" indent="-228600">
+              <a:lnSpc>
+                <a:spcPct val="135000"/>
+              </a:lnSpc>
+              <a:spcAft>
+                <a:spcPts val="1000"/>
+              </a:spcAft>
+              <a:buClr>
+                <a:srgbClr val="0072CE"/>
+              </a:buClr>
+              <a:buSzPts val="1054"/>
+              <a:buFont typeface="Arial"/>
+              <a:buChar char="▪"/>
+            </a:pPr>
+            <a:r>
+              <a:rPr sz="1700">
+                <a:solidFill>
+                  <a:srgbClr val="0F1418"/>
+                </a:solidFill>
+                <a:latin typeface="Arial"/>
+              </a:rPr>
+              <a:t>Значит его можно не считать вовсе: сравниваем только числители</a:t>
+            </a:r>
+          </a:p>
+        </p:txBody>
+      </p:sp>
+      <p:sp>
+        <p:nvSpPr>
+          <p:cNvPr id="8" name="TextBox 7"/>
           <p:cNvSpPr txBox="1"/>
           <p:nvPr/>
         </p:nvSpPr>
@@ -22628,7 +22900,7 @@
       </p:sp>
       <p:sp>
         <p:nvSpPr>
-          <p:cNvPr id="8" name="TextBox 7"/>
+          <p:cNvPr id="9" name="TextBox 8"/>
           <p:cNvSpPr txBox="1"/>
           <p:nvPr/>
         </p:nvSpPr>
@@ -22763,7 +23035,7 @@
                 </a:solidFill>
                 <a:latin typeface="Arial"/>
               </a:rPr>
-              <a:t>Вся модель: три набора чисел</a:t>
+              <a:t>В чем наивность</a:t>
             </a:r>
           </a:p>
         </p:txBody>
@@ -22814,7 +23086,7 @@
       </p:sp>
       <p:pic>
         <p:nvPicPr>
-          <p:cNvPr id="5" name="Picture 4" descr="f_nb_params.png"/>
+          <p:cNvPr id="5" name="Picture 4" descr="f_nb_rule.png"/>
           <p:cNvPicPr>
             <a:picLocks noChangeAspect="1"/>
           </p:cNvPicPr>
@@ -22828,8 +23100,8 @@
         </p:blipFill>
         <p:spPr>
           <a:xfrm>
-            <a:off x="5169481" y="1737360"/>
-            <a:ext cx="1852733" cy="1828799"/>
+            <a:off x="2075906" y="1737360"/>
+            <a:ext cx="8039883" cy="1828800"/>
           </a:xfrm>
           <a:prstGeom prst="rect">
             <a:avLst/>
@@ -22844,7 +23116,7 @@
         </p:nvSpPr>
         <p:spPr>
           <a:xfrm>
-            <a:off x="822960" y="3886199"/>
+            <a:off x="822960" y="3886200"/>
             <a:ext cx="10545775" cy="2011680"/>
           </a:xfrm>
           <a:prstGeom prst="rect">
@@ -22879,7 +23151,7 @@
                 </a:solidFill>
                 <a:latin typeface="Arial"/>
               </a:rPr>
-              <a:t>Доля класса, среднее и дисперсия каждого признака внутри класса</a:t>
+              <a:t>Правдоподобие это совместное распределение всех признаков сразу</a:t>
             </a:r>
           </a:p>
           <a:p>
@@ -22904,7 +23176,7 @@
                 </a:solidFill>
                 <a:latin typeface="Arial"/>
               </a:rPr>
-              <a:t>Для трех классов и тринадцати признаков это 78 чисел плюс 3 доли</a:t>
+              <a:t>Оценить его по выборке нельзя: комбинаций больше, чем объектов</a:t>
             </a:r>
           </a:p>
           <a:p>
@@ -22929,7 +23201,32 @@
                 </a:solidFill>
                 <a:latin typeface="Arial"/>
               </a:rPr>
-              <a:t>Обучающая выборка после этого не нужна и выбрасывается</a:t>
+              <a:t>Метод предполагает независимость признаков внутри класса</a:t>
+            </a:r>
+          </a:p>
+          <a:p>
+            <a:pPr marL="228600" indent="-228600">
+              <a:lnSpc>
+                <a:spcPct val="135000"/>
+              </a:lnSpc>
+              <a:spcAft>
+                <a:spcPts val="1000"/>
+              </a:spcAft>
+              <a:buClr>
+                <a:srgbClr val="0072CE"/>
+              </a:buClr>
+              <a:buSzPts val="1054"/>
+              <a:buFont typeface="Arial"/>
+              <a:buChar char="▪"/>
+            </a:pPr>
+            <a:r>
+              <a:rPr sz="1700">
+                <a:solidFill>
+                  <a:srgbClr val="0F1418"/>
+                </a:solidFill>
+                <a:latin typeface="Arial"/>
+              </a:rPr>
+              <a:t>Тогда совместная вероятность распадается в произведение</a:t>
             </a:r>
           </a:p>
         </p:txBody>
@@ -23111,7 +23408,7 @@
                 </a:solidFill>
                 <a:latin typeface="Arial"/>
               </a:rPr>
-              <a:t>Что метод выучил на наших винах</a:t>
+              <a:t>Гауссовский вариант</a:t>
             </a:r>
           </a:p>
         </p:txBody>
@@ -23162,7 +23459,7 @@
       </p:sp>
       <p:pic>
         <p:nvPicPr>
-          <p:cNvPr id="5" name="Picture 4" descr="nb_densities.png"/>
+          <p:cNvPr id="5" name="Picture 4" descr="f_gauss.png"/>
           <p:cNvPicPr>
             <a:picLocks noChangeAspect="1"/>
           </p:cNvPicPr>
@@ -23176,8 +23473,8 @@
         </p:blipFill>
         <p:spPr>
           <a:xfrm>
-            <a:off x="822960" y="1737360"/>
-            <a:ext cx="10545775" cy="3203827"/>
+            <a:off x="2604919" y="1737360"/>
+            <a:ext cx="6981856" cy="1828800"/>
           </a:xfrm>
           <a:prstGeom prst="rect">
             <a:avLst/>
@@ -23192,8 +23489,8 @@
         </p:nvSpPr>
         <p:spPr>
           <a:xfrm>
-            <a:off x="822960" y="5197219"/>
-            <a:ext cx="10545775" cy="658368"/>
+            <a:off x="822960" y="3886200"/>
+            <a:ext cx="10545775" cy="2011680"/>
           </a:xfrm>
           <a:prstGeom prst="rect">
             <a:avLst/>
@@ -23216,18 +23513,43 @@
               <a:buClr>
                 <a:srgbClr val="0072CE"/>
               </a:buClr>
-              <a:buSzPts val="930"/>
+              <a:buSzPts val="1054"/>
               <a:buFont typeface="Arial"/>
               <a:buChar char="▪"/>
             </a:pPr>
             <a:r>
-              <a:rPr sz="1500">
+              <a:rPr sz="1700">
                 <a:solidFill>
                   <a:srgbClr val="0F1418"/>
                 </a:solidFill>
                 <a:latin typeface="Arial"/>
               </a:rPr>
-              <a:t>Три признака из тринадцати. По горизонтали значение признака, по вертикали плотность. Столбики это 124 обучающих вина, кривые это то, чем метод их заменил</a:t>
+              <a:t>Для числовых признаков берем нормальное распределение внутри класса</a:t>
+            </a:r>
+          </a:p>
+          <a:p>
+            <a:pPr marL="228600" indent="-228600">
+              <a:lnSpc>
+                <a:spcPct val="135000"/>
+              </a:lnSpc>
+              <a:spcAft>
+                <a:spcPts val="1000"/>
+              </a:spcAft>
+              <a:buClr>
+                <a:srgbClr val="0072CE"/>
+              </a:buClr>
+              <a:buSzPts val="1054"/>
+              <a:buFont typeface="Arial"/>
+              <a:buChar char="▪"/>
+            </a:pPr>
+            <a:r>
+              <a:rPr sz="1700">
+                <a:solidFill>
+                  <a:srgbClr val="0F1418"/>
+                </a:solidFill>
+                <a:latin typeface="Arial"/>
+              </a:rPr>
+              <a:t>Тогда обучение сводится к подсчету средних и дисперсий</a:t>
             </a:r>
           </a:p>
         </p:txBody>
@@ -23409,7 +23731,7 @@
                 </a:solidFill>
                 <a:latin typeface="Arial"/>
               </a:rPr>
-              <a:t>Две границы</a:t>
+              <a:t>Вся модель: три набора чисел</a:t>
             </a:r>
           </a:p>
         </p:txBody>
@@ -23460,7 +23782,7 @@
       </p:sp>
       <p:pic>
         <p:nvPicPr>
-          <p:cNvPr id="5" name="Picture 4" descr="nb_vs_knn.png"/>
+          <p:cNvPr id="5" name="Picture 4" descr="f_nb_params.png"/>
           <p:cNvPicPr>
             <a:picLocks noChangeAspect="1"/>
           </p:cNvPicPr>
@@ -23474,8 +23796,8 @@
         </p:blipFill>
         <p:spPr>
           <a:xfrm>
-            <a:off x="1483477" y="1737360"/>
-            <a:ext cx="9224741" cy="3730752"/>
+            <a:off x="5169481" y="1737360"/>
+            <a:ext cx="1852733" cy="1828799"/>
           </a:xfrm>
           <a:prstGeom prst="rect">
             <a:avLst/>
@@ -23490,8 +23812,8 @@
         </p:nvSpPr>
         <p:spPr>
           <a:xfrm>
-            <a:off x="822960" y="5724144"/>
-            <a:ext cx="10545775" cy="658368"/>
+            <a:off x="822960" y="3886199"/>
+            <a:ext cx="10545775" cy="2011680"/>
           </a:xfrm>
           <a:prstGeom prst="rect">
             <a:avLst/>
@@ -23514,18 +23836,68 @@
               <a:buClr>
                 <a:srgbClr val="0072CE"/>
               </a:buClr>
-              <a:buSzPts val="930"/>
+              <a:buSzPts val="1054"/>
               <a:buFont typeface="Arial"/>
               <a:buChar char="▪"/>
             </a:pPr>
             <a:r>
-              <a:rPr sz="1500">
+              <a:rPr sz="1700">
                 <a:solidFill>
                   <a:srgbClr val="0F1418"/>
                 </a:solidFill>
                 <a:latin typeface="Arial"/>
               </a:rPr>
-              <a:t>Слева безошибочная память и рваная граница, справа гладкая граница и ошибки уже на обучающей выборке</a:t>
+              <a:t>Доля класса, среднее и дисперсия каждого признака внутри класса</a:t>
+            </a:r>
+          </a:p>
+          <a:p>
+            <a:pPr marL="228600" indent="-228600">
+              <a:lnSpc>
+                <a:spcPct val="135000"/>
+              </a:lnSpc>
+              <a:spcAft>
+                <a:spcPts val="1000"/>
+              </a:spcAft>
+              <a:buClr>
+                <a:srgbClr val="0072CE"/>
+              </a:buClr>
+              <a:buSzPts val="1054"/>
+              <a:buFont typeface="Arial"/>
+              <a:buChar char="▪"/>
+            </a:pPr>
+            <a:r>
+              <a:rPr sz="1700">
+                <a:solidFill>
+                  <a:srgbClr val="0F1418"/>
+                </a:solidFill>
+                <a:latin typeface="Arial"/>
+              </a:rPr>
+              <a:t>Для трех классов и тринадцати признаков это 78 чисел плюс 3 доли</a:t>
+            </a:r>
+          </a:p>
+          <a:p>
+            <a:pPr marL="228600" indent="-228600">
+              <a:lnSpc>
+                <a:spcPct val="135000"/>
+              </a:lnSpc>
+              <a:spcAft>
+                <a:spcPts val="1000"/>
+              </a:spcAft>
+              <a:buClr>
+                <a:srgbClr val="0072CE"/>
+              </a:buClr>
+              <a:buSzPts val="1054"/>
+              <a:buFont typeface="Arial"/>
+              <a:buChar char="▪"/>
+            </a:pPr>
+            <a:r>
+              <a:rPr sz="1700">
+                <a:solidFill>
+                  <a:srgbClr val="0F1418"/>
+                </a:solidFill>
+                <a:latin typeface="Arial"/>
+              </a:rPr>
+              <a:t>Обучающая выборка после этого не нужна и выбрасывается</a:t>
             </a:r>
           </a:p>
         </p:txBody>
@@ -23707,7 +24079,7 @@
                 </a:solidFill>
                 <a:latin typeface="Arial"/>
               </a:rPr>
-              <a:t>Два метода, две крайности</a:t>
+              <a:t>Что метод выучил на наших винах</a:t>
             </a:r>
           </a:p>
         </p:txBody>
@@ -23756,144 +24128,40 @@
           </a:p>
         </p:txBody>
       </p:sp>
-      <p:sp>
-        <p:nvSpPr>
-          <p:cNvPr id="5" name="Rectangle 4"/>
-          <p:cNvSpPr/>
-          <p:nvPr/>
-        </p:nvSpPr>
+      <p:pic>
+        <p:nvPicPr>
+          <p:cNvPr id="5" name="Picture 4" descr="nb_densities.png"/>
+          <p:cNvPicPr>
+            <a:picLocks noChangeAspect="1"/>
+          </p:cNvPicPr>
+          <p:nvPr/>
+        </p:nvPicPr>
+        <p:blipFill>
+          <a:blip r:embed="rId2"/>
+          <a:stretch>
+            <a:fillRect/>
+          </a:stretch>
+        </p:blipFill>
         <p:spPr>
           <a:xfrm>
             <a:off x="822960" y="1737360"/>
-            <a:ext cx="4998567" cy="3566160"/>
-          </a:xfrm>
-          <a:prstGeom prst="rect">
-            <a:avLst/>
-          </a:prstGeom>
-          <a:solidFill>
-            <a:srgbClr val="E6F2FB"/>
-          </a:solidFill>
-          <a:ln>
-            <a:noFill/>
-          </a:ln>
-          <a:effectLst/>
-        </p:spPr>
-        <p:style>
-          <a:lnRef idx="1">
-            <a:schemeClr val="accent1"/>
-          </a:lnRef>
-          <a:fillRef idx="3">
-            <a:schemeClr val="accent1"/>
-          </a:fillRef>
-          <a:effectRef idx="2">
-            <a:schemeClr val="accent1"/>
-          </a:effectRef>
-          <a:fontRef idx="minor">
-            <a:schemeClr val="lt1"/>
-          </a:fontRef>
-        </p:style>
-        <p:txBody>
-          <a:bodyPr rtlCol="0" anchor="ctr"/>
-          <a:lstStyle/>
-          <a:p>
-            <a:pPr algn="ctr"/>
-          </a:p>
-        </p:txBody>
-      </p:sp>
-      <p:sp>
-        <p:nvSpPr>
-          <p:cNvPr id="6" name="Rectangle 5"/>
-          <p:cNvSpPr/>
-          <p:nvPr/>
-        </p:nvSpPr>
-        <p:spPr>
-          <a:xfrm>
-            <a:off x="822960" y="1737360"/>
-            <a:ext cx="4998567" cy="50800"/>
-          </a:xfrm>
-          <a:prstGeom prst="rect">
-            <a:avLst/>
-          </a:prstGeom>
-          <a:solidFill>
-            <a:srgbClr val="0072CE"/>
-          </a:solidFill>
-          <a:ln>
-            <a:noFill/>
-          </a:ln>
-          <a:effectLst/>
-        </p:spPr>
-        <p:style>
-          <a:lnRef idx="1">
-            <a:schemeClr val="accent1"/>
-          </a:lnRef>
-          <a:fillRef idx="3">
-            <a:schemeClr val="accent1"/>
-          </a:fillRef>
-          <a:effectRef idx="2">
-            <a:schemeClr val="accent1"/>
-          </a:effectRef>
-          <a:fontRef idx="minor">
-            <a:schemeClr val="lt1"/>
-          </a:fontRef>
-        </p:style>
-        <p:txBody>
-          <a:bodyPr rtlCol="0" anchor="ctr"/>
-          <a:lstStyle/>
-          <a:p>
-            <a:pPr algn="ctr"/>
-          </a:p>
-        </p:txBody>
-      </p:sp>
-      <p:sp>
-        <p:nvSpPr>
-          <p:cNvPr id="7" name="TextBox 6"/>
-          <p:cNvSpPr txBox="1"/>
-          <p:nvPr/>
-        </p:nvSpPr>
-        <p:spPr>
-          <a:xfrm>
-            <a:off x="1143000" y="2057400"/>
-            <a:ext cx="4358487" cy="411480"/>
-          </a:xfrm>
-          <a:prstGeom prst="rect">
-            <a:avLst/>
-          </a:prstGeom>
-          <a:noFill/>
-        </p:spPr>
-        <p:txBody>
-          <a:bodyPr wrap="square" anchor="t" lIns="0" rIns="0" tIns="0" bIns="0">
-            <a:spAutoFit/>
-          </a:bodyPr>
-          <a:lstStyle/>
-          <a:p>
-            <a:pPr algn="l">
-              <a:lnSpc>
-                <a:spcPct val="100000"/>
-              </a:lnSpc>
-              <a:buNone/>
-            </a:pPr>
-            <a:r>
-              <a:rPr sz="2000" b="1">
-                <a:solidFill>
-                  <a:srgbClr val="0F1418"/>
-                </a:solidFill>
-                <a:latin typeface="Arial"/>
-              </a:rPr>
-              <a:t>kNN</a:t>
-            </a:r>
-          </a:p>
-        </p:txBody>
-      </p:sp>
-      <p:sp>
-        <p:nvSpPr>
-          <p:cNvPr id="8" name="TextBox 7"/>
-          <p:cNvSpPr txBox="1"/>
-          <p:nvPr/>
-        </p:nvSpPr>
-        <p:spPr>
-          <a:xfrm>
-            <a:off x="1143000" y="2651760"/>
-            <a:ext cx="4358487" cy="2377440"/>
+            <a:ext cx="10545775" cy="3203827"/>
+          </a:xfrm>
+          <a:prstGeom prst="rect">
+            <a:avLst/>
+          </a:prstGeom>
+        </p:spPr>
+      </p:pic>
+      <p:sp>
+        <p:nvSpPr>
+          <p:cNvPr id="6" name="TextBox 5"/>
+          <p:cNvSpPr txBox="1"/>
+          <p:nvPr/>
+        </p:nvSpPr>
+        <p:spPr>
+          <a:xfrm>
+            <a:off x="822960" y="5197219"/>
+            <a:ext cx="10545775" cy="658368"/>
           </a:xfrm>
           <a:prstGeom prst="rect">
             <a:avLst/>
@@ -23916,301 +24184,25 @@
               <a:buClr>
                 <a:srgbClr val="0072CE"/>
               </a:buClr>
-              <a:buSzPts val="992"/>
+              <a:buSzPts val="930"/>
               <a:buFont typeface="Arial"/>
               <a:buChar char="▪"/>
             </a:pPr>
             <a:r>
-              <a:rPr sz="1600">
+              <a:rPr sz="1500">
                 <a:solidFill>
                   <a:srgbClr val="0F1418"/>
                 </a:solidFill>
                 <a:latin typeface="Arial"/>
               </a:rPr>
-              <a:t>Ничего не вычисляет заранее</a:t>
-            </a:r>
-          </a:p>
-          <a:p>
-            <a:pPr marL="228600" indent="-228600">
-              <a:lnSpc>
-                <a:spcPct val="135000"/>
-              </a:lnSpc>
-              <a:spcAft>
-                <a:spcPts val="1000"/>
-              </a:spcAft>
-              <a:buClr>
-                <a:srgbClr val="0072CE"/>
-              </a:buClr>
-              <a:buSzPts val="992"/>
-              <a:buFont typeface="Arial"/>
-              <a:buChar char="▪"/>
-            </a:pPr>
-            <a:r>
-              <a:rPr sz="1600">
-                <a:solidFill>
-                  <a:srgbClr val="0F1418"/>
-                </a:solidFill>
-                <a:latin typeface="Arial"/>
-              </a:rPr>
-              <a:t>Хранит всю выборку</a:t>
-            </a:r>
-          </a:p>
-          <a:p>
-            <a:pPr marL="228600" indent="-228600">
-              <a:lnSpc>
-                <a:spcPct val="135000"/>
-              </a:lnSpc>
-              <a:spcAft>
-                <a:spcPts val="1000"/>
-              </a:spcAft>
-              <a:buClr>
-                <a:srgbClr val="0072CE"/>
-              </a:buClr>
-              <a:buSzPts val="992"/>
-              <a:buFont typeface="Arial"/>
-              <a:buChar char="▪"/>
-            </a:pPr>
-            <a:r>
-              <a:rPr sz="1600">
-                <a:solidFill>
-                  <a:srgbClr val="0F1418"/>
-                </a:solidFill>
-                <a:latin typeface="Arial"/>
-              </a:rPr>
-              <a:t>Ломается от масштаба и лишних признаков</a:t>
-            </a:r>
-          </a:p>
-        </p:txBody>
-      </p:sp>
-      <p:sp>
-        <p:nvSpPr>
-          <p:cNvPr id="9" name="Rectangle 8"/>
-          <p:cNvSpPr/>
-          <p:nvPr/>
-        </p:nvSpPr>
-        <p:spPr>
-          <a:xfrm>
-            <a:off x="6370167" y="1737360"/>
-            <a:ext cx="4998567" cy="3566160"/>
-          </a:xfrm>
-          <a:prstGeom prst="rect">
-            <a:avLst/>
-          </a:prstGeom>
-          <a:solidFill>
-            <a:srgbClr val="E6F2FB"/>
-          </a:solidFill>
-          <a:ln>
-            <a:noFill/>
-          </a:ln>
-          <a:effectLst/>
-        </p:spPr>
-        <p:style>
-          <a:lnRef idx="1">
-            <a:schemeClr val="accent1"/>
-          </a:lnRef>
-          <a:fillRef idx="3">
-            <a:schemeClr val="accent1"/>
-          </a:fillRef>
-          <a:effectRef idx="2">
-            <a:schemeClr val="accent1"/>
-          </a:effectRef>
-          <a:fontRef idx="minor">
-            <a:schemeClr val="lt1"/>
-          </a:fontRef>
-        </p:style>
-        <p:txBody>
-          <a:bodyPr rtlCol="0" anchor="ctr"/>
-          <a:lstStyle/>
-          <a:p>
-            <a:pPr algn="ctr"/>
-          </a:p>
-        </p:txBody>
-      </p:sp>
-      <p:sp>
-        <p:nvSpPr>
-          <p:cNvPr id="10" name="Rectangle 9"/>
-          <p:cNvSpPr/>
-          <p:nvPr/>
-        </p:nvSpPr>
-        <p:spPr>
-          <a:xfrm>
-            <a:off x="6370167" y="1737360"/>
-            <a:ext cx="4998567" cy="50800"/>
-          </a:xfrm>
-          <a:prstGeom prst="rect">
-            <a:avLst/>
-          </a:prstGeom>
-          <a:solidFill>
-            <a:srgbClr val="0072CE"/>
-          </a:solidFill>
-          <a:ln>
-            <a:noFill/>
-          </a:ln>
-          <a:effectLst/>
-        </p:spPr>
-        <p:style>
-          <a:lnRef idx="1">
-            <a:schemeClr val="accent1"/>
-          </a:lnRef>
-          <a:fillRef idx="3">
-            <a:schemeClr val="accent1"/>
-          </a:fillRef>
-          <a:effectRef idx="2">
-            <a:schemeClr val="accent1"/>
-          </a:effectRef>
-          <a:fontRef idx="minor">
-            <a:schemeClr val="lt1"/>
-          </a:fontRef>
-        </p:style>
-        <p:txBody>
-          <a:bodyPr rtlCol="0" anchor="ctr"/>
-          <a:lstStyle/>
-          <a:p>
-            <a:pPr algn="ctr"/>
-          </a:p>
-        </p:txBody>
-      </p:sp>
-      <p:sp>
-        <p:nvSpPr>
-          <p:cNvPr id="11" name="TextBox 10"/>
-          <p:cNvSpPr txBox="1"/>
-          <p:nvPr/>
-        </p:nvSpPr>
-        <p:spPr>
-          <a:xfrm>
-            <a:off x="6690207" y="2057400"/>
-            <a:ext cx="4358487" cy="411480"/>
-          </a:xfrm>
-          <a:prstGeom prst="rect">
-            <a:avLst/>
-          </a:prstGeom>
-          <a:noFill/>
-        </p:spPr>
-        <p:txBody>
-          <a:bodyPr wrap="square" anchor="t" lIns="0" rIns="0" tIns="0" bIns="0">
-            <a:spAutoFit/>
-          </a:bodyPr>
-          <a:lstStyle/>
-          <a:p>
-            <a:pPr algn="l">
-              <a:lnSpc>
-                <a:spcPct val="100000"/>
-              </a:lnSpc>
-              <a:buNone/>
-            </a:pPr>
-            <a:r>
-              <a:rPr sz="2000" b="1">
-                <a:solidFill>
-                  <a:srgbClr val="0F1418"/>
-                </a:solidFill>
-                <a:latin typeface="Arial"/>
-              </a:rPr>
-              <a:t>Наивный Байес</a:t>
-            </a:r>
-          </a:p>
-        </p:txBody>
-      </p:sp>
-      <p:sp>
-        <p:nvSpPr>
-          <p:cNvPr id="12" name="TextBox 11"/>
-          <p:cNvSpPr txBox="1"/>
-          <p:nvPr/>
-        </p:nvSpPr>
-        <p:spPr>
-          <a:xfrm>
-            <a:off x="6690207" y="2651760"/>
-            <a:ext cx="4358487" cy="2377440"/>
-          </a:xfrm>
-          <a:prstGeom prst="rect">
-            <a:avLst/>
-          </a:prstGeom>
-          <a:noFill/>
-        </p:spPr>
-        <p:txBody>
-          <a:bodyPr wrap="square" lIns="0" rIns="0" tIns="0" bIns="0">
-            <a:spAutoFit/>
-          </a:bodyPr>
-          <a:lstStyle/>
-          <a:p>
-            <a:pPr marL="228600" indent="-228600">
-              <a:lnSpc>
-                <a:spcPct val="135000"/>
-              </a:lnSpc>
-              <a:spcAft>
-                <a:spcPts val="1000"/>
-              </a:spcAft>
-              <a:buClr>
-                <a:srgbClr val="0072CE"/>
-              </a:buClr>
-              <a:buSzPts val="992"/>
-              <a:buFont typeface="Arial"/>
-              <a:buChar char="▪"/>
-            </a:pPr>
-            <a:r>
-              <a:rPr sz="1600">
-                <a:solidFill>
-                  <a:srgbClr val="0F1418"/>
-                </a:solidFill>
-                <a:latin typeface="Arial"/>
-              </a:rPr>
-              <a:t>Считает несколько чисел</a:t>
-            </a:r>
-          </a:p>
-          <a:p>
-            <a:pPr marL="228600" indent="-228600">
-              <a:lnSpc>
-                <a:spcPct val="135000"/>
-              </a:lnSpc>
-              <a:spcAft>
-                <a:spcPts val="1000"/>
-              </a:spcAft>
-              <a:buClr>
-                <a:srgbClr val="0072CE"/>
-              </a:buClr>
-              <a:buSzPts val="992"/>
-              <a:buFont typeface="Arial"/>
-              <a:buChar char="▪"/>
-            </a:pPr>
-            <a:r>
-              <a:rPr sz="1600">
-                <a:solidFill>
-                  <a:srgbClr val="0F1418"/>
-                </a:solidFill>
-                <a:latin typeface="Arial"/>
-              </a:rPr>
-              <a:t>Выборку выбрасывает</a:t>
-            </a:r>
-          </a:p>
-          <a:p>
-            <a:pPr marL="228600" indent="-228600">
-              <a:lnSpc>
-                <a:spcPct val="135000"/>
-              </a:lnSpc>
-              <a:spcAft>
-                <a:spcPts val="1000"/>
-              </a:spcAft>
-              <a:buClr>
-                <a:srgbClr val="0072CE"/>
-              </a:buClr>
-              <a:buSzPts val="992"/>
-              <a:buFont typeface="Arial"/>
-              <a:buChar char="▪"/>
-            </a:pPr>
-            <a:r>
-              <a:rPr sz="1600">
-                <a:solidFill>
-                  <a:srgbClr val="0F1418"/>
-                </a:solidFill>
-                <a:latin typeface="Arial"/>
-              </a:rPr>
-              <a:t>Масштаб ему безразличен</a:t>
-            </a:r>
-          </a:p>
-        </p:txBody>
-      </p:sp>
-      <p:sp>
-        <p:nvSpPr>
-          <p:cNvPr id="13" name="TextBox 12"/>
+              <a:t>Три признака из тринадцати. По горизонтали значение признака, по вертикали плотность. Столбики это 124 обучающих вина, кривые это то, чем метод их заменил</a:t>
+            </a:r>
+          </a:p>
+        </p:txBody>
+      </p:sp>
+      <p:sp>
+        <p:nvSpPr>
+          <p:cNvPr id="7" name="TextBox 6"/>
           <p:cNvSpPr txBox="1"/>
           <p:nvPr/>
         </p:nvSpPr>
@@ -24250,7 +24242,7 @@
       </p:sp>
       <p:sp>
         <p:nvSpPr>
-          <p:cNvPr id="14" name="TextBox 13"/>
+          <p:cNvPr id="8" name="TextBox 7"/>
           <p:cNvSpPr txBox="1"/>
           <p:nvPr/>
         </p:nvSpPr>
@@ -24321,6 +24313,90 @@
             <a:avLst/>
           </a:prstGeom>
           <a:solidFill>
+            <a:srgbClr val="FFFFFF"/>
+          </a:solidFill>
+          <a:ln>
+            <a:noFill/>
+          </a:ln>
+          <a:effectLst/>
+        </p:spPr>
+        <p:style>
+          <a:lnRef idx="1">
+            <a:schemeClr val="accent1"/>
+          </a:lnRef>
+          <a:fillRef idx="3">
+            <a:schemeClr val="accent1"/>
+          </a:fillRef>
+          <a:effectRef idx="2">
+            <a:schemeClr val="accent1"/>
+          </a:effectRef>
+          <a:fontRef idx="minor">
+            <a:schemeClr val="lt1"/>
+          </a:fontRef>
+        </p:style>
+        <p:txBody>
+          <a:bodyPr rtlCol="0" anchor="ctr"/>
+          <a:lstStyle/>
+          <a:p>
+            <a:pPr algn="ctr"/>
+          </a:p>
+        </p:txBody>
+      </p:sp>
+      <p:sp>
+        <p:nvSpPr>
+          <p:cNvPr id="3" name="TextBox 2"/>
+          <p:cNvSpPr txBox="1"/>
+          <p:nvPr/>
+        </p:nvSpPr>
+        <p:spPr>
+          <a:xfrm>
+            <a:off x="822960" y="594360"/>
+            <a:ext cx="10545775" cy="822960"/>
+          </a:xfrm>
+          <a:prstGeom prst="rect">
+            <a:avLst/>
+          </a:prstGeom>
+          <a:noFill/>
+        </p:spPr>
+        <p:txBody>
+          <a:bodyPr wrap="square" anchor="t" lIns="0" rIns="0" tIns="0" bIns="0">
+            <a:spAutoFit/>
+          </a:bodyPr>
+          <a:lstStyle/>
+          <a:p>
+            <a:pPr algn="l">
+              <a:lnSpc>
+                <a:spcPct val="100000"/>
+              </a:lnSpc>
+              <a:buNone/>
+            </a:pPr>
+            <a:r>
+              <a:rPr sz="3200" b="1">
+                <a:solidFill>
+                  <a:srgbClr val="0F1418"/>
+                </a:solidFill>
+                <a:latin typeface="Arial"/>
+              </a:rPr>
+              <a:t>Две границы</a:t>
+            </a:r>
+          </a:p>
+        </p:txBody>
+      </p:sp>
+      <p:sp>
+        <p:nvSpPr>
+          <p:cNvPr id="4" name="Rectangle 3"/>
+          <p:cNvSpPr/>
+          <p:nvPr/>
+        </p:nvSpPr>
+        <p:spPr>
+          <a:xfrm>
+            <a:off x="822960" y="1307592"/>
+            <a:ext cx="1463040" cy="50800"/>
+          </a:xfrm>
+          <a:prstGeom prst="rect">
+            <a:avLst/>
+          </a:prstGeom>
+          <a:solidFill>
             <a:srgbClr val="0072CE"/>
           </a:solidFill>
           <a:ln>
@@ -24352,7 +24428,7 @@
       </p:sp>
       <p:pic>
         <p:nvPicPr>
-          <p:cNvPr id="3" name="Picture 2" descr="emblem_round.png"/>
+          <p:cNvPr id="5" name="Picture 4" descr="nb_vs_knn.png"/>
           <p:cNvPicPr>
             <a:picLocks noChangeAspect="1"/>
           </p:cNvPicPr>
@@ -24366,8 +24442,8 @@
         </p:blipFill>
         <p:spPr>
           <a:xfrm>
-            <a:off x="9814255" y="4480560"/>
-            <a:ext cx="1371600" cy="1371600"/>
+            <a:off x="1483477" y="1737360"/>
+            <a:ext cx="9224741" cy="3730752"/>
           </a:xfrm>
           <a:prstGeom prst="rect">
             <a:avLst/>
@@ -24376,14 +24452,62 @@
       </p:pic>
       <p:sp>
         <p:nvSpPr>
-          <p:cNvPr id="4" name="TextBox 3"/>
-          <p:cNvSpPr txBox="1"/>
-          <p:nvPr/>
-        </p:nvSpPr>
-        <p:spPr>
-          <a:xfrm>
-            <a:off x="822960" y="1828800"/>
-            <a:ext cx="2743200" cy="1463040"/>
+          <p:cNvPr id="6" name="TextBox 5"/>
+          <p:cNvSpPr txBox="1"/>
+          <p:nvPr/>
+        </p:nvSpPr>
+        <p:spPr>
+          <a:xfrm>
+            <a:off x="822960" y="5724144"/>
+            <a:ext cx="10545775" cy="658368"/>
+          </a:xfrm>
+          <a:prstGeom prst="rect">
+            <a:avLst/>
+          </a:prstGeom>
+          <a:noFill/>
+        </p:spPr>
+        <p:txBody>
+          <a:bodyPr wrap="square" lIns="0" rIns="0" tIns="0" bIns="0">
+            <a:spAutoFit/>
+          </a:bodyPr>
+          <a:lstStyle/>
+          <a:p>
+            <a:pPr marL="228600" indent="-228600">
+              <a:lnSpc>
+                <a:spcPct val="135000"/>
+              </a:lnSpc>
+              <a:spcAft>
+                <a:spcPts val="1000"/>
+              </a:spcAft>
+              <a:buClr>
+                <a:srgbClr val="0072CE"/>
+              </a:buClr>
+              <a:buSzPts val="930"/>
+              <a:buFont typeface="Arial"/>
+              <a:buChar char="▪"/>
+            </a:pPr>
+            <a:r>
+              <a:rPr sz="1500">
+                <a:solidFill>
+                  <a:srgbClr val="0F1418"/>
+                </a:solidFill>
+                <a:latin typeface="Arial"/>
+              </a:rPr>
+              <a:t>Слева безошибочная память и рваная граница, справа гладкая граница и ошибки уже на обучающей выборке</a:t>
+            </a:r>
+          </a:p>
+        </p:txBody>
+      </p:sp>
+      <p:sp>
+        <p:nvSpPr>
+          <p:cNvPr id="7" name="TextBox 6"/>
+          <p:cNvSpPr txBox="1"/>
+          <p:nvPr/>
+        </p:nvSpPr>
+        <p:spPr>
+          <a:xfrm>
+            <a:off x="822960" y="6291072"/>
+            <a:ext cx="8229600" cy="274320"/>
           </a:xfrm>
           <a:prstGeom prst="rect">
             <a:avLst/>
@@ -24403,27 +24527,27 @@
               <a:buNone/>
             </a:pPr>
             <a:r>
-              <a:rPr sz="9000" b="1">
-                <a:solidFill>
-                  <a:srgbClr val="FFFFFF"/>
-                </a:solidFill>
-                <a:latin typeface="Arial"/>
-              </a:rPr>
-              <a:t>06</a:t>
-            </a:r>
-          </a:p>
-        </p:txBody>
-      </p:sp>
-      <p:sp>
-        <p:nvSpPr>
-          <p:cNvPr id="5" name="TextBox 4"/>
-          <p:cNvSpPr txBox="1"/>
-          <p:nvPr/>
-        </p:nvSpPr>
-        <p:spPr>
-          <a:xfrm>
-            <a:off x="822960" y="3383280"/>
-            <a:ext cx="9601200" cy="1097280"/>
+              <a:rPr sz="1100" b="0">
+                <a:solidFill>
+                  <a:srgbClr val="6B7280"/>
+                </a:solidFill>
+                <a:latin typeface="Arial"/>
+              </a:rPr>
+              <a:t>Занятие 1 · Введение</a:t>
+            </a:r>
+          </a:p>
+        </p:txBody>
+      </p:sp>
+      <p:sp>
+        <p:nvSpPr>
+          <p:cNvPr id="8" name="TextBox 7"/>
+          <p:cNvSpPr txBox="1"/>
+          <p:nvPr/>
+        </p:nvSpPr>
+        <p:spPr>
+          <a:xfrm>
+            <a:off x="10454335" y="6291072"/>
+            <a:ext cx="914400" cy="274320"/>
           </a:xfrm>
           <a:prstGeom prst="rect">
             <a:avLst/>
@@ -24436,60 +24560,20 @@
           </a:bodyPr>
           <a:lstStyle/>
           <a:p>
-            <a:pPr algn="l">
-              <a:lnSpc>
-                <a:spcPct val="110000"/>
-              </a:lnSpc>
-              <a:buNone/>
-            </a:pPr>
-            <a:r>
-              <a:rPr sz="4000" b="1">
-                <a:solidFill>
-                  <a:srgbClr val="FFFFFF"/>
-                </a:solidFill>
-                <a:latin typeface="Arial"/>
-              </a:rPr>
-              <a:t>Как понять, что модель работает</a:t>
-            </a:r>
-          </a:p>
-        </p:txBody>
-      </p:sp>
-      <p:sp>
-        <p:nvSpPr>
-          <p:cNvPr id="6" name="TextBox 5"/>
-          <p:cNvSpPr txBox="1"/>
-          <p:nvPr/>
-        </p:nvSpPr>
-        <p:spPr>
-          <a:xfrm>
-            <a:off x="822960" y="4572000"/>
-            <a:ext cx="9601200" cy="548640"/>
-          </a:xfrm>
-          <a:prstGeom prst="rect">
-            <a:avLst/>
-          </a:prstGeom>
-          <a:noFill/>
-        </p:spPr>
-        <p:txBody>
-          <a:bodyPr wrap="square" anchor="t" lIns="0" rIns="0" tIns="0" bIns="0">
-            <a:spAutoFit/>
-          </a:bodyPr>
-          <a:lstStyle/>
-          <a:p>
-            <a:pPr algn="l">
-              <a:lnSpc>
-                <a:spcPct val="120000"/>
-              </a:lnSpc>
-              <a:buNone/>
-            </a:pPr>
-            <a:r>
-              <a:rPr sz="1800" b="0">
-                <a:solidFill>
-                  <a:srgbClr val="FFFFFF"/>
-                </a:solidFill>
-                <a:latin typeface="Arial"/>
-              </a:rPr>
-              <a:t>и почему одной цифры не хватает</a:t>
+            <a:pPr algn="r">
+              <a:lnSpc>
+                <a:spcPct val="100000"/>
+              </a:lnSpc>
+              <a:buNone/>
+            </a:pPr>
+            <a:r>
+              <a:rPr sz="1100" b="0">
+                <a:solidFill>
+                  <a:srgbClr val="6B7280"/>
+                </a:solidFill>
+                <a:latin typeface="Arial"/>
+              </a:rPr>
+              <a:t>44</a:t>
             </a:r>
           </a:p>
         </p:txBody>
@@ -24954,7 +25038,7 @@
                 </a:solidFill>
                 <a:latin typeface="Arial"/>
               </a:rPr>
-              <a:t>Accuracy: доля правильных ответов</a:t>
+              <a:t>Два метода, две крайности</a:t>
             </a:r>
           </a:p>
         </p:txBody>
@@ -25003,40 +25087,144 @@
           </a:p>
         </p:txBody>
       </p:sp>
-      <p:pic>
-        <p:nvPicPr>
-          <p:cNvPr id="5" name="Picture 4" descr="accuracy_table.png"/>
-          <p:cNvPicPr>
-            <a:picLocks noChangeAspect="1"/>
-          </p:cNvPicPr>
-          <p:nvPr/>
-        </p:nvPicPr>
-        <p:blipFill>
-          <a:blip r:embed="rId2"/>
-          <a:stretch>
-            <a:fillRect/>
-          </a:stretch>
-        </p:blipFill>
-        <p:spPr>
-          <a:xfrm>
-            <a:off x="1189991" y="1737360"/>
-            <a:ext cx="9811713" cy="3730751"/>
-          </a:xfrm>
-          <a:prstGeom prst="rect">
-            <a:avLst/>
-          </a:prstGeom>
-        </p:spPr>
-      </p:pic>
-      <p:sp>
-        <p:nvSpPr>
-          <p:cNvPr id="6" name="TextBox 5"/>
-          <p:cNvSpPr txBox="1"/>
-          <p:nvPr/>
-        </p:nvSpPr>
-        <p:spPr>
-          <a:xfrm>
-            <a:off x="822960" y="5724143"/>
-            <a:ext cx="10545775" cy="658368"/>
+      <p:sp>
+        <p:nvSpPr>
+          <p:cNvPr id="5" name="Rectangle 4"/>
+          <p:cNvSpPr/>
+          <p:nvPr/>
+        </p:nvSpPr>
+        <p:spPr>
+          <a:xfrm>
+            <a:off x="822960" y="1737360"/>
+            <a:ext cx="4998567" cy="3566160"/>
+          </a:xfrm>
+          <a:prstGeom prst="rect">
+            <a:avLst/>
+          </a:prstGeom>
+          <a:solidFill>
+            <a:srgbClr val="E6F2FB"/>
+          </a:solidFill>
+          <a:ln>
+            <a:noFill/>
+          </a:ln>
+          <a:effectLst/>
+        </p:spPr>
+        <p:style>
+          <a:lnRef idx="1">
+            <a:schemeClr val="accent1"/>
+          </a:lnRef>
+          <a:fillRef idx="3">
+            <a:schemeClr val="accent1"/>
+          </a:fillRef>
+          <a:effectRef idx="2">
+            <a:schemeClr val="accent1"/>
+          </a:effectRef>
+          <a:fontRef idx="minor">
+            <a:schemeClr val="lt1"/>
+          </a:fontRef>
+        </p:style>
+        <p:txBody>
+          <a:bodyPr rtlCol="0" anchor="ctr"/>
+          <a:lstStyle/>
+          <a:p>
+            <a:pPr algn="ctr"/>
+          </a:p>
+        </p:txBody>
+      </p:sp>
+      <p:sp>
+        <p:nvSpPr>
+          <p:cNvPr id="6" name="Rectangle 5"/>
+          <p:cNvSpPr/>
+          <p:nvPr/>
+        </p:nvSpPr>
+        <p:spPr>
+          <a:xfrm>
+            <a:off x="822960" y="1737360"/>
+            <a:ext cx="4998567" cy="50800"/>
+          </a:xfrm>
+          <a:prstGeom prst="rect">
+            <a:avLst/>
+          </a:prstGeom>
+          <a:solidFill>
+            <a:srgbClr val="0072CE"/>
+          </a:solidFill>
+          <a:ln>
+            <a:noFill/>
+          </a:ln>
+          <a:effectLst/>
+        </p:spPr>
+        <p:style>
+          <a:lnRef idx="1">
+            <a:schemeClr val="accent1"/>
+          </a:lnRef>
+          <a:fillRef idx="3">
+            <a:schemeClr val="accent1"/>
+          </a:fillRef>
+          <a:effectRef idx="2">
+            <a:schemeClr val="accent1"/>
+          </a:effectRef>
+          <a:fontRef idx="minor">
+            <a:schemeClr val="lt1"/>
+          </a:fontRef>
+        </p:style>
+        <p:txBody>
+          <a:bodyPr rtlCol="0" anchor="ctr"/>
+          <a:lstStyle/>
+          <a:p>
+            <a:pPr algn="ctr"/>
+          </a:p>
+        </p:txBody>
+      </p:sp>
+      <p:sp>
+        <p:nvSpPr>
+          <p:cNvPr id="7" name="TextBox 6"/>
+          <p:cNvSpPr txBox="1"/>
+          <p:nvPr/>
+        </p:nvSpPr>
+        <p:spPr>
+          <a:xfrm>
+            <a:off x="1143000" y="2057400"/>
+            <a:ext cx="4358487" cy="411480"/>
+          </a:xfrm>
+          <a:prstGeom prst="rect">
+            <a:avLst/>
+          </a:prstGeom>
+          <a:noFill/>
+        </p:spPr>
+        <p:txBody>
+          <a:bodyPr wrap="square" anchor="t" lIns="0" rIns="0" tIns="0" bIns="0">
+            <a:spAutoFit/>
+          </a:bodyPr>
+          <a:lstStyle/>
+          <a:p>
+            <a:pPr algn="l">
+              <a:lnSpc>
+                <a:spcPct val="100000"/>
+              </a:lnSpc>
+              <a:buNone/>
+            </a:pPr>
+            <a:r>
+              <a:rPr sz="2000" b="1">
+                <a:solidFill>
+                  <a:srgbClr val="0F1418"/>
+                </a:solidFill>
+                <a:latin typeface="Arial"/>
+              </a:rPr>
+              <a:t>kNN</a:t>
+            </a:r>
+          </a:p>
+        </p:txBody>
+      </p:sp>
+      <p:sp>
+        <p:nvSpPr>
+          <p:cNvPr id="8" name="TextBox 7"/>
+          <p:cNvSpPr txBox="1"/>
+          <p:nvPr/>
+        </p:nvSpPr>
+        <p:spPr>
+          <a:xfrm>
+            <a:off x="1143000" y="2651760"/>
+            <a:ext cx="4358487" cy="2377440"/>
           </a:xfrm>
           <a:prstGeom prst="rect">
             <a:avLst/>
@@ -25059,25 +25247,301 @@
               <a:buClr>
                 <a:srgbClr val="0072CE"/>
               </a:buClr>
-              <a:buSzPts val="930"/>
+              <a:buSzPts val="992"/>
               <a:buFont typeface="Arial"/>
               <a:buChar char="▪"/>
             </a:pPr>
             <a:r>
-              <a:rPr sz="1500">
+              <a:rPr sz="1600">
                 <a:solidFill>
                   <a:srgbClr val="0F1418"/>
                 </a:solidFill>
                 <a:latin typeface="Arial"/>
               </a:rPr>
-              <a:t>Самая простая метрика: сколько объектов угадали, деленное на то, сколько их всего. Числа посчитаны на наших винах</a:t>
-            </a:r>
-          </a:p>
-        </p:txBody>
-      </p:sp>
-      <p:sp>
-        <p:nvSpPr>
-          <p:cNvPr id="7" name="TextBox 6"/>
+              <a:t>Ничего не вычисляет заранее</a:t>
+            </a:r>
+          </a:p>
+          <a:p>
+            <a:pPr marL="228600" indent="-228600">
+              <a:lnSpc>
+                <a:spcPct val="135000"/>
+              </a:lnSpc>
+              <a:spcAft>
+                <a:spcPts val="1000"/>
+              </a:spcAft>
+              <a:buClr>
+                <a:srgbClr val="0072CE"/>
+              </a:buClr>
+              <a:buSzPts val="992"/>
+              <a:buFont typeface="Arial"/>
+              <a:buChar char="▪"/>
+            </a:pPr>
+            <a:r>
+              <a:rPr sz="1600">
+                <a:solidFill>
+                  <a:srgbClr val="0F1418"/>
+                </a:solidFill>
+                <a:latin typeface="Arial"/>
+              </a:rPr>
+              <a:t>Хранит всю выборку</a:t>
+            </a:r>
+          </a:p>
+          <a:p>
+            <a:pPr marL="228600" indent="-228600">
+              <a:lnSpc>
+                <a:spcPct val="135000"/>
+              </a:lnSpc>
+              <a:spcAft>
+                <a:spcPts val="1000"/>
+              </a:spcAft>
+              <a:buClr>
+                <a:srgbClr val="0072CE"/>
+              </a:buClr>
+              <a:buSzPts val="992"/>
+              <a:buFont typeface="Arial"/>
+              <a:buChar char="▪"/>
+            </a:pPr>
+            <a:r>
+              <a:rPr sz="1600">
+                <a:solidFill>
+                  <a:srgbClr val="0F1418"/>
+                </a:solidFill>
+                <a:latin typeface="Arial"/>
+              </a:rPr>
+              <a:t>Ломается от масштаба и лишних признаков</a:t>
+            </a:r>
+          </a:p>
+        </p:txBody>
+      </p:sp>
+      <p:sp>
+        <p:nvSpPr>
+          <p:cNvPr id="9" name="Rectangle 8"/>
+          <p:cNvSpPr/>
+          <p:nvPr/>
+        </p:nvSpPr>
+        <p:spPr>
+          <a:xfrm>
+            <a:off x="6370167" y="1737360"/>
+            <a:ext cx="4998567" cy="3566160"/>
+          </a:xfrm>
+          <a:prstGeom prst="rect">
+            <a:avLst/>
+          </a:prstGeom>
+          <a:solidFill>
+            <a:srgbClr val="E6F2FB"/>
+          </a:solidFill>
+          <a:ln>
+            <a:noFill/>
+          </a:ln>
+          <a:effectLst/>
+        </p:spPr>
+        <p:style>
+          <a:lnRef idx="1">
+            <a:schemeClr val="accent1"/>
+          </a:lnRef>
+          <a:fillRef idx="3">
+            <a:schemeClr val="accent1"/>
+          </a:fillRef>
+          <a:effectRef idx="2">
+            <a:schemeClr val="accent1"/>
+          </a:effectRef>
+          <a:fontRef idx="minor">
+            <a:schemeClr val="lt1"/>
+          </a:fontRef>
+        </p:style>
+        <p:txBody>
+          <a:bodyPr rtlCol="0" anchor="ctr"/>
+          <a:lstStyle/>
+          <a:p>
+            <a:pPr algn="ctr"/>
+          </a:p>
+        </p:txBody>
+      </p:sp>
+      <p:sp>
+        <p:nvSpPr>
+          <p:cNvPr id="10" name="Rectangle 9"/>
+          <p:cNvSpPr/>
+          <p:nvPr/>
+        </p:nvSpPr>
+        <p:spPr>
+          <a:xfrm>
+            <a:off x="6370167" y="1737360"/>
+            <a:ext cx="4998567" cy="50800"/>
+          </a:xfrm>
+          <a:prstGeom prst="rect">
+            <a:avLst/>
+          </a:prstGeom>
+          <a:solidFill>
+            <a:srgbClr val="0072CE"/>
+          </a:solidFill>
+          <a:ln>
+            <a:noFill/>
+          </a:ln>
+          <a:effectLst/>
+        </p:spPr>
+        <p:style>
+          <a:lnRef idx="1">
+            <a:schemeClr val="accent1"/>
+          </a:lnRef>
+          <a:fillRef idx="3">
+            <a:schemeClr val="accent1"/>
+          </a:fillRef>
+          <a:effectRef idx="2">
+            <a:schemeClr val="accent1"/>
+          </a:effectRef>
+          <a:fontRef idx="minor">
+            <a:schemeClr val="lt1"/>
+          </a:fontRef>
+        </p:style>
+        <p:txBody>
+          <a:bodyPr rtlCol="0" anchor="ctr"/>
+          <a:lstStyle/>
+          <a:p>
+            <a:pPr algn="ctr"/>
+          </a:p>
+        </p:txBody>
+      </p:sp>
+      <p:sp>
+        <p:nvSpPr>
+          <p:cNvPr id="11" name="TextBox 10"/>
+          <p:cNvSpPr txBox="1"/>
+          <p:nvPr/>
+        </p:nvSpPr>
+        <p:spPr>
+          <a:xfrm>
+            <a:off x="6690207" y="2057400"/>
+            <a:ext cx="4358487" cy="411480"/>
+          </a:xfrm>
+          <a:prstGeom prst="rect">
+            <a:avLst/>
+          </a:prstGeom>
+          <a:noFill/>
+        </p:spPr>
+        <p:txBody>
+          <a:bodyPr wrap="square" anchor="t" lIns="0" rIns="0" tIns="0" bIns="0">
+            <a:spAutoFit/>
+          </a:bodyPr>
+          <a:lstStyle/>
+          <a:p>
+            <a:pPr algn="l">
+              <a:lnSpc>
+                <a:spcPct val="100000"/>
+              </a:lnSpc>
+              <a:buNone/>
+            </a:pPr>
+            <a:r>
+              <a:rPr sz="2000" b="1">
+                <a:solidFill>
+                  <a:srgbClr val="0F1418"/>
+                </a:solidFill>
+                <a:latin typeface="Arial"/>
+              </a:rPr>
+              <a:t>Наивный Байес</a:t>
+            </a:r>
+          </a:p>
+        </p:txBody>
+      </p:sp>
+      <p:sp>
+        <p:nvSpPr>
+          <p:cNvPr id="12" name="TextBox 11"/>
+          <p:cNvSpPr txBox="1"/>
+          <p:nvPr/>
+        </p:nvSpPr>
+        <p:spPr>
+          <a:xfrm>
+            <a:off x="6690207" y="2651760"/>
+            <a:ext cx="4358487" cy="2377440"/>
+          </a:xfrm>
+          <a:prstGeom prst="rect">
+            <a:avLst/>
+          </a:prstGeom>
+          <a:noFill/>
+        </p:spPr>
+        <p:txBody>
+          <a:bodyPr wrap="square" lIns="0" rIns="0" tIns="0" bIns="0">
+            <a:spAutoFit/>
+          </a:bodyPr>
+          <a:lstStyle/>
+          <a:p>
+            <a:pPr marL="228600" indent="-228600">
+              <a:lnSpc>
+                <a:spcPct val="135000"/>
+              </a:lnSpc>
+              <a:spcAft>
+                <a:spcPts val="1000"/>
+              </a:spcAft>
+              <a:buClr>
+                <a:srgbClr val="0072CE"/>
+              </a:buClr>
+              <a:buSzPts val="992"/>
+              <a:buFont typeface="Arial"/>
+              <a:buChar char="▪"/>
+            </a:pPr>
+            <a:r>
+              <a:rPr sz="1600">
+                <a:solidFill>
+                  <a:srgbClr val="0F1418"/>
+                </a:solidFill>
+                <a:latin typeface="Arial"/>
+              </a:rPr>
+              <a:t>Считает несколько чисел</a:t>
+            </a:r>
+          </a:p>
+          <a:p>
+            <a:pPr marL="228600" indent="-228600">
+              <a:lnSpc>
+                <a:spcPct val="135000"/>
+              </a:lnSpc>
+              <a:spcAft>
+                <a:spcPts val="1000"/>
+              </a:spcAft>
+              <a:buClr>
+                <a:srgbClr val="0072CE"/>
+              </a:buClr>
+              <a:buSzPts val="992"/>
+              <a:buFont typeface="Arial"/>
+              <a:buChar char="▪"/>
+            </a:pPr>
+            <a:r>
+              <a:rPr sz="1600">
+                <a:solidFill>
+                  <a:srgbClr val="0F1418"/>
+                </a:solidFill>
+                <a:latin typeface="Arial"/>
+              </a:rPr>
+              <a:t>Выборку выбрасывает</a:t>
+            </a:r>
+          </a:p>
+          <a:p>
+            <a:pPr marL="228600" indent="-228600">
+              <a:lnSpc>
+                <a:spcPct val="135000"/>
+              </a:lnSpc>
+              <a:spcAft>
+                <a:spcPts val="1000"/>
+              </a:spcAft>
+              <a:buClr>
+                <a:srgbClr val="0072CE"/>
+              </a:buClr>
+              <a:buSzPts val="992"/>
+              <a:buFont typeface="Arial"/>
+              <a:buChar char="▪"/>
+            </a:pPr>
+            <a:r>
+              <a:rPr sz="1600">
+                <a:solidFill>
+                  <a:srgbClr val="0F1418"/>
+                </a:solidFill>
+                <a:latin typeface="Arial"/>
+              </a:rPr>
+              <a:t>Масштаб ему безразличен</a:t>
+            </a:r>
+          </a:p>
+        </p:txBody>
+      </p:sp>
+      <p:sp>
+        <p:nvSpPr>
+          <p:cNvPr id="13" name="TextBox 12"/>
           <p:cNvSpPr txBox="1"/>
           <p:nvPr/>
         </p:nvSpPr>
@@ -25117,7 +25581,7 @@
       </p:sp>
       <p:sp>
         <p:nvSpPr>
-          <p:cNvPr id="8" name="TextBox 7"/>
+          <p:cNvPr id="14" name="TextBox 13"/>
           <p:cNvSpPr txBox="1"/>
           <p:nvPr/>
         </p:nvSpPr>
@@ -25150,7 +25614,7 @@
                 </a:solidFill>
                 <a:latin typeface="Arial"/>
               </a:rPr>
-              <a:t>44</a:t>
+              <a:t>45</a:t>
             </a:r>
           </a:p>
         </p:txBody>
@@ -25188,90 +25652,6 @@
             <a:avLst/>
           </a:prstGeom>
           <a:solidFill>
-            <a:srgbClr val="FFFFFF"/>
-          </a:solidFill>
-          <a:ln>
-            <a:noFill/>
-          </a:ln>
-          <a:effectLst/>
-        </p:spPr>
-        <p:style>
-          <a:lnRef idx="1">
-            <a:schemeClr val="accent1"/>
-          </a:lnRef>
-          <a:fillRef idx="3">
-            <a:schemeClr val="accent1"/>
-          </a:fillRef>
-          <a:effectRef idx="2">
-            <a:schemeClr val="accent1"/>
-          </a:effectRef>
-          <a:fontRef idx="minor">
-            <a:schemeClr val="lt1"/>
-          </a:fontRef>
-        </p:style>
-        <p:txBody>
-          <a:bodyPr rtlCol="0" anchor="ctr"/>
-          <a:lstStyle/>
-          <a:p>
-            <a:pPr algn="ctr"/>
-          </a:p>
-        </p:txBody>
-      </p:sp>
-      <p:sp>
-        <p:nvSpPr>
-          <p:cNvPr id="3" name="TextBox 2"/>
-          <p:cNvSpPr txBox="1"/>
-          <p:nvPr/>
-        </p:nvSpPr>
-        <p:spPr>
-          <a:xfrm>
-            <a:off x="822960" y="594360"/>
-            <a:ext cx="10545775" cy="822960"/>
-          </a:xfrm>
-          <a:prstGeom prst="rect">
-            <a:avLst/>
-          </a:prstGeom>
-          <a:noFill/>
-        </p:spPr>
-        <p:txBody>
-          <a:bodyPr wrap="square" anchor="t" lIns="0" rIns="0" tIns="0" bIns="0">
-            <a:spAutoFit/>
-          </a:bodyPr>
-          <a:lstStyle/>
-          <a:p>
-            <a:pPr algn="l">
-              <a:lnSpc>
-                <a:spcPct val="100000"/>
-              </a:lnSpc>
-              <a:buNone/>
-            </a:pPr>
-            <a:r>
-              <a:rPr sz="3200" b="1">
-                <a:solidFill>
-                  <a:srgbClr val="0F1418"/>
-                </a:solidFill>
-                <a:latin typeface="Arial"/>
-              </a:rPr>
-              <a:t>Где accuracy перестает работать</a:t>
-            </a:r>
-          </a:p>
-        </p:txBody>
-      </p:sp>
-      <p:sp>
-        <p:nvSpPr>
-          <p:cNvPr id="4" name="Rectangle 3"/>
-          <p:cNvSpPr/>
-          <p:nvPr/>
-        </p:nvSpPr>
-        <p:spPr>
-          <a:xfrm>
-            <a:off x="822960" y="1307592"/>
-            <a:ext cx="1463040" cy="50800"/>
-          </a:xfrm>
-          <a:prstGeom prst="rect">
-            <a:avLst/>
-          </a:prstGeom>
-          <a:solidFill>
             <a:srgbClr val="0072CE"/>
           </a:solidFill>
           <a:ln>
@@ -25303,7 +25683,7 @@
       </p:sp>
       <p:pic>
         <p:nvPicPr>
-          <p:cNvPr id="5" name="Picture 4" descr="accuracy_fails.png"/>
+          <p:cNvPr id="3" name="Picture 2" descr="emblem_round.png"/>
           <p:cNvPicPr>
             <a:picLocks noChangeAspect="1"/>
           </p:cNvPicPr>
@@ -25317,8 +25697,8 @@
         </p:blipFill>
         <p:spPr>
           <a:xfrm>
-            <a:off x="984553" y="1737360"/>
-            <a:ext cx="10222589" cy="3730751"/>
+            <a:off x="9814255" y="4480560"/>
+            <a:ext cx="1371600" cy="1371600"/>
           </a:xfrm>
           <a:prstGeom prst="rect">
             <a:avLst/>
@@ -25327,62 +25707,94 @@
       </p:pic>
       <p:sp>
         <p:nvSpPr>
+          <p:cNvPr id="4" name="TextBox 3"/>
+          <p:cNvSpPr txBox="1"/>
+          <p:nvPr/>
+        </p:nvSpPr>
+        <p:spPr>
+          <a:xfrm>
+            <a:off x="822960" y="1828800"/>
+            <a:ext cx="2743200" cy="1463040"/>
+          </a:xfrm>
+          <a:prstGeom prst="rect">
+            <a:avLst/>
+          </a:prstGeom>
+          <a:noFill/>
+        </p:spPr>
+        <p:txBody>
+          <a:bodyPr wrap="square" anchor="t" lIns="0" rIns="0" tIns="0" bIns="0">
+            <a:spAutoFit/>
+          </a:bodyPr>
+          <a:lstStyle/>
+          <a:p>
+            <a:pPr algn="l">
+              <a:lnSpc>
+                <a:spcPct val="100000"/>
+              </a:lnSpc>
+              <a:buNone/>
+            </a:pPr>
+            <a:r>
+              <a:rPr sz="9000" b="1">
+                <a:solidFill>
+                  <a:srgbClr val="FFFFFF"/>
+                </a:solidFill>
+                <a:latin typeface="Arial"/>
+              </a:rPr>
+              <a:t>06</a:t>
+            </a:r>
+          </a:p>
+        </p:txBody>
+      </p:sp>
+      <p:sp>
+        <p:nvSpPr>
+          <p:cNvPr id="5" name="TextBox 4"/>
+          <p:cNvSpPr txBox="1"/>
+          <p:nvPr/>
+        </p:nvSpPr>
+        <p:spPr>
+          <a:xfrm>
+            <a:off x="822960" y="3383280"/>
+            <a:ext cx="9601200" cy="1097280"/>
+          </a:xfrm>
+          <a:prstGeom prst="rect">
+            <a:avLst/>
+          </a:prstGeom>
+          <a:noFill/>
+        </p:spPr>
+        <p:txBody>
+          <a:bodyPr wrap="square" anchor="t" lIns="0" rIns="0" tIns="0" bIns="0">
+            <a:spAutoFit/>
+          </a:bodyPr>
+          <a:lstStyle/>
+          <a:p>
+            <a:pPr algn="l">
+              <a:lnSpc>
+                <a:spcPct val="110000"/>
+              </a:lnSpc>
+              <a:buNone/>
+            </a:pPr>
+            <a:r>
+              <a:rPr sz="4000" b="1">
+                <a:solidFill>
+                  <a:srgbClr val="FFFFFF"/>
+                </a:solidFill>
+                <a:latin typeface="Arial"/>
+              </a:rPr>
+              <a:t>Как понять, что модель работает</a:t>
+            </a:r>
+          </a:p>
+        </p:txBody>
+      </p:sp>
+      <p:sp>
+        <p:nvSpPr>
           <p:cNvPr id="6" name="TextBox 5"/>
           <p:cNvSpPr txBox="1"/>
           <p:nvPr/>
         </p:nvSpPr>
         <p:spPr>
           <a:xfrm>
-            <a:off x="822960" y="5724143"/>
-            <a:ext cx="10545775" cy="658368"/>
-          </a:xfrm>
-          <a:prstGeom prst="rect">
-            <a:avLst/>
-          </a:prstGeom>
-          <a:noFill/>
-        </p:spPr>
-        <p:txBody>
-          <a:bodyPr wrap="square" lIns="0" rIns="0" tIns="0" bIns="0">
-            <a:spAutoFit/>
-          </a:bodyPr>
-          <a:lstStyle/>
-          <a:p>
-            <a:pPr marL="228600" indent="-228600">
-              <a:lnSpc>
-                <a:spcPct val="135000"/>
-              </a:lnSpc>
-              <a:spcAft>
-                <a:spcPts val="1000"/>
-              </a:spcAft>
-              <a:buClr>
-                <a:srgbClr val="0072CE"/>
-              </a:buClr>
-              <a:buSzPts val="930"/>
-              <a:buFont typeface="Arial"/>
-              <a:buChar char="▪"/>
-            </a:pPr>
-            <a:r>
-              <a:rPr sz="1500">
-                <a:solidFill>
-                  <a:srgbClr val="0F1418"/>
-                </a:solidFill>
-                <a:latin typeface="Arial"/>
-              </a:rPr>
-              <a:t>Как только классы перестают быть равными по размеру, доля правильных ответов говорит о распределении классов, а не о модели</a:t>
-            </a:r>
-          </a:p>
-        </p:txBody>
-      </p:sp>
-      <p:sp>
-        <p:nvSpPr>
-          <p:cNvPr id="7" name="TextBox 6"/>
-          <p:cNvSpPr txBox="1"/>
-          <p:nvPr/>
-        </p:nvSpPr>
-        <p:spPr>
-          <a:xfrm>
-            <a:off x="822960" y="6291072"/>
-            <a:ext cx="8229600" cy="274320"/>
+            <a:off x="822960" y="4572000"/>
+            <a:ext cx="9601200" cy="548640"/>
           </a:xfrm>
           <a:prstGeom prst="rect">
             <a:avLst/>
@@ -25397,58 +25809,18 @@
           <a:p>
             <a:pPr algn="l">
               <a:lnSpc>
-                <a:spcPct val="100000"/>
-              </a:lnSpc>
-              <a:buNone/>
-            </a:pPr>
-            <a:r>
-              <a:rPr sz="1100" b="0">
-                <a:solidFill>
-                  <a:srgbClr val="6B7280"/>
-                </a:solidFill>
-                <a:latin typeface="Arial"/>
-              </a:rPr>
-              <a:t>Занятие 1 · Введение</a:t>
-            </a:r>
-          </a:p>
-        </p:txBody>
-      </p:sp>
-      <p:sp>
-        <p:nvSpPr>
-          <p:cNvPr id="8" name="TextBox 7"/>
-          <p:cNvSpPr txBox="1"/>
-          <p:nvPr/>
-        </p:nvSpPr>
-        <p:spPr>
-          <a:xfrm>
-            <a:off x="10454335" y="6291072"/>
-            <a:ext cx="914400" cy="274320"/>
-          </a:xfrm>
-          <a:prstGeom prst="rect">
-            <a:avLst/>
-          </a:prstGeom>
-          <a:noFill/>
-        </p:spPr>
-        <p:txBody>
-          <a:bodyPr wrap="square" anchor="t" lIns="0" rIns="0" tIns="0" bIns="0">
-            <a:spAutoFit/>
-          </a:bodyPr>
-          <a:lstStyle/>
-          <a:p>
-            <a:pPr algn="r">
-              <a:lnSpc>
-                <a:spcPct val="100000"/>
-              </a:lnSpc>
-              <a:buNone/>
-            </a:pPr>
-            <a:r>
-              <a:rPr sz="1100" b="0">
-                <a:solidFill>
-                  <a:srgbClr val="6B7280"/>
-                </a:solidFill>
-                <a:latin typeface="Arial"/>
-              </a:rPr>
-              <a:t>45</a:t>
+                <a:spcPct val="120000"/>
+              </a:lnSpc>
+              <a:buNone/>
+            </a:pPr>
+            <a:r>
+              <a:rPr sz="1800" b="0">
+                <a:solidFill>
+                  <a:srgbClr val="FFFFFF"/>
+                </a:solidFill>
+                <a:latin typeface="Arial"/>
+              </a:rPr>
+              <a:t>и почему одной цифры не хватает</a:t>
             </a:r>
           </a:p>
         </p:txBody>
@@ -25550,7 +25922,7 @@
                 </a:solidFill>
                 <a:latin typeface="Arial"/>
               </a:rPr>
-              <a:t>Матрица ошибок</a:t>
+              <a:t>Accuracy: доля правильных ответов</a:t>
             </a:r>
           </a:p>
         </p:txBody>
@@ -25601,7 +25973,7 @@
       </p:sp>
       <p:pic>
         <p:nvPicPr>
-          <p:cNvPr id="5" name="Picture 4" descr="confusion.png"/>
+          <p:cNvPr id="5" name="Picture 4" descr="accuracy_table.png"/>
           <p:cNvPicPr>
             <a:picLocks noChangeAspect="1"/>
           </p:cNvPicPr>
@@ -25615,8 +25987,8 @@
         </p:blipFill>
         <p:spPr>
           <a:xfrm>
-            <a:off x="3038932" y="1737360"/>
-            <a:ext cx="6113831" cy="3730751"/>
+            <a:off x="1189991" y="1737360"/>
+            <a:ext cx="9811713" cy="3730751"/>
           </a:xfrm>
           <a:prstGeom prst="rect">
             <a:avLst/>
@@ -25666,7 +26038,7 @@
                 </a:solidFill>
                 <a:latin typeface="Arial"/>
               </a:rPr>
-              <a:t>Раскладываем предсказания на четыре клетки и смотрим, какие именно ошибки делает модель</a:t>
+              <a:t>Самая простая метрика: сколько объектов угадали, деленное на то, сколько их всего. Числа посчитаны на наших винах</a:t>
             </a:r>
           </a:p>
         </p:txBody>
@@ -25848,7 +26220,7 @@
                 </a:solidFill>
                 <a:latin typeface="Arial"/>
               </a:rPr>
-              <a:t>Precision и recall</a:t>
+              <a:t>Где accuracy перестает работать</a:t>
             </a:r>
           </a:p>
         </p:txBody>
@@ -25899,7 +26271,7 @@
       </p:sp>
       <p:pic>
         <p:nvPicPr>
-          <p:cNvPr id="5" name="Picture 4" descr="f_prec_rec.png"/>
+          <p:cNvPr id="5" name="Picture 4" descr="accuracy_fails.png"/>
           <p:cNvPicPr>
             <a:picLocks noChangeAspect="1"/>
           </p:cNvPicPr>
@@ -25913,8 +26285,8 @@
         </p:blipFill>
         <p:spPr>
           <a:xfrm>
-            <a:off x="4742033" y="1737360"/>
-            <a:ext cx="2707628" cy="1828800"/>
+            <a:off x="984553" y="1737360"/>
+            <a:ext cx="10222589" cy="3730751"/>
           </a:xfrm>
           <a:prstGeom prst="rect">
             <a:avLst/>
@@ -25929,8 +26301,8 @@
         </p:nvSpPr>
         <p:spPr>
           <a:xfrm>
-            <a:off x="822960" y="3886200"/>
-            <a:ext cx="10545775" cy="2011680"/>
+            <a:off x="822960" y="5724143"/>
+            <a:ext cx="10545775" cy="658368"/>
           </a:xfrm>
           <a:prstGeom prst="rect">
             <a:avLst/>
@@ -25953,93 +26325,18 @@
               <a:buClr>
                 <a:srgbClr val="0072CE"/>
               </a:buClr>
-              <a:buSzPts val="1054"/>
+              <a:buSzPts val="930"/>
               <a:buFont typeface="Arial"/>
               <a:buChar char="▪"/>
             </a:pPr>
             <a:r>
-              <a:rPr sz="1700">
+              <a:rPr sz="1500">
                 <a:solidFill>
                   <a:srgbClr val="0F1418"/>
                 </a:solidFill>
                 <a:latin typeface="Arial"/>
               </a:rPr>
-              <a:t>Precision: из тех, кого назвали больными, сколько правда больны</a:t>
-            </a:r>
-          </a:p>
-          <a:p>
-            <a:pPr marL="228600" indent="-228600">
-              <a:lnSpc>
-                <a:spcPct val="135000"/>
-              </a:lnSpc>
-              <a:spcAft>
-                <a:spcPts val="1000"/>
-              </a:spcAft>
-              <a:buClr>
-                <a:srgbClr val="0072CE"/>
-              </a:buClr>
-              <a:buSzPts val="1054"/>
-              <a:buFont typeface="Arial"/>
-              <a:buChar char="▪"/>
-            </a:pPr>
-            <a:r>
-              <a:rPr sz="1700">
-                <a:solidFill>
-                  <a:srgbClr val="0F1418"/>
-                </a:solidFill>
-                <a:latin typeface="Arial"/>
-              </a:rPr>
-              <a:t>Recall: из всех больных скольких мы нашли</a:t>
-            </a:r>
-          </a:p>
-          <a:p>
-            <a:pPr marL="228600" indent="-228600">
-              <a:lnSpc>
-                <a:spcPct val="135000"/>
-              </a:lnSpc>
-              <a:spcAft>
-                <a:spcPts val="1000"/>
-              </a:spcAft>
-              <a:buClr>
-                <a:srgbClr val="0072CE"/>
-              </a:buClr>
-              <a:buSzPts val="1054"/>
-              <a:buFont typeface="Arial"/>
-              <a:buChar char="▪"/>
-            </a:pPr>
-            <a:r>
-              <a:rPr sz="1700">
-                <a:solidFill>
-                  <a:srgbClr val="0F1418"/>
-                </a:solidFill>
-                <a:latin typeface="Arial"/>
-              </a:rPr>
-              <a:t>Между ними всегда компромисс</a:t>
-            </a:r>
-          </a:p>
-          <a:p>
-            <a:pPr marL="228600" indent="-228600">
-              <a:lnSpc>
-                <a:spcPct val="135000"/>
-              </a:lnSpc>
-              <a:spcAft>
-                <a:spcPts val="1000"/>
-              </a:spcAft>
-              <a:buClr>
-                <a:srgbClr val="0072CE"/>
-              </a:buClr>
-              <a:buSzPts val="1054"/>
-              <a:buFont typeface="Arial"/>
-              <a:buChar char="▪"/>
-            </a:pPr>
-            <a:r>
-              <a:rPr sz="1700">
-                <a:solidFill>
-                  <a:srgbClr val="0F1418"/>
-                </a:solidFill>
-                <a:latin typeface="Arial"/>
-              </a:rPr>
-              <a:t>Что важнее, определяет задача, а не алгоритм</a:t>
+              <a:t>Как только классы перестают быть равными по размеру, доля правильных ответов говорит о распределении классов, а не о модели</a:t>
             </a:r>
           </a:p>
         </p:txBody>
@@ -26221,7 +26518,7 @@
                 </a:solidFill>
                 <a:latin typeface="Arial"/>
               </a:rPr>
-              <a:t>Три бесполезные модели</a:t>
+              <a:t>Матрица ошибок</a:t>
             </a:r>
           </a:p>
         </p:txBody>
@@ -26272,7 +26569,7 @@
       </p:sp>
       <p:pic>
         <p:nvPicPr>
-          <p:cNvPr id="5" name="Picture 4" descr="precision_recall_cases.png"/>
+          <p:cNvPr id="5" name="Picture 4" descr="confusion.png"/>
           <p:cNvPicPr>
             <a:picLocks noChangeAspect="1"/>
           </p:cNvPicPr>
@@ -26286,8 +26583,8 @@
         </p:blipFill>
         <p:spPr>
           <a:xfrm>
-            <a:off x="1207998" y="1737360"/>
-            <a:ext cx="9775699" cy="3346704"/>
+            <a:off x="3038932" y="1737360"/>
+            <a:ext cx="6113831" cy="3730751"/>
           </a:xfrm>
           <a:prstGeom prst="rect">
             <a:avLst/>
@@ -26302,8 +26599,8 @@
         </p:nvSpPr>
         <p:spPr>
           <a:xfrm>
-            <a:off x="822960" y="5340096"/>
-            <a:ext cx="10545775" cy="1042416"/>
+            <a:off x="822960" y="5724143"/>
+            <a:ext cx="10545775" cy="658368"/>
           </a:xfrm>
           <a:prstGeom prst="rect">
             <a:avLst/>
@@ -26337,9 +26634,655 @@
                 </a:solidFill>
                 <a:latin typeface="Arial"/>
               </a:rPr>
-              <a:t>Ни одна не имеет хороших precision и recall одновременно</a:t>
-            </a:r>
-          </a:p>
+              <a:t>Раскладываем предсказания на четыре клетки и смотрим, какие именно ошибки делает модель</a:t>
+            </a:r>
+          </a:p>
+        </p:txBody>
+      </p:sp>
+      <p:sp>
+        <p:nvSpPr>
+          <p:cNvPr id="7" name="TextBox 6"/>
+          <p:cNvSpPr txBox="1"/>
+          <p:nvPr/>
+        </p:nvSpPr>
+        <p:spPr>
+          <a:xfrm>
+            <a:off x="822960" y="6291072"/>
+            <a:ext cx="8229600" cy="274320"/>
+          </a:xfrm>
+          <a:prstGeom prst="rect">
+            <a:avLst/>
+          </a:prstGeom>
+          <a:noFill/>
+        </p:spPr>
+        <p:txBody>
+          <a:bodyPr wrap="square" anchor="t" lIns="0" rIns="0" tIns="0" bIns="0">
+            <a:spAutoFit/>
+          </a:bodyPr>
+          <a:lstStyle/>
+          <a:p>
+            <a:pPr algn="l">
+              <a:lnSpc>
+                <a:spcPct val="100000"/>
+              </a:lnSpc>
+              <a:buNone/>
+            </a:pPr>
+            <a:r>
+              <a:rPr sz="1100" b="0">
+                <a:solidFill>
+                  <a:srgbClr val="6B7280"/>
+                </a:solidFill>
+                <a:latin typeface="Arial"/>
+              </a:rPr>
+              <a:t>Занятие 1 · Введение</a:t>
+            </a:r>
+          </a:p>
+        </p:txBody>
+      </p:sp>
+      <p:sp>
+        <p:nvSpPr>
+          <p:cNvPr id="8" name="TextBox 7"/>
+          <p:cNvSpPr txBox="1"/>
+          <p:nvPr/>
+        </p:nvSpPr>
+        <p:spPr>
+          <a:xfrm>
+            <a:off x="10454335" y="6291072"/>
+            <a:ext cx="914400" cy="274320"/>
+          </a:xfrm>
+          <a:prstGeom prst="rect">
+            <a:avLst/>
+          </a:prstGeom>
+          <a:noFill/>
+        </p:spPr>
+        <p:txBody>
+          <a:bodyPr wrap="square" anchor="t" lIns="0" rIns="0" tIns="0" bIns="0">
+            <a:spAutoFit/>
+          </a:bodyPr>
+          <a:lstStyle/>
+          <a:p>
+            <a:pPr algn="r">
+              <a:lnSpc>
+                <a:spcPct val="100000"/>
+              </a:lnSpc>
+              <a:buNone/>
+            </a:pPr>
+            <a:r>
+              <a:rPr sz="1100" b="0">
+                <a:solidFill>
+                  <a:srgbClr val="6B7280"/>
+                </a:solidFill>
+                <a:latin typeface="Arial"/>
+              </a:rPr>
+              <a:t>48</a:t>
+            </a:r>
+          </a:p>
+        </p:txBody>
+      </p:sp>
+    </p:spTree>
+  </p:cSld>
+  <p:clrMapOvr>
+    <a:masterClrMapping/>
+  </p:clrMapOvr>
+</p:sld>
+</file>
+
+<file path=ppt/slides/slide55.xml><?xml version="1.0" encoding="utf-8"?>
+<p:sld xmlns:a="http://schemas.openxmlformats.org/drawingml/2006/main" xmlns:p="http://schemas.openxmlformats.org/presentationml/2006/main" xmlns:r="http://schemas.openxmlformats.org/officeDocument/2006/relationships">
+  <p:cSld>
+    <p:spTree>
+      <p:nvGrpSpPr>
+        <p:cNvPr id="1" name=""/>
+        <p:cNvGrpSpPr/>
+        <p:nvPr/>
+      </p:nvGrpSpPr>
+      <p:grpSpPr/>
+      <p:sp>
+        <p:nvSpPr>
+          <p:cNvPr id="2" name="Rectangle 1"/>
+          <p:cNvSpPr/>
+          <p:nvPr/>
+        </p:nvSpPr>
+        <p:spPr>
+          <a:xfrm>
+            <a:off x="0" y="0"/>
+            <a:ext cx="12191695" cy="6858000"/>
+          </a:xfrm>
+          <a:prstGeom prst="rect">
+            <a:avLst/>
+          </a:prstGeom>
+          <a:solidFill>
+            <a:srgbClr val="FFFFFF"/>
+          </a:solidFill>
+          <a:ln>
+            <a:noFill/>
+          </a:ln>
+          <a:effectLst/>
+        </p:spPr>
+        <p:style>
+          <a:lnRef idx="1">
+            <a:schemeClr val="accent1"/>
+          </a:lnRef>
+          <a:fillRef idx="3">
+            <a:schemeClr val="accent1"/>
+          </a:fillRef>
+          <a:effectRef idx="2">
+            <a:schemeClr val="accent1"/>
+          </a:effectRef>
+          <a:fontRef idx="minor">
+            <a:schemeClr val="lt1"/>
+          </a:fontRef>
+        </p:style>
+        <p:txBody>
+          <a:bodyPr rtlCol="0" anchor="ctr"/>
+          <a:lstStyle/>
+          <a:p>
+            <a:pPr algn="ctr"/>
+          </a:p>
+        </p:txBody>
+      </p:sp>
+      <p:sp>
+        <p:nvSpPr>
+          <p:cNvPr id="3" name="TextBox 2"/>
+          <p:cNvSpPr txBox="1"/>
+          <p:nvPr/>
+        </p:nvSpPr>
+        <p:spPr>
+          <a:xfrm>
+            <a:off x="822960" y="594360"/>
+            <a:ext cx="10545775" cy="822960"/>
+          </a:xfrm>
+          <a:prstGeom prst="rect">
+            <a:avLst/>
+          </a:prstGeom>
+          <a:noFill/>
+        </p:spPr>
+        <p:txBody>
+          <a:bodyPr wrap="square" anchor="t" lIns="0" rIns="0" tIns="0" bIns="0">
+            <a:spAutoFit/>
+          </a:bodyPr>
+          <a:lstStyle/>
+          <a:p>
+            <a:pPr algn="l">
+              <a:lnSpc>
+                <a:spcPct val="100000"/>
+              </a:lnSpc>
+              <a:buNone/>
+            </a:pPr>
+            <a:r>
+              <a:rPr sz="3200" b="1">
+                <a:solidFill>
+                  <a:srgbClr val="0F1418"/>
+                </a:solidFill>
+                <a:latin typeface="Arial"/>
+              </a:rPr>
+              <a:t>Precision и recall</a:t>
+            </a:r>
+          </a:p>
+        </p:txBody>
+      </p:sp>
+      <p:sp>
+        <p:nvSpPr>
+          <p:cNvPr id="4" name="Rectangle 3"/>
+          <p:cNvSpPr/>
+          <p:nvPr/>
+        </p:nvSpPr>
+        <p:spPr>
+          <a:xfrm>
+            <a:off x="822960" y="1307592"/>
+            <a:ext cx="1463040" cy="50800"/>
+          </a:xfrm>
+          <a:prstGeom prst="rect">
+            <a:avLst/>
+          </a:prstGeom>
+          <a:solidFill>
+            <a:srgbClr val="0072CE"/>
+          </a:solidFill>
+          <a:ln>
+            <a:noFill/>
+          </a:ln>
+          <a:effectLst/>
+        </p:spPr>
+        <p:style>
+          <a:lnRef idx="1">
+            <a:schemeClr val="accent1"/>
+          </a:lnRef>
+          <a:fillRef idx="3">
+            <a:schemeClr val="accent1"/>
+          </a:fillRef>
+          <a:effectRef idx="2">
+            <a:schemeClr val="accent1"/>
+          </a:effectRef>
+          <a:fontRef idx="minor">
+            <a:schemeClr val="lt1"/>
+          </a:fontRef>
+        </p:style>
+        <p:txBody>
+          <a:bodyPr rtlCol="0" anchor="ctr"/>
+          <a:lstStyle/>
+          <a:p>
+            <a:pPr algn="ctr"/>
+          </a:p>
+        </p:txBody>
+      </p:sp>
+      <p:pic>
+        <p:nvPicPr>
+          <p:cNvPr id="5" name="Picture 4" descr="f_prec_rec.png"/>
+          <p:cNvPicPr>
+            <a:picLocks noChangeAspect="1"/>
+          </p:cNvPicPr>
+          <p:nvPr/>
+        </p:nvPicPr>
+        <p:blipFill>
+          <a:blip r:embed="rId2"/>
+          <a:stretch>
+            <a:fillRect/>
+          </a:stretch>
+        </p:blipFill>
+        <p:spPr>
+          <a:xfrm>
+            <a:off x="4742033" y="1737360"/>
+            <a:ext cx="2707628" cy="1828800"/>
+          </a:xfrm>
+          <a:prstGeom prst="rect">
+            <a:avLst/>
+          </a:prstGeom>
+        </p:spPr>
+      </p:pic>
+      <p:sp>
+        <p:nvSpPr>
+          <p:cNvPr id="6" name="TextBox 5"/>
+          <p:cNvSpPr txBox="1"/>
+          <p:nvPr/>
+        </p:nvSpPr>
+        <p:spPr>
+          <a:xfrm>
+            <a:off x="822960" y="3886200"/>
+            <a:ext cx="10545775" cy="2011680"/>
+          </a:xfrm>
+          <a:prstGeom prst="rect">
+            <a:avLst/>
+          </a:prstGeom>
+          <a:noFill/>
+        </p:spPr>
+        <p:txBody>
+          <a:bodyPr wrap="square" lIns="0" rIns="0" tIns="0" bIns="0">
+            <a:spAutoFit/>
+          </a:bodyPr>
+          <a:lstStyle/>
+          <a:p>
+            <a:pPr marL="228600" indent="-228600">
+              <a:lnSpc>
+                <a:spcPct val="135000"/>
+              </a:lnSpc>
+              <a:spcAft>
+                <a:spcPts val="1000"/>
+              </a:spcAft>
+              <a:buClr>
+                <a:srgbClr val="0072CE"/>
+              </a:buClr>
+              <a:buSzPts val="1054"/>
+              <a:buFont typeface="Arial"/>
+              <a:buChar char="▪"/>
+            </a:pPr>
+            <a:r>
+              <a:rPr sz="1700">
+                <a:solidFill>
+                  <a:srgbClr val="0F1418"/>
+                </a:solidFill>
+                <a:latin typeface="Arial"/>
+              </a:rPr>
+              <a:t>Precision: из тех, кого назвали больными, сколько правда больны</a:t>
+            </a:r>
+          </a:p>
+          <a:p>
+            <a:pPr marL="228600" indent="-228600">
+              <a:lnSpc>
+                <a:spcPct val="135000"/>
+              </a:lnSpc>
+              <a:spcAft>
+                <a:spcPts val="1000"/>
+              </a:spcAft>
+              <a:buClr>
+                <a:srgbClr val="0072CE"/>
+              </a:buClr>
+              <a:buSzPts val="1054"/>
+              <a:buFont typeface="Arial"/>
+              <a:buChar char="▪"/>
+            </a:pPr>
+            <a:r>
+              <a:rPr sz="1700">
+                <a:solidFill>
+                  <a:srgbClr val="0F1418"/>
+                </a:solidFill>
+                <a:latin typeface="Arial"/>
+              </a:rPr>
+              <a:t>Recall: из всех больных скольких мы нашли</a:t>
+            </a:r>
+          </a:p>
+          <a:p>
+            <a:pPr marL="228600" indent="-228600">
+              <a:lnSpc>
+                <a:spcPct val="135000"/>
+              </a:lnSpc>
+              <a:spcAft>
+                <a:spcPts val="1000"/>
+              </a:spcAft>
+              <a:buClr>
+                <a:srgbClr val="0072CE"/>
+              </a:buClr>
+              <a:buSzPts val="1054"/>
+              <a:buFont typeface="Arial"/>
+              <a:buChar char="▪"/>
+            </a:pPr>
+            <a:r>
+              <a:rPr sz="1700">
+                <a:solidFill>
+                  <a:srgbClr val="0F1418"/>
+                </a:solidFill>
+                <a:latin typeface="Arial"/>
+              </a:rPr>
+              <a:t>Между ними всегда компромисс</a:t>
+            </a:r>
+          </a:p>
+          <a:p>
+            <a:pPr marL="228600" indent="-228600">
+              <a:lnSpc>
+                <a:spcPct val="135000"/>
+              </a:lnSpc>
+              <a:spcAft>
+                <a:spcPts val="1000"/>
+              </a:spcAft>
+              <a:buClr>
+                <a:srgbClr val="0072CE"/>
+              </a:buClr>
+              <a:buSzPts val="1054"/>
+              <a:buFont typeface="Arial"/>
+              <a:buChar char="▪"/>
+            </a:pPr>
+            <a:r>
+              <a:rPr sz="1700">
+                <a:solidFill>
+                  <a:srgbClr val="0F1418"/>
+                </a:solidFill>
+                <a:latin typeface="Arial"/>
+              </a:rPr>
+              <a:t>Что важнее, определяет задача, а не алгоритм</a:t>
+            </a:r>
+          </a:p>
+        </p:txBody>
+      </p:sp>
+      <p:sp>
+        <p:nvSpPr>
+          <p:cNvPr id="7" name="TextBox 6"/>
+          <p:cNvSpPr txBox="1"/>
+          <p:nvPr/>
+        </p:nvSpPr>
+        <p:spPr>
+          <a:xfrm>
+            <a:off x="822960" y="6291072"/>
+            <a:ext cx="8229600" cy="274320"/>
+          </a:xfrm>
+          <a:prstGeom prst="rect">
+            <a:avLst/>
+          </a:prstGeom>
+          <a:noFill/>
+        </p:spPr>
+        <p:txBody>
+          <a:bodyPr wrap="square" anchor="t" lIns="0" rIns="0" tIns="0" bIns="0">
+            <a:spAutoFit/>
+          </a:bodyPr>
+          <a:lstStyle/>
+          <a:p>
+            <a:pPr algn="l">
+              <a:lnSpc>
+                <a:spcPct val="100000"/>
+              </a:lnSpc>
+              <a:buNone/>
+            </a:pPr>
+            <a:r>
+              <a:rPr sz="1100" b="0">
+                <a:solidFill>
+                  <a:srgbClr val="6B7280"/>
+                </a:solidFill>
+                <a:latin typeface="Arial"/>
+              </a:rPr>
+              <a:t>Занятие 1 · Введение</a:t>
+            </a:r>
+          </a:p>
+        </p:txBody>
+      </p:sp>
+      <p:sp>
+        <p:nvSpPr>
+          <p:cNvPr id="8" name="TextBox 7"/>
+          <p:cNvSpPr txBox="1"/>
+          <p:nvPr/>
+        </p:nvSpPr>
+        <p:spPr>
+          <a:xfrm>
+            <a:off x="10454335" y="6291072"/>
+            <a:ext cx="914400" cy="274320"/>
+          </a:xfrm>
+          <a:prstGeom prst="rect">
+            <a:avLst/>
+          </a:prstGeom>
+          <a:noFill/>
+        </p:spPr>
+        <p:txBody>
+          <a:bodyPr wrap="square" anchor="t" lIns="0" rIns="0" tIns="0" bIns="0">
+            <a:spAutoFit/>
+          </a:bodyPr>
+          <a:lstStyle/>
+          <a:p>
+            <a:pPr algn="r">
+              <a:lnSpc>
+                <a:spcPct val="100000"/>
+              </a:lnSpc>
+              <a:buNone/>
+            </a:pPr>
+            <a:r>
+              <a:rPr sz="1100" b="0">
+                <a:solidFill>
+                  <a:srgbClr val="6B7280"/>
+                </a:solidFill>
+                <a:latin typeface="Arial"/>
+              </a:rPr>
+              <a:t>49</a:t>
+            </a:r>
+          </a:p>
+        </p:txBody>
+      </p:sp>
+    </p:spTree>
+  </p:cSld>
+  <p:clrMapOvr>
+    <a:masterClrMapping/>
+  </p:clrMapOvr>
+</p:sld>
+</file>
+
+<file path=ppt/slides/slide56.xml><?xml version="1.0" encoding="utf-8"?>
+<p:sld xmlns:a="http://schemas.openxmlformats.org/drawingml/2006/main" xmlns:p="http://schemas.openxmlformats.org/presentationml/2006/main" xmlns:r="http://schemas.openxmlformats.org/officeDocument/2006/relationships">
+  <p:cSld>
+    <p:spTree>
+      <p:nvGrpSpPr>
+        <p:cNvPr id="1" name=""/>
+        <p:cNvGrpSpPr/>
+        <p:nvPr/>
+      </p:nvGrpSpPr>
+      <p:grpSpPr/>
+      <p:sp>
+        <p:nvSpPr>
+          <p:cNvPr id="2" name="Rectangle 1"/>
+          <p:cNvSpPr/>
+          <p:nvPr/>
+        </p:nvSpPr>
+        <p:spPr>
+          <a:xfrm>
+            <a:off x="0" y="0"/>
+            <a:ext cx="12191695" cy="6858000"/>
+          </a:xfrm>
+          <a:prstGeom prst="rect">
+            <a:avLst/>
+          </a:prstGeom>
+          <a:solidFill>
+            <a:srgbClr val="FFFFFF"/>
+          </a:solidFill>
+          <a:ln>
+            <a:noFill/>
+          </a:ln>
+          <a:effectLst/>
+        </p:spPr>
+        <p:style>
+          <a:lnRef idx="1">
+            <a:schemeClr val="accent1"/>
+          </a:lnRef>
+          <a:fillRef idx="3">
+            <a:schemeClr val="accent1"/>
+          </a:fillRef>
+          <a:effectRef idx="2">
+            <a:schemeClr val="accent1"/>
+          </a:effectRef>
+          <a:fontRef idx="minor">
+            <a:schemeClr val="lt1"/>
+          </a:fontRef>
+        </p:style>
+        <p:txBody>
+          <a:bodyPr rtlCol="0" anchor="ctr"/>
+          <a:lstStyle/>
+          <a:p>
+            <a:pPr algn="ctr"/>
+          </a:p>
+        </p:txBody>
+      </p:sp>
+      <p:sp>
+        <p:nvSpPr>
+          <p:cNvPr id="3" name="TextBox 2"/>
+          <p:cNvSpPr txBox="1"/>
+          <p:nvPr/>
+        </p:nvSpPr>
+        <p:spPr>
+          <a:xfrm>
+            <a:off x="822960" y="594360"/>
+            <a:ext cx="10545775" cy="822960"/>
+          </a:xfrm>
+          <a:prstGeom prst="rect">
+            <a:avLst/>
+          </a:prstGeom>
+          <a:noFill/>
+        </p:spPr>
+        <p:txBody>
+          <a:bodyPr wrap="square" anchor="t" lIns="0" rIns="0" tIns="0" bIns="0">
+            <a:spAutoFit/>
+          </a:bodyPr>
+          <a:lstStyle/>
+          <a:p>
+            <a:pPr algn="l">
+              <a:lnSpc>
+                <a:spcPct val="100000"/>
+              </a:lnSpc>
+              <a:buNone/>
+            </a:pPr>
+            <a:r>
+              <a:rPr sz="3200" b="1">
+                <a:solidFill>
+                  <a:srgbClr val="0F1418"/>
+                </a:solidFill>
+                <a:latin typeface="Arial"/>
+              </a:rPr>
+              <a:t>Три бесполезные модели</a:t>
+            </a:r>
+          </a:p>
+        </p:txBody>
+      </p:sp>
+      <p:sp>
+        <p:nvSpPr>
+          <p:cNvPr id="4" name="Rectangle 3"/>
+          <p:cNvSpPr/>
+          <p:nvPr/>
+        </p:nvSpPr>
+        <p:spPr>
+          <a:xfrm>
+            <a:off x="822960" y="1307592"/>
+            <a:ext cx="1463040" cy="50800"/>
+          </a:xfrm>
+          <a:prstGeom prst="rect">
+            <a:avLst/>
+          </a:prstGeom>
+          <a:solidFill>
+            <a:srgbClr val="0072CE"/>
+          </a:solidFill>
+          <a:ln>
+            <a:noFill/>
+          </a:ln>
+          <a:effectLst/>
+        </p:spPr>
+        <p:style>
+          <a:lnRef idx="1">
+            <a:schemeClr val="accent1"/>
+          </a:lnRef>
+          <a:fillRef idx="3">
+            <a:schemeClr val="accent1"/>
+          </a:fillRef>
+          <a:effectRef idx="2">
+            <a:schemeClr val="accent1"/>
+          </a:effectRef>
+          <a:fontRef idx="minor">
+            <a:schemeClr val="lt1"/>
+          </a:fontRef>
+        </p:style>
+        <p:txBody>
+          <a:bodyPr rtlCol="0" anchor="ctr"/>
+          <a:lstStyle/>
+          <a:p>
+            <a:pPr algn="ctr"/>
+          </a:p>
+        </p:txBody>
+      </p:sp>
+      <p:pic>
+        <p:nvPicPr>
+          <p:cNvPr id="5" name="Picture 4" descr="precision_recall_cases.png"/>
+          <p:cNvPicPr>
+            <a:picLocks noChangeAspect="1"/>
+          </p:cNvPicPr>
+          <p:nvPr/>
+        </p:nvPicPr>
+        <p:blipFill>
+          <a:blip r:embed="rId2"/>
+          <a:stretch>
+            <a:fillRect/>
+          </a:stretch>
+        </p:blipFill>
+        <p:spPr>
+          <a:xfrm>
+            <a:off x="1207998" y="1737360"/>
+            <a:ext cx="9775699" cy="3346704"/>
+          </a:xfrm>
+          <a:prstGeom prst="rect">
+            <a:avLst/>
+          </a:prstGeom>
+        </p:spPr>
+      </p:pic>
+      <p:sp>
+        <p:nvSpPr>
+          <p:cNvPr id="6" name="TextBox 5"/>
+          <p:cNvSpPr txBox="1"/>
+          <p:nvPr/>
+        </p:nvSpPr>
+        <p:spPr>
+          <a:xfrm>
+            <a:off x="822960" y="5340096"/>
+            <a:ext cx="10545775" cy="1042416"/>
+          </a:xfrm>
+          <a:prstGeom prst="rect">
+            <a:avLst/>
+          </a:prstGeom>
+          <a:noFill/>
+        </p:spPr>
+        <p:txBody>
+          <a:bodyPr wrap="square" lIns="0" rIns="0" tIns="0" bIns="0">
+            <a:spAutoFit/>
+          </a:bodyPr>
+          <a:lstStyle/>
           <a:p>
             <a:pPr marL="228600" indent="-228600">
               <a:lnSpc>
@@ -26362,6 +27305,31 @@
                 </a:solidFill>
                 <a:latin typeface="Arial"/>
               </a:rPr>
+              <a:t>Ни одна не имеет хороших precision и recall одновременно</a:t>
+            </a:r>
+          </a:p>
+          <a:p>
+            <a:pPr marL="228600" indent="-228600">
+              <a:lnSpc>
+                <a:spcPct val="135000"/>
+              </a:lnSpc>
+              <a:spcAft>
+                <a:spcPts val="1000"/>
+              </a:spcAft>
+              <a:buClr>
+                <a:srgbClr val="0072CE"/>
+              </a:buClr>
+              <a:buSzPts val="930"/>
+              <a:buFont typeface="Arial"/>
+              <a:buChar char="▪"/>
+            </a:pPr>
+            <a:r>
+              <a:rPr sz="1500">
+                <a:solidFill>
+                  <a:srgbClr val="0F1418"/>
+                </a:solidFill>
+                <a:latin typeface="Arial"/>
+              </a:rPr>
               <a:t>Именно поэтому смотрят на обе метрики, а не на одну</a:t>
             </a:r>
           </a:p>
@@ -26442,7 +27410,7 @@
                 </a:solidFill>
                 <a:latin typeface="Arial"/>
               </a:rPr>
-              <a:t>48</a:t>
+              <a:t>50</a:t>
             </a:r>
           </a:p>
         </p:txBody>
@@ -26455,7 +27423,7 @@
 </p:sld>
 </file>
 
-<file path=ppt/slides/slide55.xml><?xml version="1.0" encoding="utf-8"?>
+<file path=ppt/slides/slide57.xml><?xml version="1.0" encoding="utf-8"?>
 <p:sld xmlns:a="http://schemas.openxmlformats.org/drawingml/2006/main" xmlns:p="http://schemas.openxmlformats.org/presentationml/2006/main" xmlns:r="http://schemas.openxmlformats.org/officeDocument/2006/relationships">
   <p:cSld>
     <p:spTree>

--- a/classes/week_01_intro/lecture_01.pptx
+++ b/classes/week_01_intro/lecture_01.pptx
@@ -29239,7 +29239,7 @@
         <a:srgbClr val="F79646"/>
       </a:accent6>
       <a:hlink>
-        <a:srgbClr val="0000FF"/>
+        <a:srgbClr val="4DA3E0"/>
       </a:hlink>
       <a:folHlink>
         <a:srgbClr val="800080"/>
